--- a/BookMora_Presentacion.pptx
+++ b/BookMora_Presentacion.pptx
@@ -2065,8 +2065,8 @@
         </p:nvSpPr>
         <p:spPr>
           <a:xfrm>
-            <a:off x="502920" y="1005840"/>
-            <a:ext cx="8229600" cy="1005840"/>
+            <a:off x="502920" y="822960"/>
+            <a:ext cx="8229600" cy="914400"/>
           </a:xfrm>
           <a:prstGeom prst="rect">
             <a:avLst/>
@@ -2104,8 +2104,8 @@
         </p:nvSpPr>
         <p:spPr>
           <a:xfrm>
-            <a:off x="502920" y="2057400"/>
-            <a:ext cx="8229600" cy="502920"/>
+            <a:off x="502920" y="1783080"/>
+            <a:ext cx="8229600" cy="457200"/>
           </a:xfrm>
           <a:prstGeom prst="rect">
             <a:avLst/>
@@ -2121,7 +2121,7 @@
               <a:buNone/>
             </a:pPr>
             <a:r>
-              <a:rPr lang="en-US" sz="2200" dirty="0">
+              <a:rPr lang="en-US" sz="2000" i="1" dirty="0">
                 <a:solidFill>
                   <a:srgbClr val="2E75B6"/>
                 </a:solidFill>
@@ -2129,45 +2129,22 @@
                 <a:ea typeface="Calibri" pitchFamily="34" charset="-122"/>
                 <a:cs typeface="Calibri" pitchFamily="34" charset="-120"/>
               </a:rPr>
-              <a:t>API REST con Spring Boot</a:t>
+              <a:t>Plataforma Web de Cuentos Cortos</a:t>
             </a:r>
-            <a:endParaRPr lang="en-US" sz="2200" dirty="0"/>
+            <a:endParaRPr lang="en-US" sz="2000" dirty="0"/>
           </a:p>
         </p:txBody>
       </p:sp>
       <p:sp>
         <p:nvSpPr>
-          <p:cNvPr id="5" name="Shape 3"/>
+          <p:cNvPr id="5" name="Text 3"/>
           <p:cNvSpPr/>
           <p:nvPr/>
         </p:nvSpPr>
         <p:spPr>
           <a:xfrm>
-            <a:off x="502920" y="2651760"/>
-            <a:ext cx="5029200" cy="0"/>
-          </a:xfrm>
-          <a:prstGeom prst="line">
-            <a:avLst/>
-          </a:prstGeom>
-          <a:noFill/>
-          <a:ln w="12700">
-            <a:solidFill>
-              <a:srgbClr val="888888"/>
-            </a:solidFill>
-            <a:prstDash val="solid"/>
-          </a:ln>
-        </p:spPr>
-      </p:sp>
-      <p:sp>
-        <p:nvSpPr>
-          <p:cNvPr id="6" name="Text 4"/>
-          <p:cNvSpPr/>
-          <p:nvPr/>
-        </p:nvSpPr>
-        <p:spPr>
-          <a:xfrm>
-            <a:off x="502920" y="2788920"/>
-            <a:ext cx="7315200" cy="347472"/>
+            <a:off x="502920" y="2240280"/>
+            <a:ext cx="8229600" cy="384048"/>
           </a:xfrm>
           <a:prstGeom prst="rect">
             <a:avLst/>
@@ -2183,21 +2160,7 @@
               <a:buNone/>
             </a:pPr>
             <a:r>
-              <a:rPr lang="en-US" sz="1300" b="1" dirty="0">
-                <a:solidFill>
-                  <a:srgbClr val="1A1A1A"/>
-                </a:solidFill>
-                <a:latin typeface="Calibri" pitchFamily="34" charset="0"/>
-                <a:ea typeface="Calibri" pitchFamily="34" charset="-122"/>
-                <a:cs typeface="Calibri" pitchFamily="34" charset="-120"/>
-              </a:rPr>
-              <a:t>Estudiante: </a:t>
-            </a:r>
-            <a:pPr algn="l" indent="0" marL="0">
-              <a:buNone/>
-            </a:pPr>
-            <a:r>
-              <a:rPr lang="en-US" sz="1300" dirty="0">
+              <a:rPr lang="en-US" sz="1600" dirty="0">
                 <a:solidFill>
                   <a:srgbClr val="888888"/>
                 </a:solidFill>
@@ -2205,11 +2168,34 @@
                 <a:ea typeface="Calibri" pitchFamily="34" charset="-122"/>
                 <a:cs typeface="Calibri" pitchFamily="34" charset="-120"/>
               </a:rPr>
-              <a:t>Maria Jose Mora Mora</a:t>
+              <a:t>API REST con Spring Boot</a:t>
             </a:r>
-            <a:endParaRPr lang="en-US" sz="1300" dirty="0"/>
+            <a:endParaRPr lang="en-US" sz="1600" dirty="0"/>
           </a:p>
         </p:txBody>
+      </p:sp>
+      <p:sp>
+        <p:nvSpPr>
+          <p:cNvPr id="6" name="Shape 4"/>
+          <p:cNvSpPr/>
+          <p:nvPr/>
+        </p:nvSpPr>
+        <p:spPr>
+          <a:xfrm>
+            <a:off x="502920" y="2743200"/>
+            <a:ext cx="5029200" cy="0"/>
+          </a:xfrm>
+          <a:prstGeom prst="line">
+            <a:avLst/>
+          </a:prstGeom>
+          <a:noFill/>
+          <a:ln w="12700">
+            <a:solidFill>
+              <a:srgbClr val="CCCCCC"/>
+            </a:solidFill>
+            <a:prstDash val="solid"/>
+          </a:ln>
+        </p:spPr>
       </p:sp>
       <p:sp>
         <p:nvSpPr>
@@ -2219,8 +2205,8 @@
         </p:nvSpPr>
         <p:spPr>
           <a:xfrm>
-            <a:off x="502920" y="3172968"/>
-            <a:ext cx="7315200" cy="347472"/>
+            <a:off x="502920" y="2834640"/>
+            <a:ext cx="8229600" cy="310896"/>
           </a:xfrm>
           <a:prstGeom prst="rect">
             <a:avLst/>
@@ -2236,7 +2222,7 @@
               <a:buNone/>
             </a:pPr>
             <a:r>
-              <a:rPr lang="en-US" sz="1300" b="1" dirty="0">
+              <a:rPr lang="en-US" sz="1200" b="1" dirty="0">
                 <a:solidFill>
                   <a:srgbClr val="1A1A1A"/>
                 </a:solidFill>
@@ -2244,13 +2230,13 @@
                 <a:ea typeface="Calibri" pitchFamily="34" charset="-122"/>
                 <a:cs typeface="Calibri" pitchFamily="34" charset="-120"/>
               </a:rPr>
-              <a:t>Materia: </a:t>
+              <a:t>Estudiante:  </a:t>
             </a:r>
             <a:pPr algn="l" indent="0" marL="0">
               <a:buNone/>
             </a:pPr>
             <a:r>
-              <a:rPr lang="en-US" sz="1300" dirty="0">
+              <a:rPr lang="en-US" sz="1200" dirty="0">
                 <a:solidFill>
                   <a:srgbClr val="888888"/>
                 </a:solidFill>
@@ -2258,9 +2244,9 @@
                 <a:ea typeface="Calibri" pitchFamily="34" charset="-122"/>
                 <a:cs typeface="Calibri" pitchFamily="34" charset="-120"/>
               </a:rPr>
-              <a:t>Metodologia de Software</a:t>
+              <a:t>Maria Jose Mora Mora</a:t>
             </a:r>
-            <a:endParaRPr lang="en-US" sz="1300" dirty="0"/>
+            <a:endParaRPr lang="en-US" sz="1200" dirty="0"/>
           </a:p>
         </p:txBody>
       </p:sp>
@@ -2272,8 +2258,8 @@
         </p:nvSpPr>
         <p:spPr>
           <a:xfrm>
-            <a:off x="502920" y="3557016"/>
-            <a:ext cx="7315200" cy="347472"/>
+            <a:off x="502920" y="3182112"/>
+            <a:ext cx="8229600" cy="310896"/>
           </a:xfrm>
           <a:prstGeom prst="rect">
             <a:avLst/>
@@ -2289,7 +2275,7 @@
               <a:buNone/>
             </a:pPr>
             <a:r>
-              <a:rPr lang="en-US" sz="1300" b="1" dirty="0">
+              <a:rPr lang="en-US" sz="1200" b="1" dirty="0">
                 <a:solidFill>
                   <a:srgbClr val="1A1A1A"/>
                 </a:solidFill>
@@ -2297,13 +2283,13 @@
                 <a:ea typeface="Calibri" pitchFamily="34" charset="-122"/>
                 <a:cs typeface="Calibri" pitchFamily="34" charset="-120"/>
               </a:rPr>
-              <a:t>Institucion: </a:t>
+              <a:t>Docente:  </a:t>
             </a:r>
             <a:pPr algn="l" indent="0" marL="0">
               <a:buNone/>
             </a:pPr>
             <a:r>
-              <a:rPr lang="en-US" sz="1300" dirty="0">
+              <a:rPr lang="en-US" sz="1200" dirty="0">
                 <a:solidFill>
                   <a:srgbClr val="888888"/>
                 </a:solidFill>
@@ -2311,9 +2297,9 @@
                 <a:ea typeface="Calibri" pitchFamily="34" charset="-122"/>
                 <a:cs typeface="Calibri" pitchFamily="34" charset="-120"/>
               </a:rPr>
-              <a:t>ISER</a:t>
+              <a:t>Carlos Sneider Rodriguez</a:t>
             </a:r>
-            <a:endParaRPr lang="en-US" sz="1300" dirty="0"/>
+            <a:endParaRPr lang="en-US" sz="1200" dirty="0"/>
           </a:p>
         </p:txBody>
       </p:sp>
@@ -2325,8 +2311,8 @@
         </p:nvSpPr>
         <p:spPr>
           <a:xfrm>
-            <a:off x="502920" y="3941064"/>
-            <a:ext cx="7315200" cy="347472"/>
+            <a:off x="502920" y="3529584"/>
+            <a:ext cx="8229600" cy="310896"/>
           </a:xfrm>
           <a:prstGeom prst="rect">
             <a:avLst/>
@@ -2342,7 +2328,7 @@
               <a:buNone/>
             </a:pPr>
             <a:r>
-              <a:rPr lang="en-US" sz="1300" b="1" dirty="0">
+              <a:rPr lang="en-US" sz="1200" b="1" dirty="0">
                 <a:solidFill>
                   <a:srgbClr val="1A1A1A"/>
                 </a:solidFill>
@@ -2350,13 +2336,119 @@
                 <a:ea typeface="Calibri" pitchFamily="34" charset="-122"/>
                 <a:cs typeface="Calibri" pitchFamily="34" charset="-120"/>
               </a:rPr>
-              <a:t>Fecha: </a:t>
+              <a:t>Asignatura:  </a:t>
             </a:r>
             <a:pPr algn="l" indent="0" marL="0">
               <a:buNone/>
             </a:pPr>
             <a:r>
-              <a:rPr lang="en-US" sz="1300" dirty="0">
+              <a:rPr lang="en-US" sz="1200" dirty="0">
+                <a:solidFill>
+                  <a:srgbClr val="888888"/>
+                </a:solidFill>
+                <a:latin typeface="Calibri" pitchFamily="34" charset="0"/>
+                <a:ea typeface="Calibri" pitchFamily="34" charset="-122"/>
+                <a:cs typeface="Calibri" pitchFamily="34" charset="-120"/>
+              </a:rPr>
+              <a:t>Metodologias de Desarrollo de Software</a:t>
+            </a:r>
+            <a:endParaRPr lang="en-US" sz="1200" dirty="0"/>
+          </a:p>
+        </p:txBody>
+      </p:sp>
+      <p:sp>
+        <p:nvSpPr>
+          <p:cNvPr id="10" name="Text 8"/>
+          <p:cNvSpPr/>
+          <p:nvPr/>
+        </p:nvSpPr>
+        <p:spPr>
+          <a:xfrm>
+            <a:off x="502920" y="3877056"/>
+            <a:ext cx="8229600" cy="310896"/>
+          </a:xfrm>
+          <a:prstGeom prst="rect">
+            <a:avLst/>
+          </a:prstGeom>
+          <a:noFill/>
+          <a:ln/>
+        </p:spPr>
+        <p:txBody>
+          <a:bodyPr wrap="square" lIns="0" tIns="0" rIns="0" bIns="0" rtlCol="0" anchor="ctr"/>
+          <a:lstStyle/>
+          <a:p>
+            <a:pPr algn="l" indent="0" marL="0">
+              <a:buNone/>
+            </a:pPr>
+            <a:r>
+              <a:rPr lang="en-US" sz="1200" b="1" dirty="0">
+                <a:solidFill>
+                  <a:srgbClr val="1A1A1A"/>
+                </a:solidFill>
+                <a:latin typeface="Calibri" pitchFamily="34" charset="0"/>
+                <a:ea typeface="Calibri" pitchFamily="34" charset="-122"/>
+                <a:cs typeface="Calibri" pitchFamily="34" charset="-120"/>
+              </a:rPr>
+              <a:t>Institucion:  </a:t>
+            </a:r>
+            <a:pPr algn="l" indent="0" marL="0">
+              <a:buNone/>
+            </a:pPr>
+            <a:r>
+              <a:rPr lang="en-US" sz="1200" dirty="0">
+                <a:solidFill>
+                  <a:srgbClr val="888888"/>
+                </a:solidFill>
+                <a:latin typeface="Calibri" pitchFamily="34" charset="0"/>
+                <a:ea typeface="Calibri" pitchFamily="34" charset="-122"/>
+                <a:cs typeface="Calibri" pitchFamily="34" charset="-120"/>
+              </a:rPr>
+              <a:t>ISER - Pamplona, Norte de Santander</a:t>
+            </a:r>
+            <a:endParaRPr lang="en-US" sz="1200" dirty="0"/>
+          </a:p>
+        </p:txBody>
+      </p:sp>
+      <p:sp>
+        <p:nvSpPr>
+          <p:cNvPr id="11" name="Text 9"/>
+          <p:cNvSpPr/>
+          <p:nvPr/>
+        </p:nvSpPr>
+        <p:spPr>
+          <a:xfrm>
+            <a:off x="502920" y="4224528"/>
+            <a:ext cx="8229600" cy="310896"/>
+          </a:xfrm>
+          <a:prstGeom prst="rect">
+            <a:avLst/>
+          </a:prstGeom>
+          <a:noFill/>
+          <a:ln/>
+        </p:spPr>
+        <p:txBody>
+          <a:bodyPr wrap="square" lIns="0" tIns="0" rIns="0" bIns="0" rtlCol="0" anchor="ctr"/>
+          <a:lstStyle/>
+          <a:p>
+            <a:pPr algn="l" indent="0" marL="0">
+              <a:buNone/>
+            </a:pPr>
+            <a:r>
+              <a:rPr lang="en-US" sz="1200" b="1" dirty="0">
+                <a:solidFill>
+                  <a:srgbClr val="1A1A1A"/>
+                </a:solidFill>
+                <a:latin typeface="Calibri" pitchFamily="34" charset="0"/>
+                <a:ea typeface="Calibri" pitchFamily="34" charset="-122"/>
+                <a:cs typeface="Calibri" pitchFamily="34" charset="-120"/>
+              </a:rPr>
+              <a:t>Fecha:  </a:t>
+            </a:r>
+            <a:pPr algn="l" indent="0" marL="0">
+              <a:buNone/>
+            </a:pPr>
+            <a:r>
+              <a:rPr lang="en-US" sz="1200" dirty="0">
                 <a:solidFill>
                   <a:srgbClr val="888888"/>
                 </a:solidFill>
@@ -2366,7 +2458,7 @@
               </a:rPr>
               <a:t>Mayo 2026</a:t>
             </a:r>
-            <a:endParaRPr lang="en-US" sz="1300" dirty="0"/>
+            <a:endParaRPr lang="en-US" sz="1200" dirty="0"/>
           </a:p>
         </p:txBody>
       </p:sp>
@@ -2435,7 +2527,7 @@
                 <a:ea typeface="Calibri" pitchFamily="34" charset="-122"/>
                 <a:cs typeface="Calibri" pitchFamily="34" charset="-120"/>
               </a:rPr>
-              <a:t>GET – Buscar Objeto Especifico</a:t>
+              <a:t>GET – Buscar Objeto Específico</a:t>
             </a:r>
             <a:endParaRPr lang="en-US" sz="3000" dirty="0"/>
           </a:p>
@@ -2480,7 +2572,7 @@
         </p:nvGraphicFramePr>
         <p:xfrm>
           <a:off x="365760" y="960120"/>
-          <a:ext cx="4114800" cy="2011680"/>
+          <a:ext cx="4114800" cy="1920240"/>
         </p:xfrm>
         <a:graphic>
           <a:graphicData uri="http://schemas.openxmlformats.org/drawingml/2006/table">
@@ -2490,7 +2582,7 @@
                 <a:gridCol w="1371600"/>
                 <a:gridCol w="2743200"/>
               </a:tblGrid>
-              <a:tr h="335280">
+              <a:tr h="320040">
                 <a:tc>
                   <a:txBody>
                     <a:bodyPr/>
@@ -2628,7 +2720,7 @@
                   </a:tcPr>
                 </a:tc>
               </a:tr>
-              <a:tr h="335280">
+              <a:tr h="320040">
                 <a:tc>
                   <a:txBody>
                     <a:bodyPr/>
@@ -2646,7 +2738,7 @@
                           <a:ea typeface="Calibri" pitchFamily="34" charset="-122"/>
                           <a:cs typeface="Calibri" pitchFamily="34" charset="-120"/>
                         </a:rPr>
-                        <a:t>Metodo HTTP</a:t>
+                        <a:t>Método HTTP</a:t>
                       </a:r>
                       <a:endParaRPr lang="en-US" sz="1000" dirty="0">
                         <a:latin typeface="Calibri" charset="0"/>
@@ -2766,7 +2858,7 @@
                   </a:tcPr>
                 </a:tc>
               </a:tr>
-              <a:tr h="335280">
+              <a:tr h="320040">
                 <a:tc>
                   <a:txBody>
                     <a:bodyPr/>
@@ -2904,7 +2996,7 @@
                   </a:tcPr>
                 </a:tc>
               </a:tr>
-              <a:tr h="335280">
+              <a:tr h="320040">
                 <a:tc>
                   <a:txBody>
                     <a:bodyPr/>
@@ -2922,7 +3014,7 @@
                           <a:ea typeface="Calibri" pitchFamily="34" charset="-122"/>
                           <a:cs typeface="Calibri" pitchFamily="34" charset="-120"/>
                         </a:rPr>
-                        <a:t>Parametro</a:t>
+                        <a:t>Parámetro</a:t>
                       </a:r>
                       <a:endParaRPr lang="en-US" sz="1000" dirty="0">
                         <a:latin typeface="Calibri" charset="0"/>
@@ -2990,7 +3082,7 @@
                           <a:ea typeface="Calibri" pitchFamily="34" charset="-122"/>
                           <a:cs typeface="Calibri" pitchFamily="34" charset="-120"/>
                         </a:rPr>
-                        <a:t>{id} - ID del autor en la URL (PathVariable)</a:t>
+                        <a:t>{id} — valor entero en la URL (@PathVariable)</a:t>
                       </a:r>
                       <a:endParaRPr lang="en-US" sz="1000" dirty="0">
                         <a:latin typeface="Calibri" charset="0"/>
@@ -3042,7 +3134,7 @@
                   </a:tcPr>
                 </a:tc>
               </a:tr>
-              <a:tr h="335280">
+              <a:tr h="320040">
                 <a:tc>
                   <a:txBody>
                     <a:bodyPr/>
@@ -3128,7 +3220,7 @@
                           <a:ea typeface="Calibri" pitchFamily="34" charset="-122"/>
                           <a:cs typeface="Calibri" pitchFamily="34" charset="-120"/>
                         </a:rPr>
-                        <a:t>JSON con el objeto Autor o null si no existe</a:t>
+                        <a:t>Objeto JSON o null si no existe</a:t>
                       </a:r>
                       <a:endParaRPr lang="en-US" sz="1000" dirty="0">
                         <a:latin typeface="Calibri" charset="0"/>
@@ -3180,7 +3272,7 @@
                   </a:tcPr>
                 </a:tc>
               </a:tr>
-              <a:tr h="335280">
+              <a:tr h="320040">
                 <a:tc>
                   <a:txBody>
                     <a:bodyPr/>
@@ -3198,7 +3290,7 @@
                           <a:ea typeface="Calibri" pitchFamily="34" charset="-122"/>
                           <a:cs typeface="Calibri" pitchFamily="34" charset="-120"/>
                         </a:rPr>
-                        <a:t>Codigo HTTP</a:t>
+                        <a:t>HTTP Code</a:t>
                       </a:r>
                       <a:endParaRPr lang="en-US" sz="1000" dirty="0">
                         <a:latin typeface="Calibri" charset="0"/>
@@ -3331,7 +3423,7 @@
         <p:spPr>
           <a:xfrm>
             <a:off x="4663440" y="960120"/>
-            <a:ext cx="4114800" cy="2011680"/>
+            <a:ext cx="4114800" cy="1920240"/>
           </a:xfrm>
           <a:prstGeom prst="rect">
             <a:avLst/>
@@ -3355,8 +3447,8 @@
         </p:nvSpPr>
         <p:spPr>
           <a:xfrm>
-            <a:off x="4773168" y="1005840"/>
-            <a:ext cx="3895344" cy="1920240"/>
+            <a:off x="4773168" y="1014984"/>
+            <a:ext cx="3895344" cy="1810512"/>
           </a:xfrm>
           <a:prstGeom prst="rect">
             <a:avLst/>
@@ -3530,7 +3622,7 @@
         </p:nvSpPr>
         <p:spPr>
           <a:xfrm>
-            <a:off x="365760" y="3108960"/>
+            <a:off x="365760" y="2999232"/>
             <a:ext cx="2743200" cy="274320"/>
           </a:xfrm>
           <a:prstGeom prst="rect">
@@ -3569,8 +3661,8 @@
         </p:nvSpPr>
         <p:spPr>
           <a:xfrm>
-            <a:off x="365760" y="3401568"/>
-            <a:ext cx="4114800" cy="1417320"/>
+            <a:off x="365760" y="3291840"/>
+            <a:ext cx="4114800" cy="1508760"/>
           </a:xfrm>
           <a:prstGeom prst="rect">
             <a:avLst/>
@@ -3594,8 +3686,8 @@
         </p:nvSpPr>
         <p:spPr>
           <a:xfrm>
-            <a:off x="475488" y="3447288"/>
-            <a:ext cx="3895344" cy="1325880"/>
+            <a:off x="475488" y="3346704"/>
+            <a:ext cx="3895344" cy="1399032"/>
           </a:xfrm>
           <a:prstGeom prst="rect">
             <a:avLst/>
@@ -3670,7 +3762,7 @@
                 <a:ea typeface="Courier New" pitchFamily="34" charset="-122"/>
                 <a:cs typeface="Courier New" pitchFamily="34" charset="-120"/>
               </a:rPr>
-              <a:t>  "email": "ggmarquez@mail.com"</a:t>
+              <a:t>  "email": "gg@mail.com"</a:t>
             </a:r>
             <a:endParaRPr lang="en-US" sz="900" dirty="0"/>
           </a:p>
@@ -3701,8 +3793,8 @@
         </p:nvSpPr>
         <p:spPr>
           <a:xfrm>
-            <a:off x="4663440" y="3401568"/>
-            <a:ext cx="4114800" cy="731520"/>
+            <a:off x="4663440" y="2999232"/>
+            <a:ext cx="4114800" cy="822960"/>
           </a:xfrm>
           <a:prstGeom prst="rect">
             <a:avLst/>
@@ -3726,7 +3818,24 @@
                 <a:ea typeface="Calibri" pitchFamily="34" charset="-122"/>
                 <a:cs typeface="Calibri" pitchFamily="34" charset="-120"/>
               </a:rPr>
-              <a:t>Si el ID no existe, el metodo retorna null y Spring Boot devuelve HTTP 200 con cuerpo vacio.</a:t>
+              <a:t>Si el ID no existe → retorna null → HTTP 200 con cuerpo vacío.</a:t>
+            </a:r>
+            <a:endParaRPr lang="en-US" sz="1000" dirty="0"/>
+          </a:p>
+          <a:p>
+            <a:pPr algn="l" indent="0" marL="0">
+              <a:buNone/>
+            </a:pPr>
+            <a:r>
+              <a:rPr lang="en-US" sz="1000" i="1" dirty="0">
+                <a:solidFill>
+                  <a:srgbClr val="1A1A1A"/>
+                </a:solidFill>
+                <a:latin typeface="Calibri" pitchFamily="34" charset="0"/>
+                <a:ea typeface="Calibri" pitchFamily="34" charset="-122"/>
+                <a:cs typeface="Calibri" pitchFamily="34" charset="-120"/>
+              </a:rPr>
+              <a:t>En producción se usaría ResponseEntity con HTTP 404.</a:t>
             </a:r>
             <a:endParaRPr lang="en-US" sz="1000" dirty="0"/>
           </a:p>
@@ -3842,7 +3951,7 @@
         </p:nvGraphicFramePr>
         <p:xfrm>
           <a:off x="365760" y="960120"/>
-          <a:ext cx="4114800" cy="2011680"/>
+          <a:ext cx="4114800" cy="1920240"/>
         </p:xfrm>
         <a:graphic>
           <a:graphicData uri="http://schemas.openxmlformats.org/drawingml/2006/table">
@@ -3852,7 +3961,7 @@
                 <a:gridCol w="1371600"/>
                 <a:gridCol w="2743200"/>
               </a:tblGrid>
-              <a:tr h="335280">
+              <a:tr h="320040">
                 <a:tc>
                   <a:txBody>
                     <a:bodyPr/>
@@ -3990,7 +4099,7 @@
                   </a:tcPr>
                 </a:tc>
               </a:tr>
-              <a:tr h="335280">
+              <a:tr h="320040">
                 <a:tc>
                   <a:txBody>
                     <a:bodyPr/>
@@ -4008,7 +4117,7 @@
                           <a:ea typeface="Calibri" pitchFamily="34" charset="-122"/>
                           <a:cs typeface="Calibri" pitchFamily="34" charset="-120"/>
                         </a:rPr>
-                        <a:t>Metodo HTTP</a:t>
+                        <a:t>Método HTTP</a:t>
                       </a:r>
                       <a:endParaRPr lang="en-US" sz="1000" dirty="0">
                         <a:latin typeface="Calibri" charset="0"/>
@@ -4128,7 +4237,7 @@
                   </a:tcPr>
                 </a:tc>
               </a:tr>
-              <a:tr h="335280">
+              <a:tr h="320040">
                 <a:tc>
                   <a:txBody>
                     <a:bodyPr/>
@@ -4266,7 +4375,7 @@
                   </a:tcPr>
                 </a:tc>
               </a:tr>
-              <a:tr h="335280">
+              <a:tr h="320040">
                 <a:tc>
                   <a:txBody>
                     <a:bodyPr/>
@@ -4284,7 +4393,7 @@
                           <a:ea typeface="Calibri" pitchFamily="34" charset="-122"/>
                           <a:cs typeface="Calibri" pitchFamily="34" charset="-120"/>
                         </a:rPr>
-                        <a:t>Parametros</a:t>
+                        <a:t>Parámetros</a:t>
                       </a:r>
                       <a:endParaRPr lang="en-US" sz="1000" dirty="0">
                         <a:latin typeface="Calibri" charset="0"/>
@@ -4404,7 +4513,7 @@
                   </a:tcPr>
                 </a:tc>
               </a:tr>
-              <a:tr h="335280">
+              <a:tr h="320040">
                 <a:tc>
                   <a:txBody>
                     <a:bodyPr/>
@@ -4490,7 +4599,7 @@
                           <a:ea typeface="Calibri" pitchFamily="34" charset="-122"/>
                           <a:cs typeface="Calibri" pitchFamily="34" charset="-120"/>
                         </a:rPr>
-                        <a:t>Array JSON con todos los autores</a:t>
+                        <a:t>Array JSON con todos los registros</a:t>
                       </a:r>
                       <a:endParaRPr lang="en-US" sz="1000" dirty="0">
                         <a:latin typeface="Calibri" charset="0"/>
@@ -4542,7 +4651,7 @@
                   </a:tcPr>
                 </a:tc>
               </a:tr>
-              <a:tr h="335280">
+              <a:tr h="320040">
                 <a:tc>
                   <a:txBody>
                     <a:bodyPr/>
@@ -4560,7 +4669,7 @@
                           <a:ea typeface="Calibri" pitchFamily="34" charset="-122"/>
                           <a:cs typeface="Calibri" pitchFamily="34" charset="-120"/>
                         </a:rPr>
-                        <a:t>Codigo HTTP</a:t>
+                        <a:t>HTTP Code</a:t>
                       </a:r>
                       <a:endParaRPr lang="en-US" sz="1000" dirty="0">
                         <a:latin typeface="Calibri" charset="0"/>
@@ -4628,7 +4737,7 @@
                           <a:ea typeface="Calibri" pitchFamily="34" charset="-122"/>
                           <a:cs typeface="Calibri" pitchFamily="34" charset="-120"/>
                         </a:rPr>
-                        <a:t>200 OK  (array vacio [] si no hay datos)</a:t>
+                        <a:t>200 OK  ([] si no hay datos)</a:t>
                       </a:r>
                       <a:endParaRPr lang="en-US" sz="1000" dirty="0">
                         <a:latin typeface="Calibri" charset="0"/>
@@ -4693,7 +4802,7 @@
         <p:spPr>
           <a:xfrm>
             <a:off x="4663440" y="960120"/>
-            <a:ext cx="4114800" cy="1188720"/>
+            <a:ext cx="4114800" cy="1097280"/>
           </a:xfrm>
           <a:prstGeom prst="rect">
             <a:avLst/>
@@ -4717,8 +4826,8 @@
         </p:nvSpPr>
         <p:spPr>
           <a:xfrm>
-            <a:off x="4773168" y="1005840"/>
-            <a:ext cx="3895344" cy="1097280"/>
+            <a:off x="4773168" y="1014984"/>
+            <a:ext cx="3895344" cy="987552"/>
           </a:xfrm>
           <a:prstGeom prst="rect">
             <a:avLst/>
@@ -4807,8 +4916,8 @@
         </p:nvSpPr>
         <p:spPr>
           <a:xfrm>
-            <a:off x="365760" y="3108960"/>
-            <a:ext cx="3657600" cy="274320"/>
+            <a:off x="365760" y="2999232"/>
+            <a:ext cx="4572000" cy="274320"/>
           </a:xfrm>
           <a:prstGeom prst="rect">
             <a:avLst/>
@@ -4846,8 +4955,8 @@
         </p:nvSpPr>
         <p:spPr>
           <a:xfrm>
-            <a:off x="365760" y="3401568"/>
-            <a:ext cx="8412480" cy="1417320"/>
+            <a:off x="365760" y="3291840"/>
+            <a:ext cx="8412480" cy="1188720"/>
           </a:xfrm>
           <a:prstGeom prst="rect">
             <a:avLst/>
@@ -4871,8 +4980,8 @@
         </p:nvSpPr>
         <p:spPr>
           <a:xfrm>
-            <a:off x="475488" y="3447288"/>
-            <a:ext cx="8193024" cy="1325880"/>
+            <a:off x="475488" y="3346704"/>
+            <a:ext cx="8193024" cy="1078992"/>
           </a:xfrm>
           <a:prstGeom prst="rect">
             <a:avLst/>
@@ -4961,8 +5070,8 @@
         </p:nvSpPr>
         <p:spPr>
           <a:xfrm>
-            <a:off x="4663440" y="2331720"/>
-            <a:ext cx="4114800" cy="548640"/>
+            <a:off x="4663440" y="2240280"/>
+            <a:ext cx="4114800" cy="502920"/>
           </a:xfrm>
           <a:prstGeom prst="rect">
             <a:avLst/>
@@ -4986,7 +5095,7 @@
                 <a:ea typeface="Calibri" pitchFamily="34" charset="-122"/>
                 <a:cs typeface="Calibri" pitchFamily="34" charset="-120"/>
               </a:rPr>
-              <a:t>Endpoints de lista: /listarAutor  /listarCategoria  /listarCuento  /listarFavorito</a:t>
+              <a:t>Disponible para: /listarAutor  /listarCategoria  /listarCuento  /listarFavorito</a:t>
             </a:r>
             <a:endParaRPr lang="en-US" sz="1000" dirty="0"/>
           </a:p>
@@ -5102,7 +5211,7 @@
         </p:nvGraphicFramePr>
         <p:xfrm>
           <a:off x="365760" y="960120"/>
-          <a:ext cx="4114800" cy="2011680"/>
+          <a:ext cx="4114800" cy="1920240"/>
         </p:xfrm>
         <a:graphic>
           <a:graphicData uri="http://schemas.openxmlformats.org/drawingml/2006/table">
@@ -5112,7 +5221,7 @@
                 <a:gridCol w="1371600"/>
                 <a:gridCol w="2743200"/>
               </a:tblGrid>
-              <a:tr h="335280">
+              <a:tr h="320040">
                 <a:tc>
                   <a:txBody>
                     <a:bodyPr/>
@@ -5250,7 +5359,7 @@
                   </a:tcPr>
                 </a:tc>
               </a:tr>
-              <a:tr h="335280">
+              <a:tr h="320040">
                 <a:tc>
                   <a:txBody>
                     <a:bodyPr/>
@@ -5268,7 +5377,7 @@
                           <a:ea typeface="Calibri" pitchFamily="34" charset="-122"/>
                           <a:cs typeface="Calibri" pitchFamily="34" charset="-120"/>
                         </a:rPr>
-                        <a:t>Metodo HTTP</a:t>
+                        <a:t>Método HTTP</a:t>
                       </a:r>
                       <a:endParaRPr lang="en-US" sz="1000" dirty="0">
                         <a:latin typeface="Calibri" charset="0"/>
@@ -5388,7 +5497,7 @@
                   </a:tcPr>
                 </a:tc>
               </a:tr>
-              <a:tr h="335280">
+              <a:tr h="320040">
                 <a:tc>
                   <a:txBody>
                     <a:bodyPr/>
@@ -5526,7 +5635,7 @@
                   </a:tcPr>
                 </a:tc>
               </a:tr>
-              <a:tr h="335280">
+              <a:tr h="320040">
                 <a:tc>
                   <a:txBody>
                     <a:bodyPr/>
@@ -5612,7 +5721,7 @@
                           <a:ea typeface="Calibri" pitchFamily="34" charset="-122"/>
                           <a:cs typeface="Calibri" pitchFamily="34" charset="-120"/>
                         </a:rPr>
-                        <a:t>JSON con campos del objeto (RequestBody)</a:t>
+                        <a:t>JSON con los campos del objeto (@RequestBody)</a:t>
                       </a:r>
                       <a:endParaRPr lang="en-US" sz="1000" dirty="0">
                         <a:latin typeface="Calibri" charset="0"/>
@@ -5664,7 +5773,7 @@
                   </a:tcPr>
                 </a:tc>
               </a:tr>
-              <a:tr h="335280">
+              <a:tr h="320040">
                 <a:tc>
                   <a:txBody>
                     <a:bodyPr/>
@@ -5750,7 +5859,7 @@
                           <a:ea typeface="Calibri" pitchFamily="34" charset="-122"/>
                           <a:cs typeface="Calibri" pitchFamily="34" charset="-120"/>
                         </a:rPr>
-                        <a:t>El objeto guardado en formato JSON</a:t>
+                        <a:t>El objeto insertado como confirmación</a:t>
                       </a:r>
                       <a:endParaRPr lang="en-US" sz="1000" dirty="0">
                         <a:latin typeface="Calibri" charset="0"/>
@@ -5802,7 +5911,7 @@
                   </a:tcPr>
                 </a:tc>
               </a:tr>
-              <a:tr h="335280">
+              <a:tr h="320040">
                 <a:tc>
                   <a:txBody>
                     <a:bodyPr/>
@@ -5820,7 +5929,7 @@
                           <a:ea typeface="Calibri" pitchFamily="34" charset="-122"/>
                           <a:cs typeface="Calibri" pitchFamily="34" charset="-120"/>
                         </a:rPr>
-                        <a:t>Codigo HTTP</a:t>
+                        <a:t>HTTP Code</a:t>
                       </a:r>
                       <a:endParaRPr lang="en-US" sz="1000" dirty="0">
                         <a:latin typeface="Calibri" charset="0"/>
@@ -5977,8 +6086,8 @@
         </p:nvSpPr>
         <p:spPr>
           <a:xfrm>
-            <a:off x="4773168" y="1005840"/>
-            <a:ext cx="3895344" cy="1280160"/>
+            <a:off x="4773168" y="1014984"/>
+            <a:ext cx="3895344" cy="1261872"/>
           </a:xfrm>
           <a:prstGeom prst="rect">
             <a:avLst/>
@@ -6084,7 +6193,7 @@
         </p:nvSpPr>
         <p:spPr>
           <a:xfrm>
-            <a:off x="365760" y="3108960"/>
+            <a:off x="365760" y="2999232"/>
             <a:ext cx="3657600" cy="274320"/>
           </a:xfrm>
           <a:prstGeom prst="rect">
@@ -6109,7 +6218,7 @@
                 <a:ea typeface="Calibri" pitchFamily="34" charset="-122"/>
                 <a:cs typeface="Calibri" pitchFamily="34" charset="-120"/>
               </a:rPr>
-              <a:t>Body de la peticion (JSON):</a:t>
+              <a:t>Body de la petición:</a:t>
             </a:r>
             <a:endParaRPr lang="en-US" sz="1100" dirty="0"/>
           </a:p>
@@ -6123,8 +6232,8 @@
         </p:nvSpPr>
         <p:spPr>
           <a:xfrm>
-            <a:off x="365760" y="3401568"/>
-            <a:ext cx="4114800" cy="1417320"/>
+            <a:off x="365760" y="3291840"/>
+            <a:ext cx="4114800" cy="1371600"/>
           </a:xfrm>
           <a:prstGeom prst="rect">
             <a:avLst/>
@@ -6148,8 +6257,8 @@
         </p:nvSpPr>
         <p:spPr>
           <a:xfrm>
-            <a:off x="475488" y="3447288"/>
-            <a:ext cx="3895344" cy="1325880"/>
+            <a:off x="475488" y="3346704"/>
+            <a:ext cx="3895344" cy="1261872"/>
           </a:xfrm>
           <a:prstGeom prst="rect">
             <a:avLst/>
@@ -6255,7 +6364,7 @@
         </p:nvSpPr>
         <p:spPr>
           <a:xfrm>
-            <a:off x="4663440" y="3108960"/>
+            <a:off x="4663440" y="2999232"/>
             <a:ext cx="4114800" cy="274320"/>
           </a:xfrm>
           <a:prstGeom prst="rect">
@@ -6280,7 +6389,7 @@
                 <a:ea typeface="Calibri" pitchFamily="34" charset="-122"/>
                 <a:cs typeface="Calibri" pitchFamily="34" charset="-120"/>
               </a:rPr>
-              <a:t>Respuesta (objeto insertado):</a:t>
+              <a:t>Respuesta:</a:t>
             </a:r>
             <a:endParaRPr lang="en-US" sz="1100" dirty="0"/>
           </a:p>
@@ -6294,8 +6403,8 @@
         </p:nvSpPr>
         <p:spPr>
           <a:xfrm>
-            <a:off x="4663440" y="3401568"/>
-            <a:ext cx="4114800" cy="1417320"/>
+            <a:off x="4663440" y="3291840"/>
+            <a:ext cx="4114800" cy="1371600"/>
           </a:xfrm>
           <a:prstGeom prst="rect">
             <a:avLst/>
@@ -6319,8 +6428,8 @@
         </p:nvSpPr>
         <p:spPr>
           <a:xfrm>
-            <a:off x="4773168" y="3447288"/>
-            <a:ext cx="3895344" cy="1325880"/>
+            <a:off x="4773168" y="3346704"/>
+            <a:ext cx="3895344" cy="1261872"/>
           </a:xfrm>
           <a:prstGeom prst="rect">
             <a:avLst/>
@@ -6528,7 +6637,7 @@
         </p:nvGraphicFramePr>
         <p:xfrm>
           <a:off x="365760" y="960120"/>
-          <a:ext cx="4114800" cy="2011680"/>
+          <a:ext cx="4114800" cy="1920240"/>
         </p:xfrm>
         <a:graphic>
           <a:graphicData uri="http://schemas.openxmlformats.org/drawingml/2006/table">
@@ -6538,7 +6647,7 @@
                 <a:gridCol w="1371600"/>
                 <a:gridCol w="2743200"/>
               </a:tblGrid>
-              <a:tr h="335280">
+              <a:tr h="320040">
                 <a:tc>
                   <a:txBody>
                     <a:bodyPr/>
@@ -6676,7 +6785,7 @@
                   </a:tcPr>
                 </a:tc>
               </a:tr>
-              <a:tr h="335280">
+              <a:tr h="320040">
                 <a:tc>
                   <a:txBody>
                     <a:bodyPr/>
@@ -6694,7 +6803,7 @@
                           <a:ea typeface="Calibri" pitchFamily="34" charset="-122"/>
                           <a:cs typeface="Calibri" pitchFamily="34" charset="-120"/>
                         </a:rPr>
-                        <a:t>Metodo HTTP</a:t>
+                        <a:t>Método HTTP</a:t>
                       </a:r>
                       <a:endParaRPr lang="en-US" sz="1000" dirty="0">
                         <a:latin typeface="Calibri" charset="0"/>
@@ -6814,7 +6923,7 @@
                   </a:tcPr>
                 </a:tc>
               </a:tr>
-              <a:tr h="335280">
+              <a:tr h="320040">
                 <a:tc>
                   <a:txBody>
                     <a:bodyPr/>
@@ -6952,7 +7061,7 @@
                   </a:tcPr>
                 </a:tc>
               </a:tr>
-              <a:tr h="335280">
+              <a:tr h="320040">
                 <a:tc>
                   <a:txBody>
                     <a:bodyPr/>
@@ -6970,7 +7079,7 @@
                           <a:ea typeface="Calibri" pitchFamily="34" charset="-122"/>
                           <a:cs typeface="Calibri" pitchFamily="34" charset="-120"/>
                         </a:rPr>
-                        <a:t>Parametro</a:t>
+                        <a:t>Parámetro</a:t>
                       </a:r>
                       <a:endParaRPr lang="en-US" sz="1000" dirty="0">
                         <a:latin typeface="Calibri" charset="0"/>
@@ -7038,7 +7147,7 @@
                           <a:ea typeface="Calibri" pitchFamily="34" charset="-122"/>
                           <a:cs typeface="Calibri" pitchFamily="34" charset="-120"/>
                         </a:rPr>
-                        <a:t>{id} - ID del autor a eliminar (PathVariable)</a:t>
+                        <a:t>{id} — ID del registro a eliminar</a:t>
                       </a:r>
                       <a:endParaRPr lang="en-US" sz="1000" dirty="0">
                         <a:latin typeface="Calibri" charset="0"/>
@@ -7090,7 +7199,7 @@
                   </a:tcPr>
                 </a:tc>
               </a:tr>
-              <a:tr h="335280">
+              <a:tr h="320040">
                 <a:tc>
                   <a:txBody>
                     <a:bodyPr/>
@@ -7228,7 +7337,7 @@
                   </a:tcPr>
                 </a:tc>
               </a:tr>
-              <a:tr h="335280">
+              <a:tr h="320040">
                 <a:tc>
                   <a:txBody>
                     <a:bodyPr/>
@@ -7246,7 +7355,7 @@
                           <a:ea typeface="Calibri" pitchFamily="34" charset="-122"/>
                           <a:cs typeface="Calibri" pitchFamily="34" charset="-120"/>
                         </a:rPr>
-                        <a:t>Codigo HTTP</a:t>
+                        <a:t>HTTP Code</a:t>
                       </a:r>
                       <a:endParaRPr lang="en-US" sz="1000" dirty="0">
                         <a:latin typeface="Calibri" charset="0"/>
@@ -7403,8 +7512,8 @@
         </p:nvSpPr>
         <p:spPr>
           <a:xfrm>
-            <a:off x="4773168" y="1005840"/>
-            <a:ext cx="3895344" cy="2103120"/>
+            <a:off x="4773168" y="1014984"/>
+            <a:ext cx="3895344" cy="2084832"/>
           </a:xfrm>
           <a:prstGeom prst="rect">
             <a:avLst/>
@@ -7587,45 +7696,6 @@
           </a:p>
         </p:txBody>
       </p:sp>
-      <p:sp>
-        <p:nvSpPr>
-          <p:cNvPr id="7" name="Text 4"/>
-          <p:cNvSpPr/>
-          <p:nvPr/>
-        </p:nvSpPr>
-        <p:spPr>
-          <a:xfrm>
-            <a:off x="365760" y="3108960"/>
-            <a:ext cx="3657600" cy="274320"/>
-          </a:xfrm>
-          <a:prstGeom prst="rect">
-            <a:avLst/>
-          </a:prstGeom>
-          <a:noFill/>
-          <a:ln/>
-        </p:spPr>
-        <p:txBody>
-          <a:bodyPr wrap="square" lIns="0" tIns="0" rIns="0" bIns="0" rtlCol="0" anchor="ctr"/>
-          <a:lstStyle/>
-          <a:p>
-            <a:pPr indent="0" marL="0">
-              <a:buNone/>
-            </a:pPr>
-            <a:r>
-              <a:rPr lang="en-US" sz="1100" b="1" dirty="0">
-                <a:solidFill>
-                  <a:srgbClr val="1A1A1A"/>
-                </a:solidFill>
-                <a:latin typeface="Calibri" pitchFamily="34" charset="0"/>
-                <a:ea typeface="Calibri" pitchFamily="34" charset="-122"/>
-                <a:cs typeface="Calibri" pitchFamily="34" charset="-120"/>
-              </a:rPr>
-              <a:t>Posibles respuestas:</a:t>
-            </a:r>
-            <a:endParaRPr lang="en-US" sz="1100" dirty="0"/>
-          </a:p>
-        </p:txBody>
-      </p:sp>
       <p:graphicFrame>
         <p:nvGraphicFramePr>
           <p:cNvPr id="27" name="Table 1"/>
@@ -7641,16 +7711,16 @@
           </p:nvPr>
         </p:nvGraphicFramePr>
         <p:xfrm>
-          <a:off x="365760" y="3401568"/>
-          <a:ext cx="4114800" cy="1188720"/>
+          <a:off x="365760" y="3063240"/>
+          <a:ext cx="5029200" cy="1188720"/>
         </p:xfrm>
         <a:graphic>
           <a:graphicData uri="http://schemas.openxmlformats.org/drawingml/2006/table">
             <a:tbl>
               <a:tblPr/>
               <a:tblGrid>
-                <a:gridCol w="2286000"/>
-                <a:gridCol w="1828800"/>
+                <a:gridCol w="2560320"/>
+                <a:gridCol w="2468880"/>
               </a:tblGrid>
               <a:tr h="396240">
                 <a:tc>
@@ -7738,7 +7808,7 @@
                           <a:ea typeface="Calibri" pitchFamily="34" charset="-122"/>
                           <a:cs typeface="Calibri" pitchFamily="34" charset="-120"/>
                         </a:rPr>
-                        <a:t>Respuesta</a:t>
+                        <a:t>Respuesta del servidor</a:t>
                       </a:r>
                       <a:endParaRPr lang="en-US" sz="1100" dirty="0">
                         <a:latin typeface="Calibri" charset="0"/>
@@ -8135,7 +8205,7 @@
         </p:nvSpPr>
         <p:spPr>
           <a:xfrm>
-            <a:off x="457200" y="274320"/>
+            <a:off x="457200" y="228600"/>
             <a:ext cx="8229600" cy="640080"/>
           </a:xfrm>
           <a:prstGeom prst="rect">
@@ -8174,7 +8244,7 @@
         </p:nvSpPr>
         <p:spPr>
           <a:xfrm>
-            <a:off x="457200" y="1005840"/>
+            <a:off x="457200" y="987552"/>
             <a:ext cx="8229600" cy="310896"/>
           </a:xfrm>
           <a:prstGeom prst="rect">
@@ -8213,8 +8283,8 @@
         </p:nvSpPr>
         <p:spPr>
           <a:xfrm>
-            <a:off x="457200" y="1335024"/>
-            <a:ext cx="8229600" cy="914400"/>
+            <a:off x="457200" y="1316736"/>
+            <a:ext cx="8229600" cy="877824"/>
           </a:xfrm>
           <a:prstGeom prst="rect">
             <a:avLst/>
@@ -8239,7 +8309,7 @@
                 <a:ea typeface="Calibri" pitchFamily="34" charset="-122"/>
                 <a:cs typeface="Calibri" pitchFamily="34" charset="-120"/>
               </a:rPr>
-              <a:t>API REST funcional con 4 entidades: Autor, Categoria, Cuento, Favorito</a:t>
+              <a:t>API REST funcional: 4 entidades (Autor, Categoria, Cuento, Favorito)</a:t>
             </a:r>
             <a:endParaRPr lang="en-US" sz="1100" dirty="0"/>
           </a:p>
@@ -8257,7 +8327,7 @@
                 <a:ea typeface="Calibri" pitchFamily="34" charset="-122"/>
                 <a:cs typeface="Calibri" pitchFamily="34" charset="-120"/>
               </a:rPr>
-              <a:t>16 endpoints implementados (GET listar, GET buscar, POST agregar, DELETE eliminar, GET filtrar)</a:t>
+              <a:t>20 endpoints implementados: GET listar, GET buscar, POST, DELETE, GET filtrar</a:t>
             </a:r>
             <a:endParaRPr lang="en-US" sz="1100" dirty="0"/>
           </a:p>
@@ -8275,25 +8345,7 @@
                 <a:ea typeface="Calibri" pitchFamily="34" charset="-122"/>
                 <a:cs typeface="Calibri" pitchFamily="34" charset="-120"/>
               </a:rPr>
-              <a:t>Arquitectura MVC con controladores y modelos separados</a:t>
-            </a:r>
-            <a:endParaRPr lang="en-US" sz="1100" dirty="0"/>
-          </a:p>
-          <a:p>
-            <a:pPr algn="l" marL="342900" indent="-342900">
-              <a:buSzPct val="100000"/>
-              <a:buChar char="•"/>
-            </a:pPr>
-            <a:r>
-              <a:rPr lang="en-US" sz="1100" dirty="0">
-                <a:solidFill>
-                  <a:srgbClr val="1A1A1A"/>
-                </a:solidFill>
-                <a:latin typeface="Calibri" pitchFamily="34" charset="0"/>
-                <a:ea typeface="Calibri" pitchFamily="34" charset="-122"/>
-                <a:cs typeface="Calibri" pitchFamily="34" charset="-120"/>
-              </a:rPr>
-              <a:t>Respuestas en formato JSON usando Spring Boot</a:t>
+              <a:t>Arquitectura MVC: modelos y controladores separados</a:t>
             </a:r>
             <a:endParaRPr lang="en-US" sz="1100" dirty="0"/>
           </a:p>
@@ -8307,7 +8359,7 @@
         </p:nvSpPr>
         <p:spPr>
           <a:xfrm>
-            <a:off x="457200" y="2304288"/>
+            <a:off x="457200" y="2267712"/>
             <a:ext cx="8229600" cy="310896"/>
           </a:xfrm>
           <a:prstGeom prst="rect">
@@ -8332,7 +8384,7 @@
                 <a:ea typeface="Calibri" pitchFamily="34" charset="-122"/>
                 <a:cs typeface="Calibri" pitchFamily="34" charset="-120"/>
               </a:rPr>
-              <a:t>Tecnologias usadas</a:t>
+              <a:t>Tecnologías usadas</a:t>
             </a:r>
             <a:endParaRPr lang="en-US" sz="1400" dirty="0"/>
           </a:p>
@@ -8346,8 +8398,8 @@
         </p:nvSpPr>
         <p:spPr>
           <a:xfrm>
-            <a:off x="457200" y="2633472"/>
-            <a:ext cx="8229600" cy="914400"/>
+            <a:off x="457200" y="2596896"/>
+            <a:ext cx="8229600" cy="877824"/>
           </a:xfrm>
           <a:prstGeom prst="rect">
             <a:avLst/>
@@ -8372,7 +8424,7 @@
                 <a:ea typeface="Calibri" pitchFamily="34" charset="-122"/>
                 <a:cs typeface="Calibri" pitchFamily="34" charset="-120"/>
               </a:rPr>
-              <a:t>Java 17+  |  Spring Boot  |  Maven  |  REST API</a:t>
+              <a:t>Java · Spring Boot · Maven · REST API · JSON</a:t>
             </a:r>
             <a:endParaRPr lang="en-US" sz="1100" dirty="0"/>
           </a:p>
@@ -8390,7 +8442,7 @@
                 <a:ea typeface="Calibri" pitchFamily="34" charset="-122"/>
                 <a:cs typeface="Calibri" pitchFamily="34" charset="-120"/>
               </a:rPr>
-              <a:t>Almacenamiento en memoria (ArrayList) sin base de datos externa</a:t>
+              <a:t>Diseño BD: PostgreSQL 18 con pgAdmin 4</a:t>
             </a:r>
             <a:endParaRPr lang="en-US" sz="1100" dirty="0"/>
           </a:p>
@@ -8408,7 +8460,7 @@
                 <a:ea typeface="Calibri" pitchFamily="34" charset="-122"/>
                 <a:cs typeface="Calibri" pitchFamily="34" charset="-120"/>
               </a:rPr>
-              <a:t>Herramientas: IntelliJ IDEA / VS Code, Postman para pruebas</a:t>
+              <a:t>Almacenamiento del Sprint: ArrayList en memoria</a:t>
             </a:r>
             <a:endParaRPr lang="en-US" sz="1100" dirty="0"/>
           </a:p>
@@ -8422,7 +8474,7 @@
         </p:nvSpPr>
         <p:spPr>
           <a:xfrm>
-            <a:off x="457200" y="3602736"/>
+            <a:off x="457200" y="3547872"/>
             <a:ext cx="8229600" cy="310896"/>
           </a:xfrm>
           <a:prstGeom prst="rect">
@@ -8461,8 +8513,8 @@
         </p:nvSpPr>
         <p:spPr>
           <a:xfrm>
-            <a:off x="457200" y="3931920"/>
-            <a:ext cx="8229600" cy="914400"/>
+            <a:off x="457200" y="3877056"/>
+            <a:ext cx="8229600" cy="877824"/>
           </a:xfrm>
           <a:prstGeom prst="rect">
             <a:avLst/>
@@ -8487,7 +8539,7 @@
                 <a:ea typeface="Calibri" pitchFamily="34" charset="-122"/>
                 <a:cs typeface="Calibri" pitchFamily="34" charset="-120"/>
               </a:rPr>
-              <a:t>Uso de anotaciones @RestController, @GetMapping, @PostMapping, @DeleteMapping</a:t>
+              <a:t>@RestController · @GetMapping · @PostMapping · @DeleteMapping</a:t>
             </a:r>
             <a:endParaRPr lang="en-US" sz="1100" dirty="0"/>
           </a:p>
@@ -8505,7 +8557,7 @@
                 <a:ea typeface="Calibri" pitchFamily="34" charset="-122"/>
                 <a:cs typeface="Calibri" pitchFamily="34" charset="-120"/>
               </a:rPr>
-              <a:t>Mapeo de parametros con @PathVariable y @RequestParam</a:t>
+              <a:t>@PathVariable (ID en URL) vs @RequestParam (parámetro query)</a:t>
             </a:r>
             <a:endParaRPr lang="en-US" sz="1100" dirty="0"/>
           </a:p>
@@ -8523,7 +8575,7 @@
                 <a:ea typeface="Calibri" pitchFamily="34" charset="-122"/>
                 <a:cs typeface="Calibri" pitchFamily="34" charset="-120"/>
               </a:rPr>
-              <a:t>Serializacion automatica a JSON con @RequestBody y @ResponseBody</a:t>
+              <a:t>@RequestBody: deserialización automática JSON → objeto Java</a:t>
             </a:r>
             <a:endParaRPr lang="en-US" sz="1100" dirty="0"/>
           </a:p>
@@ -8695,8 +8747,8 @@
         </p:nvSpPr>
         <p:spPr>
           <a:xfrm>
-            <a:off x="932688" y="1078992"/>
-            <a:ext cx="3749040" cy="329184"/>
+            <a:off x="932688" y="1097280"/>
+            <a:ext cx="3657600" cy="310896"/>
           </a:xfrm>
           <a:prstGeom prst="rect">
             <a:avLst/>
@@ -8734,7 +8786,7 @@
         </p:nvSpPr>
         <p:spPr>
           <a:xfrm>
-            <a:off x="365760" y="1719072"/>
+            <a:off x="365760" y="1755648"/>
             <a:ext cx="475488" cy="475488"/>
           </a:xfrm>
           <a:prstGeom prst="rect">
@@ -8759,7 +8811,7 @@
         </p:nvSpPr>
         <p:spPr>
           <a:xfrm>
-            <a:off x="365760" y="1719072"/>
+            <a:off x="365760" y="1755648"/>
             <a:ext cx="475488" cy="475488"/>
           </a:xfrm>
           <a:prstGeom prst="rect">
@@ -8798,8 +8850,8 @@
         </p:nvSpPr>
         <p:spPr>
           <a:xfrm>
-            <a:off x="932688" y="1792224"/>
-            <a:ext cx="3749040" cy="329184"/>
+            <a:off x="932688" y="1847088"/>
+            <a:ext cx="3657600" cy="310896"/>
           </a:xfrm>
           <a:prstGeom prst="rect">
             <a:avLst/>
@@ -8837,7 +8889,7 @@
         </p:nvSpPr>
         <p:spPr>
           <a:xfrm>
-            <a:off x="365760" y="2432304"/>
+            <a:off x="365760" y="2505456"/>
             <a:ext cx="475488" cy="475488"/>
           </a:xfrm>
           <a:prstGeom prst="rect">
@@ -8862,7 +8914,7 @@
         </p:nvSpPr>
         <p:spPr>
           <a:xfrm>
-            <a:off x="365760" y="2432304"/>
+            <a:off x="365760" y="2505456"/>
             <a:ext cx="475488" cy="475488"/>
           </a:xfrm>
           <a:prstGeom prst="rect">
@@ -8901,8 +8953,8 @@
         </p:nvSpPr>
         <p:spPr>
           <a:xfrm>
-            <a:off x="932688" y="2505456"/>
-            <a:ext cx="3749040" cy="329184"/>
+            <a:off x="932688" y="2596896"/>
+            <a:ext cx="3657600" cy="310896"/>
           </a:xfrm>
           <a:prstGeom prst="rect">
             <a:avLst/>
@@ -8940,7 +8992,7 @@
         </p:nvSpPr>
         <p:spPr>
           <a:xfrm>
-            <a:off x="365760" y="3145536"/>
+            <a:off x="365760" y="3255264"/>
             <a:ext cx="475488" cy="475488"/>
           </a:xfrm>
           <a:prstGeom prst="rect">
@@ -8965,7 +9017,7 @@
         </p:nvSpPr>
         <p:spPr>
           <a:xfrm>
-            <a:off x="365760" y="3145536"/>
+            <a:off x="365760" y="3255264"/>
             <a:ext cx="475488" cy="475488"/>
           </a:xfrm>
           <a:prstGeom prst="rect">
@@ -9004,8 +9056,8 @@
         </p:nvSpPr>
         <p:spPr>
           <a:xfrm>
-            <a:off x="932688" y="3218688"/>
-            <a:ext cx="3749040" cy="329184"/>
+            <a:off x="932688" y="3346704"/>
+            <a:ext cx="3657600" cy="310896"/>
           </a:xfrm>
           <a:prstGeom prst="rect">
             <a:avLst/>
@@ -9043,7 +9095,7 @@
         </p:nvSpPr>
         <p:spPr>
           <a:xfrm>
-            <a:off x="365760" y="3858768"/>
+            <a:off x="365760" y="4005072"/>
             <a:ext cx="475488" cy="475488"/>
           </a:xfrm>
           <a:prstGeom prst="rect">
@@ -9068,7 +9120,7 @@
         </p:nvSpPr>
         <p:spPr>
           <a:xfrm>
-            <a:off x="365760" y="3858768"/>
+            <a:off x="365760" y="4005072"/>
             <a:ext cx="475488" cy="475488"/>
           </a:xfrm>
           <a:prstGeom prst="rect">
@@ -9107,8 +9159,8 @@
         </p:nvSpPr>
         <p:spPr>
           <a:xfrm>
-            <a:off x="932688" y="3931920"/>
-            <a:ext cx="3749040" cy="329184"/>
+            <a:off x="932688" y="4096512"/>
+            <a:ext cx="3657600" cy="310896"/>
           </a:xfrm>
           <a:prstGeom prst="rect">
             <a:avLst/>
@@ -9132,7 +9184,7 @@
                 <a:ea typeface="Calibri" pitchFamily="34" charset="-122"/>
                 <a:cs typeface="Calibri" pitchFamily="34" charset="-120"/>
               </a:rPr>
-              <a:t>Diagrama de Clases</a:t>
+              <a:t>Diagrama de Clases UML</a:t>
             </a:r>
             <a:endParaRPr lang="en-US" sz="1300" dirty="0"/>
           </a:p>
@@ -9210,8 +9262,8 @@
         </p:nvSpPr>
         <p:spPr>
           <a:xfrm>
-            <a:off x="5321808" y="1078992"/>
-            <a:ext cx="3749040" cy="329184"/>
+            <a:off x="5321808" y="1097280"/>
+            <a:ext cx="3657600" cy="310896"/>
           </a:xfrm>
           <a:prstGeom prst="rect">
             <a:avLst/>
@@ -9249,7 +9301,7 @@
         </p:nvSpPr>
         <p:spPr>
           <a:xfrm>
-            <a:off x="4754880" y="1719072"/>
+            <a:off x="4754880" y="1755648"/>
             <a:ext cx="475488" cy="475488"/>
           </a:xfrm>
           <a:prstGeom prst="rect">
@@ -9274,7 +9326,7 @@
         </p:nvSpPr>
         <p:spPr>
           <a:xfrm>
-            <a:off x="4754880" y="1719072"/>
+            <a:off x="4754880" y="1755648"/>
             <a:ext cx="475488" cy="475488"/>
           </a:xfrm>
           <a:prstGeom prst="rect">
@@ -9313,8 +9365,8 @@
         </p:nvSpPr>
         <p:spPr>
           <a:xfrm>
-            <a:off x="5321808" y="1792224"/>
-            <a:ext cx="3749040" cy="329184"/>
+            <a:off x="5321808" y="1847088"/>
+            <a:ext cx="3657600" cy="310896"/>
           </a:xfrm>
           <a:prstGeom prst="rect">
             <a:avLst/>
@@ -9338,7 +9390,7 @@
                 <a:ea typeface="Calibri" pitchFamily="34" charset="-122"/>
                 <a:cs typeface="Calibri" pitchFamily="34" charset="-120"/>
               </a:rPr>
-              <a:t>Modelo de Tabla: Autor</a:t>
+              <a:t>Modelo de Tabla: Cuento</a:t>
             </a:r>
             <a:endParaRPr lang="en-US" sz="1300" dirty="0"/>
           </a:p>
@@ -9352,7 +9404,7 @@
         </p:nvSpPr>
         <p:spPr>
           <a:xfrm>
-            <a:off x="4754880" y="2432304"/>
+            <a:off x="4754880" y="2505456"/>
             <a:ext cx="475488" cy="475488"/>
           </a:xfrm>
           <a:prstGeom prst="rect">
@@ -9377,7 +9429,7 @@
         </p:nvSpPr>
         <p:spPr>
           <a:xfrm>
-            <a:off x="4754880" y="2432304"/>
+            <a:off x="4754880" y="2505456"/>
             <a:ext cx="475488" cy="475488"/>
           </a:xfrm>
           <a:prstGeom prst="rect">
@@ -9416,8 +9468,8 @@
         </p:nvSpPr>
         <p:spPr>
           <a:xfrm>
-            <a:off x="5321808" y="2505456"/>
-            <a:ext cx="3749040" cy="329184"/>
+            <a:off x="5321808" y="2596896"/>
+            <a:ext cx="3657600" cy="310896"/>
           </a:xfrm>
           <a:prstGeom prst="rect">
             <a:avLst/>
@@ -9441,7 +9493,7 @@
                 <a:ea typeface="Calibri" pitchFamily="34" charset="-122"/>
                 <a:cs typeface="Calibri" pitchFamily="34" charset="-120"/>
               </a:rPr>
-              <a:t>Endpoints REST (GET, POST, DELETE)</a:t>
+              <a:t>Endpoints GET, POST, DELETE</a:t>
             </a:r>
             <a:endParaRPr lang="en-US" sz="1300" dirty="0"/>
           </a:p>
@@ -9455,7 +9507,7 @@
         </p:nvSpPr>
         <p:spPr>
           <a:xfrm>
-            <a:off x="4754880" y="3145536"/>
+            <a:off x="4754880" y="3255264"/>
             <a:ext cx="475488" cy="475488"/>
           </a:xfrm>
           <a:prstGeom prst="rect">
@@ -9480,7 +9532,7 @@
         </p:nvSpPr>
         <p:spPr>
           <a:xfrm>
-            <a:off x="4754880" y="3145536"/>
+            <a:off x="4754880" y="3255264"/>
             <a:ext cx="475488" cy="475488"/>
           </a:xfrm>
           <a:prstGeom prst="rect">
@@ -9519,8 +9571,8 @@
         </p:nvSpPr>
         <p:spPr>
           <a:xfrm>
-            <a:off x="5321808" y="3218688"/>
-            <a:ext cx="3749040" cy="329184"/>
+            <a:off x="5321808" y="3346704"/>
+            <a:ext cx="3657600" cy="310896"/>
           </a:xfrm>
           <a:prstGeom prst="rect">
             <a:avLst/>
@@ -9652,8 +9704,8 @@
         </p:nvSpPr>
         <p:spPr>
           <a:xfrm>
-            <a:off x="365760" y="914400"/>
-            <a:ext cx="8412480" cy="548640"/>
+            <a:off x="365760" y="932688"/>
+            <a:ext cx="8412480" cy="438912"/>
           </a:xfrm>
           <a:prstGeom prst="rect">
             <a:avLst/>
@@ -9677,7 +9729,7 @@
                 <a:ea typeface="Calibri" pitchFamily="34" charset="-122"/>
                 <a:cs typeface="Calibri" pitchFamily="34" charset="-120"/>
               </a:rPr>
-              <a:t>Framework agil iterativo que organiza el trabajo en ciclos llamados Sprints, con roles definidos y entregas continuas de valor.</a:t>
+              <a:t>Framework ágil iterativo que organiza el trabajo en ciclos (Sprints), con roles definidos y entregas continuas de valor al cliente.</a:t>
             </a:r>
             <a:endParaRPr lang="en-US" sz="1200" dirty="0"/>
           </a:p>
@@ -9698,16 +9750,16 @@
           </p:nvPr>
         </p:nvGraphicFramePr>
         <p:xfrm>
-          <a:off x="365760" y="1554480"/>
-          <a:ext cx="4206240" cy="1371600"/>
+          <a:off x="365760" y="1463040"/>
+          <a:ext cx="4297680" cy="1371600"/>
         </p:xfrm>
         <a:graphic>
           <a:graphicData uri="http://schemas.openxmlformats.org/drawingml/2006/table">
             <a:tbl>
               <a:tblPr/>
               <a:tblGrid>
-                <a:gridCol w="1645920"/>
-                <a:gridCol w="2560320"/>
+                <a:gridCol w="1554480"/>
+                <a:gridCol w="2743200"/>
               </a:tblGrid>
               <a:tr h="342900">
                 <a:tc>
@@ -9795,7 +9847,7 @@
                           <a:ea typeface="Calibri" pitchFamily="34" charset="-122"/>
                           <a:cs typeface="Calibri" pitchFamily="34" charset="-120"/>
                         </a:rPr>
-                        <a:t>Responsabilidad</a:t>
+                        <a:t>Responsabilidad en BookMora</a:t>
                       </a:r>
                       <a:endParaRPr lang="en-US" sz="1100" dirty="0">
                         <a:latin typeface="Calibri" charset="0"/>
@@ -9933,7 +9985,7 @@
                           <a:ea typeface="Calibri" pitchFamily="34" charset="-122"/>
                           <a:cs typeface="Calibri" pitchFamily="34" charset="-120"/>
                         </a:rPr>
-                        <a:t>Define y prioriza el Product Backlog</a:t>
+                        <a:t>Define los requerimientos de la API (endpoints, entidades)</a:t>
                       </a:r>
                       <a:endParaRPr lang="en-US" sz="1000" dirty="0">
                         <a:latin typeface="Calibri" charset="0"/>
@@ -10071,7 +10123,7 @@
                           <a:ea typeface="Calibri" pitchFamily="34" charset="-122"/>
                           <a:cs typeface="Calibri" pitchFamily="34" charset="-120"/>
                         </a:rPr>
-                        <a:t>Facilita el proceso y elimina impedimentos</a:t>
+                        <a:t>Gestiona el Sprint y resuelve bloqueos técnicos</a:t>
                       </a:r>
                       <a:endParaRPr lang="en-US" sz="1000" dirty="0">
                         <a:latin typeface="Calibri" charset="0"/>
@@ -10209,7 +10261,7 @@
                           <a:ea typeface="Calibri" pitchFamily="34" charset="-122"/>
                           <a:cs typeface="Calibri" pitchFamily="34" charset="-120"/>
                         </a:rPr>
-                        <a:t>Desarrolla los incrementos del producto</a:t>
+                        <a:t>Implementa los controladores y modelos en Spring Boot</a:t>
                       </a:r>
                       <a:endParaRPr lang="en-US" sz="1000" dirty="0">
                         <a:latin typeface="Calibri" charset="0"/>
@@ -10273,8 +10325,8 @@
         </p:nvSpPr>
         <p:spPr>
           <a:xfrm>
-            <a:off x="4709160" y="1572768"/>
-            <a:ext cx="4023360" cy="402336"/>
+            <a:off x="4892040" y="1463040"/>
+            <a:ext cx="3840480" cy="420624"/>
           </a:xfrm>
           <a:prstGeom prst="rect">
             <a:avLst/>
@@ -10284,7 +10336,7 @@
           </a:solidFill>
           <a:ln w="12700">
             <a:solidFill>
-              <a:srgbClr val="CCCCCC"/>
+              <a:srgbClr val="BBBBBB"/>
             </a:solidFill>
             <a:prstDash val="solid"/>
           </a:ln>
@@ -10298,8 +10350,8 @@
         </p:nvSpPr>
         <p:spPr>
           <a:xfrm>
-            <a:off x="4709160" y="1572768"/>
-            <a:ext cx="4023360" cy="402336"/>
+            <a:off x="4892040" y="1463040"/>
+            <a:ext cx="3840480" cy="420624"/>
           </a:xfrm>
           <a:prstGeom prst="rect">
             <a:avLst/>
@@ -10337,8 +10389,8 @@
         </p:nvSpPr>
         <p:spPr>
           <a:xfrm>
-            <a:off x="6720840" y="1975104"/>
-            <a:ext cx="0" cy="128016"/>
+            <a:off x="6812280" y="1883664"/>
+            <a:ext cx="0" cy="73152"/>
           </a:xfrm>
           <a:prstGeom prst="line">
             <a:avLst/>
@@ -10360,8 +10412,8 @@
         </p:nvSpPr>
         <p:spPr>
           <a:xfrm>
-            <a:off x="4709160" y="2103120"/>
-            <a:ext cx="4023360" cy="402336"/>
+            <a:off x="4892040" y="1956816"/>
+            <a:ext cx="3840480" cy="420624"/>
           </a:xfrm>
           <a:prstGeom prst="rect">
             <a:avLst/>
@@ -10371,7 +10423,7 @@
           </a:solidFill>
           <a:ln w="12700">
             <a:solidFill>
-              <a:srgbClr val="CCCCCC"/>
+              <a:srgbClr val="BBBBBB"/>
             </a:solidFill>
             <a:prstDash val="solid"/>
           </a:ln>
@@ -10385,8 +10437,8 @@
         </p:nvSpPr>
         <p:spPr>
           <a:xfrm>
-            <a:off x="4709160" y="2103120"/>
-            <a:ext cx="4023360" cy="402336"/>
+            <a:off x="4892040" y="1956816"/>
+            <a:ext cx="3840480" cy="420624"/>
           </a:xfrm>
           <a:prstGeom prst="rect">
             <a:avLst/>
@@ -10424,8 +10476,8 @@
         </p:nvSpPr>
         <p:spPr>
           <a:xfrm>
-            <a:off x="6720840" y="2505456"/>
-            <a:ext cx="0" cy="128016"/>
+            <a:off x="6812280" y="2377440"/>
+            <a:ext cx="0" cy="73152"/>
           </a:xfrm>
           <a:prstGeom prst="line">
             <a:avLst/>
@@ -10447,8 +10499,8 @@
         </p:nvSpPr>
         <p:spPr>
           <a:xfrm>
-            <a:off x="4709160" y="2633472"/>
-            <a:ext cx="4023360" cy="402336"/>
+            <a:off x="4892040" y="2450592"/>
+            <a:ext cx="3840480" cy="420624"/>
           </a:xfrm>
           <a:prstGeom prst="rect">
             <a:avLst/>
@@ -10458,7 +10510,7 @@
           </a:solidFill>
           <a:ln w="12700">
             <a:solidFill>
-              <a:srgbClr val="CCCCCC"/>
+              <a:srgbClr val="BBBBBB"/>
             </a:solidFill>
             <a:prstDash val="solid"/>
           </a:ln>
@@ -10472,8 +10524,8 @@
         </p:nvSpPr>
         <p:spPr>
           <a:xfrm>
-            <a:off x="4709160" y="2633472"/>
-            <a:ext cx="4023360" cy="402336"/>
+            <a:off x="4892040" y="2450592"/>
+            <a:ext cx="3840480" cy="420624"/>
           </a:xfrm>
           <a:prstGeom prst="rect">
             <a:avLst/>
@@ -10497,7 +10549,7 @@
                 <a:ea typeface="Calibri" pitchFamily="34" charset="-122"/>
                 <a:cs typeface="Calibri" pitchFamily="34" charset="-120"/>
               </a:rPr>
-              <a:t>Sprint (1-4 sem)</a:t>
+              <a:t>SPRINT  (2 semanas)</a:t>
             </a:r>
             <a:endParaRPr lang="en-US" sz="1100" dirty="0"/>
           </a:p>
@@ -10511,8 +10563,8 @@
         </p:nvSpPr>
         <p:spPr>
           <a:xfrm>
-            <a:off x="6720840" y="3035808"/>
-            <a:ext cx="0" cy="128016"/>
+            <a:off x="6812280" y="2871216"/>
+            <a:ext cx="0" cy="73152"/>
           </a:xfrm>
           <a:prstGeom prst="line">
             <a:avLst/>
@@ -10534,8 +10586,8 @@
         </p:nvSpPr>
         <p:spPr>
           <a:xfrm>
-            <a:off x="4709160" y="3163824"/>
-            <a:ext cx="4023360" cy="402336"/>
+            <a:off x="4892040" y="2944368"/>
+            <a:ext cx="3840480" cy="420624"/>
           </a:xfrm>
           <a:prstGeom prst="rect">
             <a:avLst/>
@@ -10545,7 +10597,7 @@
           </a:solidFill>
           <a:ln w="12700">
             <a:solidFill>
-              <a:srgbClr val="CCCCCC"/>
+              <a:srgbClr val="BBBBBB"/>
             </a:solidFill>
             <a:prstDash val="solid"/>
           </a:ln>
@@ -10559,8 +10611,8 @@
         </p:nvSpPr>
         <p:spPr>
           <a:xfrm>
-            <a:off x="4709160" y="3163824"/>
-            <a:ext cx="4023360" cy="402336"/>
+            <a:off x="4892040" y="2944368"/>
+            <a:ext cx="3840480" cy="420624"/>
           </a:xfrm>
           <a:prstGeom prst="rect">
             <a:avLst/>
@@ -10598,8 +10650,8 @@
         </p:nvSpPr>
         <p:spPr>
           <a:xfrm>
-            <a:off x="6720840" y="3566160"/>
-            <a:ext cx="0" cy="128016"/>
+            <a:off x="6812280" y="3364992"/>
+            <a:ext cx="0" cy="73152"/>
           </a:xfrm>
           <a:prstGeom prst="line">
             <a:avLst/>
@@ -10621,8 +10673,8 @@
         </p:nvSpPr>
         <p:spPr>
           <a:xfrm>
-            <a:off x="4709160" y="3694176"/>
-            <a:ext cx="4023360" cy="402336"/>
+            <a:off x="4892040" y="3438144"/>
+            <a:ext cx="3840480" cy="420624"/>
           </a:xfrm>
           <a:prstGeom prst="rect">
             <a:avLst/>
@@ -10632,7 +10684,7 @@
           </a:solidFill>
           <a:ln w="12700">
             <a:solidFill>
-              <a:srgbClr val="CCCCCC"/>
+              <a:srgbClr val="BBBBBB"/>
             </a:solidFill>
             <a:prstDash val="solid"/>
           </a:ln>
@@ -10646,8 +10698,8 @@
         </p:nvSpPr>
         <p:spPr>
           <a:xfrm>
-            <a:off x="4709160" y="3694176"/>
-            <a:ext cx="4023360" cy="402336"/>
+            <a:off x="4892040" y="3438144"/>
+            <a:ext cx="3840480" cy="420624"/>
           </a:xfrm>
           <a:prstGeom prst="rect">
             <a:avLst/>
@@ -10685,8 +10737,8 @@
         </p:nvSpPr>
         <p:spPr>
           <a:xfrm>
-            <a:off x="365760" y="4480560"/>
-            <a:ext cx="8412480" cy="347472"/>
+            <a:off x="365760" y="4526280"/>
+            <a:ext cx="8412480" cy="320040"/>
           </a:xfrm>
           <a:prstGeom prst="rect">
             <a:avLst/>
@@ -10702,7 +10754,7 @@
               <a:buNone/>
             </a:pPr>
             <a:r>
-              <a:rPr lang="en-US" sz="1000" i="1" dirty="0">
+              <a:rPr lang="en-US" sz="900" i="1" dirty="0">
                 <a:solidFill>
                   <a:srgbClr val="888888"/>
                 </a:solidFill>
@@ -10710,9 +10762,9 @@
                 <a:ea typeface="Calibri" pitchFamily="34" charset="-122"/>
                 <a:cs typeface="Calibri" pitchFamily="34" charset="-120"/>
               </a:rPr>
-              <a:t>Sprint de este proyecto: 1 ciclo  |  Duracion estimada: 2 semanas  |  Entregable: API REST funcional</a:t>
+              <a:t>Sprint de este proyecto: 1 ciclo  ·  Duración: 2 semanas  ·  Entregable: API REST funcional con 20 endpoints</a:t>
             </a:r>
-            <a:endParaRPr lang="en-US" sz="1000" dirty="0"/>
+            <a:endParaRPr lang="en-US" sz="900" dirty="0"/>
           </a:p>
         </p:txBody>
       </p:sp>
@@ -10826,7 +10878,7 @@
         </p:nvGraphicFramePr>
         <p:xfrm>
           <a:off x="365760" y="960120"/>
-          <a:ext cx="8412480" cy="3474720"/>
+          <a:ext cx="8412480" cy="3566160"/>
         </p:xfrm>
         <a:graphic>
           <a:graphicData uri="http://schemas.openxmlformats.org/drawingml/2006/table">
@@ -10834,10 +10886,10 @@
               <a:tblPr/>
               <a:tblGrid>
                 <a:gridCol w="1005840"/>
-                <a:gridCol w="2194560"/>
-                <a:gridCol w="5212080"/>
+                <a:gridCol w="2103120"/>
+                <a:gridCol w="5303520"/>
               </a:tblGrid>
-              <a:tr h="434340">
+              <a:tr h="445770">
                 <a:tc>
                   <a:txBody>
                     <a:bodyPr/>
@@ -10991,7 +11043,7 @@
                           <a:ea typeface="Calibri" pitchFamily="34" charset="-122"/>
                           <a:cs typeface="Calibri" pitchFamily="34" charset="-120"/>
                         </a:rPr>
-                        <a:t>Descripcion</a:t>
+                        <a:t>Descripción</a:t>
                       </a:r>
                       <a:endParaRPr lang="en-US" sz="1100" dirty="0">
                         <a:latin typeface="Calibri" charset="0"/>
@@ -11043,7 +11095,7 @@
                   </a:tcPr>
                 </a:tc>
               </a:tr>
-              <a:tr h="434340">
+              <a:tr h="445770">
                 <a:tc>
                   <a:txBody>
                     <a:bodyPr/>
@@ -11197,7 +11249,7 @@
                           <a:ea typeface="Calibri" pitchFamily="34" charset="-122"/>
                           <a:cs typeface="Calibri" pitchFamily="34" charset="-120"/>
                         </a:rPr>
-                        <a:t>CRUD completo sobre la entidad Autor</a:t>
+                        <a:t>CRUD: listar, buscar, agregar, eliminar, filtrar por nombre</a:t>
                       </a:r>
                       <a:endParaRPr lang="en-US" sz="1000" dirty="0">
                         <a:latin typeface="Calibri" charset="0"/>
@@ -11249,7 +11301,7 @@
                   </a:tcPr>
                 </a:tc>
               </a:tr>
-              <a:tr h="434340">
+              <a:tr h="445770">
                 <a:tc>
                   <a:txBody>
                     <a:bodyPr/>
@@ -11403,7 +11455,7 @@
                           <a:ea typeface="Calibri" pitchFamily="34" charset="-122"/>
                           <a:cs typeface="Calibri" pitchFamily="34" charset="-120"/>
                         </a:rPr>
-                        <a:t>CRUD completo sobre la entidad Categoria</a:t>
+                        <a:t>CRUD: listar, buscar, agregar, eliminar, filtrar por nombre</a:t>
                       </a:r>
                       <a:endParaRPr lang="en-US" sz="1000" dirty="0">
                         <a:latin typeface="Calibri" charset="0"/>
@@ -11455,7 +11507,7 @@
                   </a:tcPr>
                 </a:tc>
               </a:tr>
-              <a:tr h="434340">
+              <a:tr h="445770">
                 <a:tc>
                   <a:txBody>
                     <a:bodyPr/>
@@ -11609,7 +11661,7 @@
                           <a:ea typeface="Calibri" pitchFamily="34" charset="-122"/>
                           <a:cs typeface="Calibri" pitchFamily="34" charset="-120"/>
                         </a:rPr>
-                        <a:t>CRUD completo con relacion a Autor y Categoria</a:t>
+                        <a:t>CRUD con FK a Autor (AUTO_ID) y Categoría (CATE_ID)</a:t>
                       </a:r>
                       <a:endParaRPr lang="en-US" sz="1000" dirty="0">
                         <a:latin typeface="Calibri" charset="0"/>
@@ -11661,7 +11713,7 @@
                   </a:tcPr>
                 </a:tc>
               </a:tr>
-              <a:tr h="434340">
+              <a:tr h="445770">
                 <a:tc>
                   <a:txBody>
                     <a:bodyPr/>
@@ -11815,7 +11867,7 @@
                           <a:ea typeface="Calibri" pitchFamily="34" charset="-122"/>
                           <a:cs typeface="Calibri" pitchFamily="34" charset="-120"/>
                         </a:rPr>
-                        <a:t>CRUD completo con relacion a Cuento</a:t>
+                        <a:t>CRUD con FK a Cuento (CUEN_ID)</a:t>
                       </a:r>
                       <a:endParaRPr lang="en-US" sz="1000" dirty="0">
                         <a:latin typeface="Calibri" charset="0"/>
@@ -11867,7 +11919,7 @@
                   </a:tcPr>
                 </a:tc>
               </a:tr>
-              <a:tr h="434340">
+              <a:tr h="445770">
                 <a:tc>
                   <a:txBody>
                     <a:bodyPr/>
@@ -11953,7 +12005,7 @@
                           <a:ea typeface="Calibri" pitchFamily="34" charset="-122"/>
                           <a:cs typeface="Calibri" pitchFamily="34" charset="-120"/>
                         </a:rPr>
-                        <a:t>Busqueda por ID</a:t>
+                        <a:t>Buscar por ID</a:t>
                       </a:r>
                       <a:endParaRPr lang="en-US" sz="1000" dirty="0">
                         <a:latin typeface="Calibri" charset="0"/>
@@ -12021,7 +12073,7 @@
                           <a:ea typeface="Calibri" pitchFamily="34" charset="-122"/>
                           <a:cs typeface="Calibri" pitchFamily="34" charset="-120"/>
                         </a:rPr>
-                        <a:t>Localizar un registro especifico mediante su ID</a:t>
+                        <a:t>GET /{entidad}/{id} retorna un objeto específico</a:t>
                       </a:r>
                       <a:endParaRPr lang="en-US" sz="1000" dirty="0">
                         <a:latin typeface="Calibri" charset="0"/>
@@ -12073,7 +12125,7 @@
                   </a:tcPr>
                 </a:tc>
               </a:tr>
-              <a:tr h="434340">
+              <a:tr h="445770">
                 <a:tc>
                   <a:txBody>
                     <a:bodyPr/>
@@ -12159,7 +12211,7 @@
                           <a:ea typeface="Calibri" pitchFamily="34" charset="-122"/>
                           <a:cs typeface="Calibri" pitchFamily="34" charset="-120"/>
                         </a:rPr>
-                        <a:t>Filtrado por atributo</a:t>
+                        <a:t>Filtrar por atributo</a:t>
                       </a:r>
                       <a:endParaRPr lang="en-US" sz="1000" dirty="0">
                         <a:latin typeface="Calibri" charset="0"/>
@@ -12227,7 +12279,7 @@
                           <a:ea typeface="Calibri" pitchFamily="34" charset="-122"/>
                           <a:cs typeface="Calibri" pitchFamily="34" charset="-120"/>
                         </a:rPr>
-                        <a:t>Filtrar registros por nombre, autoId o cuentoId</a:t>
+                        <a:t>GET /filtrar?param= filtra la lista por un campo</a:t>
                       </a:r>
                       <a:endParaRPr lang="en-US" sz="1000" dirty="0">
                         <a:latin typeface="Calibri" charset="0"/>
@@ -12279,7 +12331,7 @@
                   </a:tcPr>
                 </a:tc>
               </a:tr>
-              <a:tr h="434340">
+              <a:tr h="445770">
                 <a:tc>
                   <a:txBody>
                     <a:bodyPr/>
@@ -12365,7 +12417,7 @@
                           <a:ea typeface="Calibri" pitchFamily="34" charset="-122"/>
                           <a:cs typeface="Calibri" pitchFamily="34" charset="-120"/>
                         </a:rPr>
-                        <a:t>API REST</a:t>
+                        <a:t>API REST HTTP</a:t>
                       </a:r>
                       <a:endParaRPr lang="en-US" sz="1000" dirty="0">
                         <a:latin typeface="Calibri" charset="0"/>
@@ -12433,7 +12485,7 @@
                           <a:ea typeface="Calibri" pitchFamily="34" charset="-122"/>
                           <a:cs typeface="Calibri" pitchFamily="34" charset="-120"/>
                         </a:rPr>
-                        <a:t>Exponer servicios via HTTP (GET, POST, DELETE)</a:t>
+                        <a:t>Comunicación vía GET, POST, DELETE con respuestas JSON</a:t>
                       </a:r>
                       <a:endParaRPr lang="en-US" sz="1000" dirty="0">
                         <a:latin typeface="Calibri" charset="0"/>
@@ -12591,16 +12643,16 @@
         </p:nvSpPr>
         <p:spPr>
           <a:xfrm>
-            <a:off x="274320" y="1280160"/>
-            <a:ext cx="502920" cy="502920"/>
+            <a:off x="658368" y="1097280"/>
+            <a:ext cx="512064" cy="512064"/>
           </a:xfrm>
           <a:prstGeom prst="ellipse">
             <a:avLst/>
           </a:prstGeom>
           <a:solidFill>
-            <a:srgbClr val="2E75B6"/>
+            <a:srgbClr val="FFFFFF"/>
           </a:solidFill>
-          <a:ln w="12700">
+          <a:ln w="25400">
             <a:solidFill>
               <a:srgbClr val="2E75B6"/>
             </a:solidFill>
@@ -12616,16 +12668,14 @@
         </p:nvSpPr>
         <p:spPr>
           <a:xfrm>
-            <a:off x="347472" y="1783080"/>
-            <a:ext cx="365760" cy="914400"/>
+            <a:off x="914400" y="1609344"/>
+            <a:ext cx="0" cy="502920"/>
           </a:xfrm>
-          <a:prstGeom prst="rect">
+          <a:prstGeom prst="line">
             <a:avLst/>
           </a:prstGeom>
-          <a:solidFill>
-            <a:srgbClr val="2E75B6"/>
-          </a:solidFill>
-          <a:ln w="12700">
+          <a:noFill/>
+          <a:ln w="25400">
             <a:solidFill>
               <a:srgbClr val="2E75B6"/>
             </a:solidFill>
@@ -12641,8 +12691,8 @@
         </p:nvSpPr>
         <p:spPr>
           <a:xfrm>
-            <a:off x="347472" y="2057400"/>
-            <a:ext cx="-182880" cy="365760"/>
+            <a:off x="640080" y="1773936"/>
+            <a:ext cx="274320" cy="164592"/>
           </a:xfrm>
           <a:prstGeom prst="line">
             <a:avLst/>
@@ -12664,8 +12714,8 @@
         </p:nvSpPr>
         <p:spPr>
           <a:xfrm>
-            <a:off x="713232" y="2057400"/>
-            <a:ext cx="182880" cy="365760"/>
+            <a:off x="914400" y="1773936"/>
+            <a:ext cx="274320" cy="164592"/>
           </a:xfrm>
           <a:prstGeom prst="line">
             <a:avLst/>
@@ -12681,14 +12731,60 @@
       </p:sp>
       <p:sp>
         <p:nvSpPr>
-          <p:cNvPr id="8" name="Text 6"/>
+          <p:cNvPr id="8" name="Shape 6"/>
           <p:cNvSpPr/>
           <p:nvPr/>
         </p:nvSpPr>
         <p:spPr>
           <a:xfrm>
-            <a:off x="91440" y="2788920"/>
-            <a:ext cx="822960" cy="274320"/>
+            <a:off x="658368" y="2221992"/>
+            <a:ext cx="256032" cy="274320"/>
+          </a:xfrm>
+          <a:prstGeom prst="line">
+            <a:avLst/>
+          </a:prstGeom>
+          <a:noFill/>
+          <a:ln w="25400">
+            <a:solidFill>
+              <a:srgbClr val="2E75B6"/>
+            </a:solidFill>
+            <a:prstDash val="solid"/>
+          </a:ln>
+        </p:spPr>
+      </p:sp>
+      <p:sp>
+        <p:nvSpPr>
+          <p:cNvPr id="9" name="Shape 7"/>
+          <p:cNvSpPr/>
+          <p:nvPr/>
+        </p:nvSpPr>
+        <p:spPr>
+          <a:xfrm>
+            <a:off x="914400" y="2221992"/>
+            <a:ext cx="256032" cy="274320"/>
+          </a:xfrm>
+          <a:prstGeom prst="line">
+            <a:avLst/>
+          </a:prstGeom>
+          <a:noFill/>
+          <a:ln w="25400">
+            <a:solidFill>
+              <a:srgbClr val="2E75B6"/>
+            </a:solidFill>
+            <a:prstDash val="solid"/>
+          </a:ln>
+        </p:spPr>
+      </p:sp>
+      <p:sp>
+        <p:nvSpPr>
+          <p:cNvPr id="10" name="Text 8"/>
+          <p:cNvSpPr/>
+          <p:nvPr/>
+        </p:nvSpPr>
+        <p:spPr>
+          <a:xfrm>
+            <a:off x="365760" y="2596896"/>
+            <a:ext cx="1097280" cy="274320"/>
           </a:xfrm>
           <a:prstGeom prst="rect">
             <a:avLst/>
@@ -12704,7 +12800,7 @@
               <a:buNone/>
             </a:pPr>
             <a:r>
-              <a:rPr lang="en-US" sz="1000" dirty="0">
+              <a:rPr lang="en-US" sz="1000" b="1" dirty="0">
                 <a:solidFill>
                   <a:srgbClr val="1A1A1A"/>
                 </a:solidFill>
@@ -12720,14 +12816,14 @@
       </p:sp>
       <p:sp>
         <p:nvSpPr>
-          <p:cNvPr id="9" name="Shape 7"/>
+          <p:cNvPr id="11" name="Shape 9"/>
           <p:cNvSpPr/>
           <p:nvPr/>
         </p:nvSpPr>
         <p:spPr>
           <a:xfrm>
-            <a:off x="2011680" y="1051560"/>
-            <a:ext cx="3108960" cy="457200"/>
+            <a:off x="2286000" y="1051560"/>
+            <a:ext cx="2926080" cy="457200"/>
           </a:xfrm>
           <a:prstGeom prst="ellipse">
             <a:avLst/>
@@ -12745,14 +12841,14 @@
       </p:sp>
       <p:sp>
         <p:nvSpPr>
-          <p:cNvPr id="10" name="Text 8"/>
+          <p:cNvPr id="12" name="Text 10"/>
           <p:cNvSpPr/>
           <p:nvPr/>
         </p:nvSpPr>
         <p:spPr>
           <a:xfrm>
-            <a:off x="2011680" y="1051560"/>
-            <a:ext cx="3108960" cy="457200"/>
+            <a:off x="2286000" y="1051560"/>
+            <a:ext cx="2926080" cy="457200"/>
           </a:xfrm>
           <a:prstGeom prst="rect">
             <a:avLst/>
@@ -12784,14 +12880,14 @@
       </p:sp>
       <p:sp>
         <p:nvSpPr>
-          <p:cNvPr id="11" name="Shape 9"/>
+          <p:cNvPr id="13" name="Shape 11"/>
           <p:cNvSpPr/>
           <p:nvPr/>
         </p:nvSpPr>
         <p:spPr>
           <a:xfrm>
-            <a:off x="777240" y="1280160"/>
-            <a:ext cx="1234440" cy="0"/>
+            <a:off x="1170432" y="1280160"/>
+            <a:ext cx="1115568" cy="0"/>
           </a:xfrm>
           <a:prstGeom prst="line">
             <a:avLst/>
@@ -12807,14 +12903,14 @@
       </p:sp>
       <p:sp>
         <p:nvSpPr>
-          <p:cNvPr id="12" name="Shape 10"/>
+          <p:cNvPr id="14" name="Shape 12"/>
           <p:cNvSpPr/>
           <p:nvPr/>
         </p:nvSpPr>
         <p:spPr>
           <a:xfrm>
-            <a:off x="2011680" y="1764792"/>
-            <a:ext cx="3108960" cy="457200"/>
+            <a:off x="2286000" y="1764792"/>
+            <a:ext cx="2926080" cy="457200"/>
           </a:xfrm>
           <a:prstGeom prst="ellipse">
             <a:avLst/>
@@ -12832,14 +12928,14 @@
       </p:sp>
       <p:sp>
         <p:nvSpPr>
-          <p:cNvPr id="13" name="Text 11"/>
+          <p:cNvPr id="15" name="Text 13"/>
           <p:cNvSpPr/>
           <p:nvPr/>
         </p:nvSpPr>
         <p:spPr>
           <a:xfrm>
-            <a:off x="2011680" y="1764792"/>
-            <a:ext cx="3108960" cy="457200"/>
+            <a:off x="2286000" y="1764792"/>
+            <a:ext cx="2926080" cy="457200"/>
           </a:xfrm>
           <a:prstGeom prst="rect">
             <a:avLst/>
@@ -12871,14 +12967,14 @@
       </p:sp>
       <p:sp>
         <p:nvSpPr>
-          <p:cNvPr id="14" name="Shape 12"/>
+          <p:cNvPr id="16" name="Shape 14"/>
           <p:cNvSpPr/>
           <p:nvPr/>
         </p:nvSpPr>
         <p:spPr>
           <a:xfrm>
-            <a:off x="777240" y="1993392"/>
-            <a:ext cx="1234440" cy="0"/>
+            <a:off x="1170432" y="1993392"/>
+            <a:ext cx="1115568" cy="0"/>
           </a:xfrm>
           <a:prstGeom prst="line">
             <a:avLst/>
@@ -12894,14 +12990,14 @@
       </p:sp>
       <p:sp>
         <p:nvSpPr>
-          <p:cNvPr id="15" name="Shape 13"/>
+          <p:cNvPr id="17" name="Shape 15"/>
           <p:cNvSpPr/>
           <p:nvPr/>
         </p:nvSpPr>
         <p:spPr>
           <a:xfrm>
-            <a:off x="2011680" y="2478024"/>
-            <a:ext cx="3108960" cy="457200"/>
+            <a:off x="2286000" y="2478024"/>
+            <a:ext cx="2926080" cy="457200"/>
           </a:xfrm>
           <a:prstGeom prst="ellipse">
             <a:avLst/>
@@ -12919,14 +13015,14 @@
       </p:sp>
       <p:sp>
         <p:nvSpPr>
-          <p:cNvPr id="16" name="Text 14"/>
+          <p:cNvPr id="18" name="Text 16"/>
           <p:cNvSpPr/>
           <p:nvPr/>
         </p:nvSpPr>
         <p:spPr>
           <a:xfrm>
-            <a:off x="2011680" y="2478024"/>
-            <a:ext cx="3108960" cy="457200"/>
+            <a:off x="2286000" y="2478024"/>
+            <a:ext cx="2926080" cy="457200"/>
           </a:xfrm>
           <a:prstGeom prst="rect">
             <a:avLst/>
@@ -12958,14 +13054,14 @@
       </p:sp>
       <p:sp>
         <p:nvSpPr>
-          <p:cNvPr id="17" name="Shape 15"/>
+          <p:cNvPr id="19" name="Shape 17"/>
           <p:cNvSpPr/>
           <p:nvPr/>
         </p:nvSpPr>
         <p:spPr>
           <a:xfrm>
-            <a:off x="777240" y="2706624"/>
-            <a:ext cx="1234440" cy="0"/>
+            <a:off x="1170432" y="2706624"/>
+            <a:ext cx="1115568" cy="0"/>
           </a:xfrm>
           <a:prstGeom prst="line">
             <a:avLst/>
@@ -12981,14 +13077,14 @@
       </p:sp>
       <p:sp>
         <p:nvSpPr>
-          <p:cNvPr id="18" name="Shape 16"/>
+          <p:cNvPr id="20" name="Shape 18"/>
           <p:cNvSpPr/>
           <p:nvPr/>
         </p:nvSpPr>
         <p:spPr>
           <a:xfrm>
-            <a:off x="2011680" y="3191256"/>
-            <a:ext cx="3108960" cy="457200"/>
+            <a:off x="2286000" y="3191256"/>
+            <a:ext cx="2926080" cy="457200"/>
           </a:xfrm>
           <a:prstGeom prst="ellipse">
             <a:avLst/>
@@ -13006,14 +13102,14 @@
       </p:sp>
       <p:sp>
         <p:nvSpPr>
-          <p:cNvPr id="19" name="Text 17"/>
+          <p:cNvPr id="21" name="Text 19"/>
           <p:cNvSpPr/>
           <p:nvPr/>
         </p:nvSpPr>
         <p:spPr>
           <a:xfrm>
-            <a:off x="2011680" y="3191256"/>
-            <a:ext cx="3108960" cy="457200"/>
+            <a:off x="2286000" y="3191256"/>
+            <a:ext cx="2926080" cy="457200"/>
           </a:xfrm>
           <a:prstGeom prst="rect">
             <a:avLst/>
@@ -13045,14 +13141,14 @@
       </p:sp>
       <p:sp>
         <p:nvSpPr>
-          <p:cNvPr id="20" name="Shape 18"/>
+          <p:cNvPr id="22" name="Shape 20"/>
           <p:cNvSpPr/>
           <p:nvPr/>
         </p:nvSpPr>
         <p:spPr>
           <a:xfrm>
-            <a:off x="777240" y="3419856"/>
-            <a:ext cx="1234440" cy="0"/>
+            <a:off x="1170432" y="3419856"/>
+            <a:ext cx="1115568" cy="0"/>
           </a:xfrm>
           <a:prstGeom prst="line">
             <a:avLst/>
@@ -13068,14 +13164,14 @@
       </p:sp>
       <p:sp>
         <p:nvSpPr>
-          <p:cNvPr id="21" name="Shape 19"/>
+          <p:cNvPr id="23" name="Shape 21"/>
           <p:cNvSpPr/>
           <p:nvPr/>
         </p:nvSpPr>
         <p:spPr>
           <a:xfrm>
-            <a:off x="2011680" y="3904488"/>
-            <a:ext cx="3108960" cy="457200"/>
+            <a:off x="2286000" y="3904488"/>
+            <a:ext cx="2926080" cy="457200"/>
           </a:xfrm>
           <a:prstGeom prst="ellipse">
             <a:avLst/>
@@ -13093,14 +13189,14 @@
       </p:sp>
       <p:sp>
         <p:nvSpPr>
-          <p:cNvPr id="22" name="Text 20"/>
+          <p:cNvPr id="24" name="Text 22"/>
           <p:cNvSpPr/>
           <p:nvPr/>
         </p:nvSpPr>
         <p:spPr>
           <a:xfrm>
-            <a:off x="2011680" y="3904488"/>
-            <a:ext cx="3108960" cy="457200"/>
+            <a:off x="2286000" y="3904488"/>
+            <a:ext cx="2926080" cy="457200"/>
           </a:xfrm>
           <a:prstGeom prst="rect">
             <a:avLst/>
@@ -13132,14 +13228,14 @@
       </p:sp>
       <p:sp>
         <p:nvSpPr>
-          <p:cNvPr id="23" name="Shape 21"/>
+          <p:cNvPr id="25" name="Shape 23"/>
           <p:cNvSpPr/>
           <p:nvPr/>
         </p:nvSpPr>
         <p:spPr>
           <a:xfrm>
-            <a:off x="777240" y="4133088"/>
-            <a:ext cx="1234440" cy="0"/>
+            <a:off x="1170432" y="4133088"/>
+            <a:ext cx="1115568" cy="0"/>
           </a:xfrm>
           <a:prstGeom prst="line">
             <a:avLst/>
@@ -13168,19 +13264,19 @@
           </p:nvPr>
         </p:nvGraphicFramePr>
         <p:xfrm>
-          <a:off x="5303520" y="960120"/>
-          <a:ext cx="3474720" cy="2926080"/>
+          <a:off x="5486400" y="960120"/>
+          <a:ext cx="3291840" cy="2743200"/>
         </p:xfrm>
         <a:graphic>
           <a:graphicData uri="http://schemas.openxmlformats.org/drawingml/2006/table">
             <a:tbl>
               <a:tblPr/>
               <a:tblGrid>
-                <a:gridCol w="1554480"/>
+                <a:gridCol w="1463040"/>
                 <a:gridCol w="1280160"/>
-                <a:gridCol w="640080"/>
+                <a:gridCol w="548640"/>
               </a:tblGrid>
-              <a:tr h="487680">
+              <a:tr h="457200">
                 <a:tc>
                   <a:txBody>
                     <a:bodyPr/>
@@ -13266,7 +13362,7 @@
                           <a:ea typeface="Calibri" pitchFamily="34" charset="-122"/>
                           <a:cs typeface="Calibri" pitchFamily="34" charset="-120"/>
                         </a:rPr>
-                        <a:t>Endpoint</a:t>
+                        <a:t>Endpoint ejemplo</a:t>
                       </a:r>
                       <a:endParaRPr lang="en-US" sz="1100" dirty="0">
                         <a:latin typeface="Calibri" charset="0"/>
@@ -13334,7 +13430,7 @@
                           <a:ea typeface="Calibri" pitchFamily="34" charset="-122"/>
                           <a:cs typeface="Calibri" pitchFamily="34" charset="-120"/>
                         </a:rPr>
-                        <a:t>Metodo HTTP</a:t>
+                        <a:t>HTTP</a:t>
                       </a:r>
                       <a:endParaRPr lang="en-US" sz="1100" dirty="0">
                         <a:latin typeface="Calibri" charset="0"/>
@@ -13386,7 +13482,7 @@
                   </a:tcPr>
                 </a:tc>
               </a:tr>
-              <a:tr h="487680">
+              <a:tr h="457200">
                 <a:tc>
                   <a:txBody>
                     <a:bodyPr/>
@@ -13472,7 +13568,7 @@
                           <a:ea typeface="Calibri" pitchFamily="34" charset="-122"/>
                           <a:cs typeface="Calibri" pitchFamily="34" charset="-120"/>
                         </a:rPr>
-                        <a:t>/listarAutor, /listarCuento...</a:t>
+                        <a:t>/listarAutor, /listarCuento</a:t>
                       </a:r>
                       <a:endParaRPr lang="en-US" sz="1000" dirty="0">
                         <a:latin typeface="Calibri" charset="0"/>
@@ -13592,7 +13688,7 @@
                   </a:tcPr>
                 </a:tc>
               </a:tr>
-              <a:tr h="487680">
+              <a:tr h="457200">
                 <a:tc>
                   <a:txBody>
                     <a:bodyPr/>
@@ -13678,7 +13774,7 @@
                           <a:ea typeface="Calibri" pitchFamily="34" charset="-122"/>
                           <a:cs typeface="Calibri" pitchFamily="34" charset="-120"/>
                         </a:rPr>
-                        <a:t>/autor/{id}, /cuento/{id}...</a:t>
+                        <a:t>/autor/{id}, /cuento/{id}</a:t>
                       </a:r>
                       <a:endParaRPr lang="en-US" sz="1000" dirty="0">
                         <a:latin typeface="Calibri" charset="0"/>
@@ -13798,7 +13894,7 @@
                   </a:tcPr>
                 </a:tc>
               </a:tr>
-              <a:tr h="487680">
+              <a:tr h="457200">
                 <a:tc>
                   <a:txBody>
                     <a:bodyPr/>
@@ -13816,7 +13912,7 @@
                           <a:ea typeface="Calibri" pitchFamily="34" charset="-122"/>
                           <a:cs typeface="Calibri" pitchFamily="34" charset="-120"/>
                         </a:rPr>
-                        <a:t>Insertar registro</a:t>
+                        <a:t>Insertar</a:t>
                       </a:r>
                       <a:endParaRPr lang="en-US" sz="1000" dirty="0">
                         <a:latin typeface="Calibri" charset="0"/>
@@ -13884,7 +13980,7 @@
                           <a:ea typeface="Calibri" pitchFamily="34" charset="-122"/>
                           <a:cs typeface="Calibri" pitchFamily="34" charset="-120"/>
                         </a:rPr>
-                        <a:t>/agregarAutor, /agregarCuento...</a:t>
+                        <a:t>/agregarAutor, /agregarCuento</a:t>
                       </a:r>
                       <a:endParaRPr lang="en-US" sz="1000" dirty="0">
                         <a:latin typeface="Calibri" charset="0"/>
@@ -14004,7 +14100,7 @@
                   </a:tcPr>
                 </a:tc>
               </a:tr>
-              <a:tr h="487680">
+              <a:tr h="457200">
                 <a:tc>
                   <a:txBody>
                     <a:bodyPr/>
@@ -14022,7 +14118,7 @@
                           <a:ea typeface="Calibri" pitchFamily="34" charset="-122"/>
                           <a:cs typeface="Calibri" pitchFamily="34" charset="-120"/>
                         </a:rPr>
-                        <a:t>Eliminar registro</a:t>
+                        <a:t>Eliminar</a:t>
                       </a:r>
                       <a:endParaRPr lang="en-US" sz="1000" dirty="0">
                         <a:latin typeface="Calibri" charset="0"/>
@@ -14090,7 +14186,7 @@
                           <a:ea typeface="Calibri" pitchFamily="34" charset="-122"/>
                           <a:cs typeface="Calibri" pitchFamily="34" charset="-120"/>
                         </a:rPr>
-                        <a:t>/autor/{id}, /cuento/{id}...</a:t>
+                        <a:t>/autor/{id}, /cuento/{id}</a:t>
                       </a:r>
                       <a:endParaRPr lang="en-US" sz="1000" dirty="0">
                         <a:latin typeface="Calibri" charset="0"/>
@@ -14210,7 +14306,7 @@
                   </a:tcPr>
                 </a:tc>
               </a:tr>
-              <a:tr h="487680">
+              <a:tr h="457200">
                 <a:tc>
                   <a:txBody>
                     <a:bodyPr/>
@@ -14228,7 +14324,7 @@
                           <a:ea typeface="Calibri" pitchFamily="34" charset="-122"/>
                           <a:cs typeface="Calibri" pitchFamily="34" charset="-120"/>
                         </a:rPr>
-                        <a:t>Filtrar registros</a:t>
+                        <a:t>Filtrar</a:t>
                       </a:r>
                       <a:endParaRPr lang="en-US" sz="1000" dirty="0">
                         <a:latin typeface="Calibri" charset="0"/>
@@ -14296,7 +14392,7 @@
                           <a:ea typeface="Calibri" pitchFamily="34" charset="-122"/>
                           <a:cs typeface="Calibri" pitchFamily="34" charset="-120"/>
                         </a:rPr>
-                        <a:t>/filtrarAutor?nombre=...</a:t>
+                        <a:t>/filtrarAutor?nombre=</a:t>
                       </a:r>
                       <a:endParaRPr lang="en-US" sz="1000" dirty="0">
                         <a:latin typeface="Calibri" charset="0"/>
@@ -14485,7 +14581,7 @@
                 <a:ea typeface="Calibri" pitchFamily="34" charset="-122"/>
                 <a:cs typeface="Calibri" pitchFamily="34" charset="-120"/>
               </a:rPr>
-              <a:t>Modelo Entidad-Relacion (MER)</a:t>
+              <a:t>Modelo Entidad-Relación (MER)</a:t>
             </a:r>
             <a:endParaRPr lang="en-US" sz="3000" dirty="0"/>
           </a:p>
@@ -14516,39 +14612,77 @@
       </p:sp>
       <p:sp>
         <p:nvSpPr>
-          <p:cNvPr id="4" name="Shape 2"/>
+          <p:cNvPr id="4" name="Text 2"/>
           <p:cNvSpPr/>
           <p:nvPr/>
         </p:nvSpPr>
         <p:spPr>
           <a:xfrm>
-            <a:off x="365760" y="1005840"/>
-            <a:ext cx="2194560" cy="347472"/>
+            <a:off x="365760" y="914400"/>
+            <a:ext cx="8412480" cy="292608"/>
           </a:xfrm>
           <a:prstGeom prst="rect">
             <a:avLst/>
           </a:prstGeom>
-          <a:solidFill>
-            <a:srgbClr val="2E75B6"/>
-          </a:solidFill>
-          <a:ln w="12700">
-            <a:solidFill>
-              <a:srgbClr val="2E75B6"/>
-            </a:solidFill>
-            <a:prstDash val="solid"/>
-          </a:ln>
+          <a:noFill/>
+          <a:ln/>
         </p:spPr>
+        <p:txBody>
+          <a:bodyPr wrap="square" lIns="0" tIns="0" rIns="0" bIns="0" rtlCol="0" anchor="ctr"/>
+          <a:lstStyle/>
+          <a:p>
+            <a:pPr algn="l" indent="0" marL="0">
+              <a:buNone/>
+            </a:pPr>
+            <a:r>
+              <a:rPr lang="en-US" sz="1000" i="1" dirty="0">
+                <a:solidFill>
+                  <a:srgbClr val="888888"/>
+                </a:solidFill>
+                <a:latin typeface="Calibri" pitchFamily="34" charset="0"/>
+                <a:ea typeface="Calibri" pitchFamily="34" charset="-122"/>
+                <a:cs typeface="Calibri" pitchFamily="34" charset="-120"/>
+              </a:rPr>
+              <a:t>Generado con pgAdmin 4 · PostgreSQL 18  |  4 entidades: AUTOR, CATEGORIA, CUENTO, FAVORITO</a:t>
+            </a:r>
+            <a:endParaRPr lang="en-US" sz="1000" dirty="0"/>
+          </a:p>
+        </p:txBody>
       </p:sp>
+      <p:pic>
+        <p:nvPicPr>
+          <p:cNvPr id="5" name="Image 0" descr="C:\Users\MARIA JOSE MORA MORA\Downloads\5 SEMESTRE\Metodologia\Spring\demo - copia\diagrama_mer.png">    </p:cNvPr>
+          <p:cNvPicPr>
+            <a:picLocks noChangeAspect="1"/>
+          </p:cNvPicPr>
+          <p:nvPr/>
+        </p:nvPicPr>
+        <p:blipFill>
+          <a:blip r:embed="rId1"/>
+          <a:stretch>
+            <a:fillRect/>
+          </a:stretch>
+        </p:blipFill>
+        <p:spPr>
+          <a:xfrm>
+            <a:off x="457200" y="1234440"/>
+            <a:ext cx="8229600" cy="3611880"/>
+          </a:xfrm>
+          <a:prstGeom prst="rect">
+            <a:avLst/>
+          </a:prstGeom>
+        </p:spPr>
+      </p:pic>
       <p:sp>
         <p:nvSpPr>
-          <p:cNvPr id="5" name="Text 3"/>
+          <p:cNvPr id="6" name="Text 3"/>
           <p:cNvSpPr/>
           <p:nvPr/>
         </p:nvSpPr>
         <p:spPr>
           <a:xfrm>
-            <a:off x="365760" y="1005840"/>
-            <a:ext cx="2194560" cy="347472"/>
+            <a:off x="365760" y="4828032"/>
+            <a:ext cx="8412480" cy="237744"/>
           </a:xfrm>
           <a:prstGeom prst="rect">
             <a:avLst/>
@@ -14564,1417 +14698,15 @@
               <a:buNone/>
             </a:pPr>
             <a:r>
-              <a:rPr lang="en-US" sz="1100" b="1" dirty="0">
+              <a:rPr lang="en-US" sz="900" dirty="0">
                 <a:solidFill>
-                  <a:srgbClr val="FFFFFF"/>
+                  <a:srgbClr val="888888"/>
                 </a:solidFill>
                 <a:latin typeface="Calibri" pitchFamily="34" charset="0"/>
                 <a:ea typeface="Calibri" pitchFamily="34" charset="-122"/>
                 <a:cs typeface="Calibri" pitchFamily="34" charset="-120"/>
               </a:rPr>
-              <a:t>AUTOR</a:t>
-            </a:r>
-            <a:endParaRPr lang="en-US" sz="1100" dirty="0"/>
-          </a:p>
-        </p:txBody>
-      </p:sp>
-      <p:sp>
-        <p:nvSpPr>
-          <p:cNvPr id="6" name="Shape 4"/>
-          <p:cNvSpPr/>
-          <p:nvPr/>
-        </p:nvSpPr>
-        <p:spPr>
-          <a:xfrm>
-            <a:off x="365760" y="1353312"/>
-            <a:ext cx="2194560" cy="256032"/>
-          </a:xfrm>
-          <a:prstGeom prst="rect">
-            <a:avLst/>
-          </a:prstGeom>
-          <a:solidFill>
-            <a:srgbClr val="FFFFFF"/>
-          </a:solidFill>
-          <a:ln w="12700">
-            <a:solidFill>
-              <a:srgbClr val="DDDDDD"/>
-            </a:solidFill>
-            <a:prstDash val="solid"/>
-          </a:ln>
-        </p:spPr>
-      </p:sp>
-      <p:sp>
-        <p:nvSpPr>
-          <p:cNvPr id="7" name="Text 5"/>
-          <p:cNvSpPr/>
-          <p:nvPr/>
-        </p:nvSpPr>
-        <p:spPr>
-          <a:xfrm>
-            <a:off x="438912" y="1353312"/>
-            <a:ext cx="2048256" cy="256032"/>
-          </a:xfrm>
-          <a:prstGeom prst="rect">
-            <a:avLst/>
-          </a:prstGeom>
-          <a:noFill/>
-          <a:ln/>
-        </p:spPr>
-        <p:txBody>
-          <a:bodyPr wrap="square" lIns="0" tIns="0" rIns="0" bIns="0" rtlCol="0" anchor="ctr"/>
-          <a:lstStyle/>
-          <a:p>
-            <a:pPr algn="l" indent="0" marL="0">
-              <a:buNone/>
-            </a:pPr>
-            <a:r>
-              <a:rPr lang="en-US" sz="900" b="1" dirty="0">
-                <a:solidFill>
-                  <a:srgbClr val="AA0000"/>
-                </a:solidFill>
-                <a:latin typeface="Courier New" pitchFamily="34" charset="0"/>
-                <a:ea typeface="Courier New" pitchFamily="34" charset="-122"/>
-                <a:cs typeface="Courier New" pitchFamily="34" charset="-120"/>
-              </a:rPr>
-              <a:t>PK idAutor</a:t>
-            </a:r>
-            <a:endParaRPr lang="en-US" sz="900" dirty="0"/>
-          </a:p>
-        </p:txBody>
-      </p:sp>
-      <p:sp>
-        <p:nvSpPr>
-          <p:cNvPr id="8" name="Shape 6"/>
-          <p:cNvSpPr/>
-          <p:nvPr/>
-        </p:nvSpPr>
-        <p:spPr>
-          <a:xfrm>
-            <a:off x="365760" y="1609344"/>
-            <a:ext cx="2194560" cy="256032"/>
-          </a:xfrm>
-          <a:prstGeom prst="rect">
-            <a:avLst/>
-          </a:prstGeom>
-          <a:solidFill>
-            <a:srgbClr val="F0F0F0"/>
-          </a:solidFill>
-          <a:ln w="12700">
-            <a:solidFill>
-              <a:srgbClr val="DDDDDD"/>
-            </a:solidFill>
-            <a:prstDash val="solid"/>
-          </a:ln>
-        </p:spPr>
-      </p:sp>
-      <p:sp>
-        <p:nvSpPr>
-          <p:cNvPr id="9" name="Text 7"/>
-          <p:cNvSpPr/>
-          <p:nvPr/>
-        </p:nvSpPr>
-        <p:spPr>
-          <a:xfrm>
-            <a:off x="438912" y="1609344"/>
-            <a:ext cx="2048256" cy="256032"/>
-          </a:xfrm>
-          <a:prstGeom prst="rect">
-            <a:avLst/>
-          </a:prstGeom>
-          <a:noFill/>
-          <a:ln/>
-        </p:spPr>
-        <p:txBody>
-          <a:bodyPr wrap="square" lIns="0" tIns="0" rIns="0" bIns="0" rtlCol="0" anchor="ctr"/>
-          <a:lstStyle/>
-          <a:p>
-            <a:pPr algn="l" indent="0" marL="0">
-              <a:buNone/>
-            </a:pPr>
-            <a:r>
-              <a:rPr lang="en-US" sz="900" dirty="0">
-                <a:solidFill>
-                  <a:srgbClr val="1A1A1A"/>
-                </a:solidFill>
-                <a:latin typeface="Calibri" pitchFamily="34" charset="0"/>
-                <a:ea typeface="Calibri" pitchFamily="34" charset="-122"/>
-                <a:cs typeface="Calibri" pitchFamily="34" charset="-120"/>
-              </a:rPr>
-              <a:t>nombre</a:t>
-            </a:r>
-            <a:endParaRPr lang="en-US" sz="900" dirty="0"/>
-          </a:p>
-        </p:txBody>
-      </p:sp>
-      <p:sp>
-        <p:nvSpPr>
-          <p:cNvPr id="10" name="Shape 8"/>
-          <p:cNvSpPr/>
-          <p:nvPr/>
-        </p:nvSpPr>
-        <p:spPr>
-          <a:xfrm>
-            <a:off x="365760" y="1865376"/>
-            <a:ext cx="2194560" cy="256032"/>
-          </a:xfrm>
-          <a:prstGeom prst="rect">
-            <a:avLst/>
-          </a:prstGeom>
-          <a:solidFill>
-            <a:srgbClr val="FFFFFF"/>
-          </a:solidFill>
-          <a:ln w="12700">
-            <a:solidFill>
-              <a:srgbClr val="DDDDDD"/>
-            </a:solidFill>
-            <a:prstDash val="solid"/>
-          </a:ln>
-        </p:spPr>
-      </p:sp>
-      <p:sp>
-        <p:nvSpPr>
-          <p:cNvPr id="11" name="Text 9"/>
-          <p:cNvSpPr/>
-          <p:nvPr/>
-        </p:nvSpPr>
-        <p:spPr>
-          <a:xfrm>
-            <a:off x="438912" y="1865376"/>
-            <a:ext cx="2048256" cy="256032"/>
-          </a:xfrm>
-          <a:prstGeom prst="rect">
-            <a:avLst/>
-          </a:prstGeom>
-          <a:noFill/>
-          <a:ln/>
-        </p:spPr>
-        <p:txBody>
-          <a:bodyPr wrap="square" lIns="0" tIns="0" rIns="0" bIns="0" rtlCol="0" anchor="ctr"/>
-          <a:lstStyle/>
-          <a:p>
-            <a:pPr algn="l" indent="0" marL="0">
-              <a:buNone/>
-            </a:pPr>
-            <a:r>
-              <a:rPr lang="en-US" sz="900" dirty="0">
-                <a:solidFill>
-                  <a:srgbClr val="1A1A1A"/>
-                </a:solidFill>
-                <a:latin typeface="Calibri" pitchFamily="34" charset="0"/>
-                <a:ea typeface="Calibri" pitchFamily="34" charset="-122"/>
-                <a:cs typeface="Calibri" pitchFamily="34" charset="-120"/>
-              </a:rPr>
-              <a:t>email</a:t>
-            </a:r>
-            <a:endParaRPr lang="en-US" sz="900" dirty="0"/>
-          </a:p>
-        </p:txBody>
-      </p:sp>
-      <p:sp>
-        <p:nvSpPr>
-          <p:cNvPr id="12" name="Shape 10"/>
-          <p:cNvSpPr/>
-          <p:nvPr/>
-        </p:nvSpPr>
-        <p:spPr>
-          <a:xfrm>
-            <a:off x="365760" y="2743200"/>
-            <a:ext cx="2194560" cy="347472"/>
-          </a:xfrm>
-          <a:prstGeom prst="rect">
-            <a:avLst/>
-          </a:prstGeom>
-          <a:solidFill>
-            <a:srgbClr val="2E75B6"/>
-          </a:solidFill>
-          <a:ln w="12700">
-            <a:solidFill>
-              <a:srgbClr val="2E75B6"/>
-            </a:solidFill>
-            <a:prstDash val="solid"/>
-          </a:ln>
-        </p:spPr>
-      </p:sp>
-      <p:sp>
-        <p:nvSpPr>
-          <p:cNvPr id="13" name="Text 11"/>
-          <p:cNvSpPr/>
-          <p:nvPr/>
-        </p:nvSpPr>
-        <p:spPr>
-          <a:xfrm>
-            <a:off x="365760" y="2743200"/>
-            <a:ext cx="2194560" cy="347472"/>
-          </a:xfrm>
-          <a:prstGeom prst="rect">
-            <a:avLst/>
-          </a:prstGeom>
-          <a:noFill/>
-          <a:ln/>
-        </p:spPr>
-        <p:txBody>
-          <a:bodyPr wrap="square" lIns="0" tIns="0" rIns="0" bIns="0" rtlCol="0" anchor="ctr"/>
-          <a:lstStyle/>
-          <a:p>
-            <a:pPr algn="ctr" indent="0" marL="0">
-              <a:buNone/>
-            </a:pPr>
-            <a:r>
-              <a:rPr lang="en-US" sz="1100" b="1" dirty="0">
-                <a:solidFill>
-                  <a:srgbClr val="FFFFFF"/>
-                </a:solidFill>
-                <a:latin typeface="Calibri" pitchFamily="34" charset="0"/>
-                <a:ea typeface="Calibri" pitchFamily="34" charset="-122"/>
-                <a:cs typeface="Calibri" pitchFamily="34" charset="-120"/>
-              </a:rPr>
-              <a:t>CATEGORIA</a:t>
-            </a:r>
-            <a:endParaRPr lang="en-US" sz="1100" dirty="0"/>
-          </a:p>
-        </p:txBody>
-      </p:sp>
-      <p:sp>
-        <p:nvSpPr>
-          <p:cNvPr id="14" name="Shape 12"/>
-          <p:cNvSpPr/>
-          <p:nvPr/>
-        </p:nvSpPr>
-        <p:spPr>
-          <a:xfrm>
-            <a:off x="365760" y="3090672"/>
-            <a:ext cx="2194560" cy="256032"/>
-          </a:xfrm>
-          <a:prstGeom prst="rect">
-            <a:avLst/>
-          </a:prstGeom>
-          <a:solidFill>
-            <a:srgbClr val="FFFFFF"/>
-          </a:solidFill>
-          <a:ln w="12700">
-            <a:solidFill>
-              <a:srgbClr val="DDDDDD"/>
-            </a:solidFill>
-            <a:prstDash val="solid"/>
-          </a:ln>
-        </p:spPr>
-      </p:sp>
-      <p:sp>
-        <p:nvSpPr>
-          <p:cNvPr id="15" name="Text 13"/>
-          <p:cNvSpPr/>
-          <p:nvPr/>
-        </p:nvSpPr>
-        <p:spPr>
-          <a:xfrm>
-            <a:off x="438912" y="3090672"/>
-            <a:ext cx="2048256" cy="256032"/>
-          </a:xfrm>
-          <a:prstGeom prst="rect">
-            <a:avLst/>
-          </a:prstGeom>
-          <a:noFill/>
-          <a:ln/>
-        </p:spPr>
-        <p:txBody>
-          <a:bodyPr wrap="square" lIns="0" tIns="0" rIns="0" bIns="0" rtlCol="0" anchor="ctr"/>
-          <a:lstStyle/>
-          <a:p>
-            <a:pPr algn="l" indent="0" marL="0">
-              <a:buNone/>
-            </a:pPr>
-            <a:r>
-              <a:rPr lang="en-US" sz="900" b="1" dirty="0">
-                <a:solidFill>
-                  <a:srgbClr val="AA0000"/>
-                </a:solidFill>
-                <a:latin typeface="Courier New" pitchFamily="34" charset="0"/>
-                <a:ea typeface="Courier New" pitchFamily="34" charset="-122"/>
-                <a:cs typeface="Courier New" pitchFamily="34" charset="-120"/>
-              </a:rPr>
-              <a:t>PK idCategoria</a:t>
-            </a:r>
-            <a:endParaRPr lang="en-US" sz="900" dirty="0"/>
-          </a:p>
-        </p:txBody>
-      </p:sp>
-      <p:sp>
-        <p:nvSpPr>
-          <p:cNvPr id="16" name="Shape 14"/>
-          <p:cNvSpPr/>
-          <p:nvPr/>
-        </p:nvSpPr>
-        <p:spPr>
-          <a:xfrm>
-            <a:off x="365760" y="3346704"/>
-            <a:ext cx="2194560" cy="256032"/>
-          </a:xfrm>
-          <a:prstGeom prst="rect">
-            <a:avLst/>
-          </a:prstGeom>
-          <a:solidFill>
-            <a:srgbClr val="F0F0F0"/>
-          </a:solidFill>
-          <a:ln w="12700">
-            <a:solidFill>
-              <a:srgbClr val="DDDDDD"/>
-            </a:solidFill>
-            <a:prstDash val="solid"/>
-          </a:ln>
-        </p:spPr>
-      </p:sp>
-      <p:sp>
-        <p:nvSpPr>
-          <p:cNvPr id="17" name="Text 15"/>
-          <p:cNvSpPr/>
-          <p:nvPr/>
-        </p:nvSpPr>
-        <p:spPr>
-          <a:xfrm>
-            <a:off x="438912" y="3346704"/>
-            <a:ext cx="2048256" cy="256032"/>
-          </a:xfrm>
-          <a:prstGeom prst="rect">
-            <a:avLst/>
-          </a:prstGeom>
-          <a:noFill/>
-          <a:ln/>
-        </p:spPr>
-        <p:txBody>
-          <a:bodyPr wrap="square" lIns="0" tIns="0" rIns="0" bIns="0" rtlCol="0" anchor="ctr"/>
-          <a:lstStyle/>
-          <a:p>
-            <a:pPr algn="l" indent="0" marL="0">
-              <a:buNone/>
-            </a:pPr>
-            <a:r>
-              <a:rPr lang="en-US" sz="900" dirty="0">
-                <a:solidFill>
-                  <a:srgbClr val="1A1A1A"/>
-                </a:solidFill>
-                <a:latin typeface="Calibri" pitchFamily="34" charset="0"/>
-                <a:ea typeface="Calibri" pitchFamily="34" charset="-122"/>
-                <a:cs typeface="Calibri" pitchFamily="34" charset="-120"/>
-              </a:rPr>
-              <a:t>nombre</a:t>
-            </a:r>
-            <a:endParaRPr lang="en-US" sz="900" dirty="0"/>
-          </a:p>
-        </p:txBody>
-      </p:sp>
-      <p:sp>
-        <p:nvSpPr>
-          <p:cNvPr id="18" name="Shape 16"/>
-          <p:cNvSpPr/>
-          <p:nvPr/>
-        </p:nvSpPr>
-        <p:spPr>
-          <a:xfrm>
-            <a:off x="365760" y="3602736"/>
-            <a:ext cx="2194560" cy="256032"/>
-          </a:xfrm>
-          <a:prstGeom prst="rect">
-            <a:avLst/>
-          </a:prstGeom>
-          <a:solidFill>
-            <a:srgbClr val="FFFFFF"/>
-          </a:solidFill>
-          <a:ln w="12700">
-            <a:solidFill>
-              <a:srgbClr val="DDDDDD"/>
-            </a:solidFill>
-            <a:prstDash val="solid"/>
-          </a:ln>
-        </p:spPr>
-      </p:sp>
-      <p:sp>
-        <p:nvSpPr>
-          <p:cNvPr id="19" name="Text 17"/>
-          <p:cNvSpPr/>
-          <p:nvPr/>
-        </p:nvSpPr>
-        <p:spPr>
-          <a:xfrm>
-            <a:off x="438912" y="3602736"/>
-            <a:ext cx="2048256" cy="256032"/>
-          </a:xfrm>
-          <a:prstGeom prst="rect">
-            <a:avLst/>
-          </a:prstGeom>
-          <a:noFill/>
-          <a:ln/>
-        </p:spPr>
-        <p:txBody>
-          <a:bodyPr wrap="square" lIns="0" tIns="0" rIns="0" bIns="0" rtlCol="0" anchor="ctr"/>
-          <a:lstStyle/>
-          <a:p>
-            <a:pPr algn="l" indent="0" marL="0">
-              <a:buNone/>
-            </a:pPr>
-            <a:r>
-              <a:rPr lang="en-US" sz="900" dirty="0">
-                <a:solidFill>
-                  <a:srgbClr val="1A1A1A"/>
-                </a:solidFill>
-                <a:latin typeface="Calibri" pitchFamily="34" charset="0"/>
-                <a:ea typeface="Calibri" pitchFamily="34" charset="-122"/>
-                <a:cs typeface="Calibri" pitchFamily="34" charset="-120"/>
-              </a:rPr>
-              <a:t>descripcion</a:t>
-            </a:r>
-            <a:endParaRPr lang="en-US" sz="900" dirty="0"/>
-          </a:p>
-        </p:txBody>
-      </p:sp>
-      <p:sp>
-        <p:nvSpPr>
-          <p:cNvPr id="20" name="Shape 18"/>
-          <p:cNvSpPr/>
-          <p:nvPr/>
-        </p:nvSpPr>
-        <p:spPr>
-          <a:xfrm>
-            <a:off x="3383280" y="1645920"/>
-            <a:ext cx="2194560" cy="347472"/>
-          </a:xfrm>
-          <a:prstGeom prst="rect">
-            <a:avLst/>
-          </a:prstGeom>
-          <a:solidFill>
-            <a:srgbClr val="2E75B6"/>
-          </a:solidFill>
-          <a:ln w="12700">
-            <a:solidFill>
-              <a:srgbClr val="2E75B6"/>
-            </a:solidFill>
-            <a:prstDash val="solid"/>
-          </a:ln>
-        </p:spPr>
-      </p:sp>
-      <p:sp>
-        <p:nvSpPr>
-          <p:cNvPr id="21" name="Text 19"/>
-          <p:cNvSpPr/>
-          <p:nvPr/>
-        </p:nvSpPr>
-        <p:spPr>
-          <a:xfrm>
-            <a:off x="3383280" y="1645920"/>
-            <a:ext cx="2194560" cy="347472"/>
-          </a:xfrm>
-          <a:prstGeom prst="rect">
-            <a:avLst/>
-          </a:prstGeom>
-          <a:noFill/>
-          <a:ln/>
-        </p:spPr>
-        <p:txBody>
-          <a:bodyPr wrap="square" lIns="0" tIns="0" rIns="0" bIns="0" rtlCol="0" anchor="ctr"/>
-          <a:lstStyle/>
-          <a:p>
-            <a:pPr algn="ctr" indent="0" marL="0">
-              <a:buNone/>
-            </a:pPr>
-            <a:r>
-              <a:rPr lang="en-US" sz="1100" b="1" dirty="0">
-                <a:solidFill>
-                  <a:srgbClr val="FFFFFF"/>
-                </a:solidFill>
-                <a:latin typeface="Calibri" pitchFamily="34" charset="0"/>
-                <a:ea typeface="Calibri" pitchFamily="34" charset="-122"/>
-                <a:cs typeface="Calibri" pitchFamily="34" charset="-120"/>
-              </a:rPr>
-              <a:t>CUENTO</a:t>
-            </a:r>
-            <a:endParaRPr lang="en-US" sz="1100" dirty="0"/>
-          </a:p>
-        </p:txBody>
-      </p:sp>
-      <p:sp>
-        <p:nvSpPr>
-          <p:cNvPr id="22" name="Shape 20"/>
-          <p:cNvSpPr/>
-          <p:nvPr/>
-        </p:nvSpPr>
-        <p:spPr>
-          <a:xfrm>
-            <a:off x="3383280" y="1993392"/>
-            <a:ext cx="2194560" cy="256032"/>
-          </a:xfrm>
-          <a:prstGeom prst="rect">
-            <a:avLst/>
-          </a:prstGeom>
-          <a:solidFill>
-            <a:srgbClr val="FFFFFF"/>
-          </a:solidFill>
-          <a:ln w="12700">
-            <a:solidFill>
-              <a:srgbClr val="DDDDDD"/>
-            </a:solidFill>
-            <a:prstDash val="solid"/>
-          </a:ln>
-        </p:spPr>
-      </p:sp>
-      <p:sp>
-        <p:nvSpPr>
-          <p:cNvPr id="23" name="Text 21"/>
-          <p:cNvSpPr/>
-          <p:nvPr/>
-        </p:nvSpPr>
-        <p:spPr>
-          <a:xfrm>
-            <a:off x="3456432" y="1993392"/>
-            <a:ext cx="2048256" cy="256032"/>
-          </a:xfrm>
-          <a:prstGeom prst="rect">
-            <a:avLst/>
-          </a:prstGeom>
-          <a:noFill/>
-          <a:ln/>
-        </p:spPr>
-        <p:txBody>
-          <a:bodyPr wrap="square" lIns="0" tIns="0" rIns="0" bIns="0" rtlCol="0" anchor="ctr"/>
-          <a:lstStyle/>
-          <a:p>
-            <a:pPr algn="l" indent="0" marL="0">
-              <a:buNone/>
-            </a:pPr>
-            <a:r>
-              <a:rPr lang="en-US" sz="900" b="1" dirty="0">
-                <a:solidFill>
-                  <a:srgbClr val="AA0000"/>
-                </a:solidFill>
-                <a:latin typeface="Courier New" pitchFamily="34" charset="0"/>
-                <a:ea typeface="Courier New" pitchFamily="34" charset="-122"/>
-                <a:cs typeface="Courier New" pitchFamily="34" charset="-120"/>
-              </a:rPr>
-              <a:t>PK cuentoId</a:t>
-            </a:r>
-            <a:endParaRPr lang="en-US" sz="900" dirty="0"/>
-          </a:p>
-        </p:txBody>
-      </p:sp>
-      <p:sp>
-        <p:nvSpPr>
-          <p:cNvPr id="24" name="Shape 22"/>
-          <p:cNvSpPr/>
-          <p:nvPr/>
-        </p:nvSpPr>
-        <p:spPr>
-          <a:xfrm>
-            <a:off x="3383280" y="2249424"/>
-            <a:ext cx="2194560" cy="256032"/>
-          </a:xfrm>
-          <a:prstGeom prst="rect">
-            <a:avLst/>
-          </a:prstGeom>
-          <a:solidFill>
-            <a:srgbClr val="F0F0F0"/>
-          </a:solidFill>
-          <a:ln w="12700">
-            <a:solidFill>
-              <a:srgbClr val="DDDDDD"/>
-            </a:solidFill>
-            <a:prstDash val="solid"/>
-          </a:ln>
-        </p:spPr>
-      </p:sp>
-      <p:sp>
-        <p:nvSpPr>
-          <p:cNvPr id="25" name="Text 23"/>
-          <p:cNvSpPr/>
-          <p:nvPr/>
-        </p:nvSpPr>
-        <p:spPr>
-          <a:xfrm>
-            <a:off x="3456432" y="2249424"/>
-            <a:ext cx="2048256" cy="256032"/>
-          </a:xfrm>
-          <a:prstGeom prst="rect">
-            <a:avLst/>
-          </a:prstGeom>
-          <a:noFill/>
-          <a:ln/>
-        </p:spPr>
-        <p:txBody>
-          <a:bodyPr wrap="square" lIns="0" tIns="0" rIns="0" bIns="0" rtlCol="0" anchor="ctr"/>
-          <a:lstStyle/>
-          <a:p>
-            <a:pPr algn="l" indent="0" marL="0">
-              <a:buNone/>
-            </a:pPr>
-            <a:r>
-              <a:rPr lang="en-US" sz="900" dirty="0">
-                <a:solidFill>
-                  <a:srgbClr val="1A1A1A"/>
-                </a:solidFill>
-                <a:latin typeface="Calibri" pitchFamily="34" charset="0"/>
-                <a:ea typeface="Calibri" pitchFamily="34" charset="-122"/>
-                <a:cs typeface="Calibri" pitchFamily="34" charset="-120"/>
-              </a:rPr>
-              <a:t>cuentoTitulo</a:t>
-            </a:r>
-            <a:endParaRPr lang="en-US" sz="900" dirty="0"/>
-          </a:p>
-        </p:txBody>
-      </p:sp>
-      <p:sp>
-        <p:nvSpPr>
-          <p:cNvPr id="26" name="Shape 24"/>
-          <p:cNvSpPr/>
-          <p:nvPr/>
-        </p:nvSpPr>
-        <p:spPr>
-          <a:xfrm>
-            <a:off x="3383280" y="2505456"/>
-            <a:ext cx="2194560" cy="256032"/>
-          </a:xfrm>
-          <a:prstGeom prst="rect">
-            <a:avLst/>
-          </a:prstGeom>
-          <a:solidFill>
-            <a:srgbClr val="FFFFFF"/>
-          </a:solidFill>
-          <a:ln w="12700">
-            <a:solidFill>
-              <a:srgbClr val="DDDDDD"/>
-            </a:solidFill>
-            <a:prstDash val="solid"/>
-          </a:ln>
-        </p:spPr>
-      </p:sp>
-      <p:sp>
-        <p:nvSpPr>
-          <p:cNvPr id="27" name="Text 25"/>
-          <p:cNvSpPr/>
-          <p:nvPr/>
-        </p:nvSpPr>
-        <p:spPr>
-          <a:xfrm>
-            <a:off x="3456432" y="2505456"/>
-            <a:ext cx="2048256" cy="256032"/>
-          </a:xfrm>
-          <a:prstGeom prst="rect">
-            <a:avLst/>
-          </a:prstGeom>
-          <a:noFill/>
-          <a:ln/>
-        </p:spPr>
-        <p:txBody>
-          <a:bodyPr wrap="square" lIns="0" tIns="0" rIns="0" bIns="0" rtlCol="0" anchor="ctr"/>
-          <a:lstStyle/>
-          <a:p>
-            <a:pPr algn="l" indent="0" marL="0">
-              <a:buNone/>
-            </a:pPr>
-            <a:r>
-              <a:rPr lang="en-US" sz="900" dirty="0">
-                <a:solidFill>
-                  <a:srgbClr val="1A1A1A"/>
-                </a:solidFill>
-                <a:latin typeface="Calibri" pitchFamily="34" charset="0"/>
-                <a:ea typeface="Calibri" pitchFamily="34" charset="-122"/>
-                <a:cs typeface="Calibri" pitchFamily="34" charset="-120"/>
-              </a:rPr>
-              <a:t>cuentoDescripcion</a:t>
-            </a:r>
-            <a:endParaRPr lang="en-US" sz="900" dirty="0"/>
-          </a:p>
-        </p:txBody>
-      </p:sp>
-      <p:sp>
-        <p:nvSpPr>
-          <p:cNvPr id="28" name="Shape 26"/>
-          <p:cNvSpPr/>
-          <p:nvPr/>
-        </p:nvSpPr>
-        <p:spPr>
-          <a:xfrm>
-            <a:off x="3383280" y="2761488"/>
-            <a:ext cx="2194560" cy="256032"/>
-          </a:xfrm>
-          <a:prstGeom prst="rect">
-            <a:avLst/>
-          </a:prstGeom>
-          <a:solidFill>
-            <a:srgbClr val="F0F0F0"/>
-          </a:solidFill>
-          <a:ln w="12700">
-            <a:solidFill>
-              <a:srgbClr val="DDDDDD"/>
-            </a:solidFill>
-            <a:prstDash val="solid"/>
-          </a:ln>
-        </p:spPr>
-      </p:sp>
-      <p:sp>
-        <p:nvSpPr>
-          <p:cNvPr id="29" name="Text 27"/>
-          <p:cNvSpPr/>
-          <p:nvPr/>
-        </p:nvSpPr>
-        <p:spPr>
-          <a:xfrm>
-            <a:off x="3456432" y="2761488"/>
-            <a:ext cx="2048256" cy="256032"/>
-          </a:xfrm>
-          <a:prstGeom prst="rect">
-            <a:avLst/>
-          </a:prstGeom>
-          <a:noFill/>
-          <a:ln/>
-        </p:spPr>
-        <p:txBody>
-          <a:bodyPr wrap="square" lIns="0" tIns="0" rIns="0" bIns="0" rtlCol="0" anchor="ctr"/>
-          <a:lstStyle/>
-          <a:p>
-            <a:pPr algn="l" indent="0" marL="0">
-              <a:buNone/>
-            </a:pPr>
-            <a:r>
-              <a:rPr lang="en-US" sz="900" dirty="0">
-                <a:solidFill>
-                  <a:srgbClr val="1A1A1A"/>
-                </a:solidFill>
-                <a:latin typeface="Calibri" pitchFamily="34" charset="0"/>
-                <a:ea typeface="Calibri" pitchFamily="34" charset="-122"/>
-                <a:cs typeface="Calibri" pitchFamily="34" charset="-120"/>
-              </a:rPr>
-              <a:t>cuentoContenido</a:t>
-            </a:r>
-            <a:endParaRPr lang="en-US" sz="900" dirty="0"/>
-          </a:p>
-        </p:txBody>
-      </p:sp>
-      <p:sp>
-        <p:nvSpPr>
-          <p:cNvPr id="30" name="Shape 28"/>
-          <p:cNvSpPr/>
-          <p:nvPr/>
-        </p:nvSpPr>
-        <p:spPr>
-          <a:xfrm>
-            <a:off x="3383280" y="3017520"/>
-            <a:ext cx="2194560" cy="256032"/>
-          </a:xfrm>
-          <a:prstGeom prst="rect">
-            <a:avLst/>
-          </a:prstGeom>
-          <a:solidFill>
-            <a:srgbClr val="FFFFFF"/>
-          </a:solidFill>
-          <a:ln w="12700">
-            <a:solidFill>
-              <a:srgbClr val="DDDDDD"/>
-            </a:solidFill>
-            <a:prstDash val="solid"/>
-          </a:ln>
-        </p:spPr>
-      </p:sp>
-      <p:sp>
-        <p:nvSpPr>
-          <p:cNvPr id="31" name="Text 29"/>
-          <p:cNvSpPr/>
-          <p:nvPr/>
-        </p:nvSpPr>
-        <p:spPr>
-          <a:xfrm>
-            <a:off x="3456432" y="3017520"/>
-            <a:ext cx="2048256" cy="256032"/>
-          </a:xfrm>
-          <a:prstGeom prst="rect">
-            <a:avLst/>
-          </a:prstGeom>
-          <a:noFill/>
-          <a:ln/>
-        </p:spPr>
-        <p:txBody>
-          <a:bodyPr wrap="square" lIns="0" tIns="0" rIns="0" bIns="0" rtlCol="0" anchor="ctr"/>
-          <a:lstStyle/>
-          <a:p>
-            <a:pPr algn="l" indent="0" marL="0">
-              <a:buNone/>
-            </a:pPr>
-            <a:r>
-              <a:rPr lang="en-US" sz="900" dirty="0">
-                <a:solidFill>
-                  <a:srgbClr val="1A1A1A"/>
-                </a:solidFill>
-                <a:latin typeface="Calibri" pitchFamily="34" charset="0"/>
-                <a:ea typeface="Calibri" pitchFamily="34" charset="-122"/>
-                <a:cs typeface="Calibri" pitchFamily="34" charset="-120"/>
-              </a:rPr>
-              <a:t>cuentoFechaPublicacion</a:t>
-            </a:r>
-            <a:endParaRPr lang="en-US" sz="900" dirty="0"/>
-          </a:p>
-        </p:txBody>
-      </p:sp>
-      <p:sp>
-        <p:nvSpPr>
-          <p:cNvPr id="32" name="Shape 30"/>
-          <p:cNvSpPr/>
-          <p:nvPr/>
-        </p:nvSpPr>
-        <p:spPr>
-          <a:xfrm>
-            <a:off x="3383280" y="3273552"/>
-            <a:ext cx="2194560" cy="256032"/>
-          </a:xfrm>
-          <a:prstGeom prst="rect">
-            <a:avLst/>
-          </a:prstGeom>
-          <a:solidFill>
-            <a:srgbClr val="F0F0F0"/>
-          </a:solidFill>
-          <a:ln w="12700">
-            <a:solidFill>
-              <a:srgbClr val="DDDDDD"/>
-            </a:solidFill>
-            <a:prstDash val="solid"/>
-          </a:ln>
-        </p:spPr>
-      </p:sp>
-      <p:sp>
-        <p:nvSpPr>
-          <p:cNvPr id="33" name="Text 31"/>
-          <p:cNvSpPr/>
-          <p:nvPr/>
-        </p:nvSpPr>
-        <p:spPr>
-          <a:xfrm>
-            <a:off x="3456432" y="3273552"/>
-            <a:ext cx="2048256" cy="256032"/>
-          </a:xfrm>
-          <a:prstGeom prst="rect">
-            <a:avLst/>
-          </a:prstGeom>
-          <a:noFill/>
-          <a:ln/>
-        </p:spPr>
-        <p:txBody>
-          <a:bodyPr wrap="square" lIns="0" tIns="0" rIns="0" bIns="0" rtlCol="0" anchor="ctr"/>
-          <a:lstStyle/>
-          <a:p>
-            <a:pPr algn="l" indent="0" marL="0">
-              <a:buNone/>
-            </a:pPr>
-            <a:r>
-              <a:rPr lang="en-US" sz="900" dirty="0">
-                <a:solidFill>
-                  <a:srgbClr val="2E75B6"/>
-                </a:solidFill>
-                <a:latin typeface="Courier New" pitchFamily="34" charset="0"/>
-                <a:ea typeface="Courier New" pitchFamily="34" charset="-122"/>
-                <a:cs typeface="Courier New" pitchFamily="34" charset="-120"/>
-              </a:rPr>
-              <a:t>FK autoId</a:t>
-            </a:r>
-            <a:endParaRPr lang="en-US" sz="900" dirty="0"/>
-          </a:p>
-        </p:txBody>
-      </p:sp>
-      <p:sp>
-        <p:nvSpPr>
-          <p:cNvPr id="34" name="Shape 32"/>
-          <p:cNvSpPr/>
-          <p:nvPr/>
-        </p:nvSpPr>
-        <p:spPr>
-          <a:xfrm>
-            <a:off x="3383280" y="3529584"/>
-            <a:ext cx="2194560" cy="256032"/>
-          </a:xfrm>
-          <a:prstGeom prst="rect">
-            <a:avLst/>
-          </a:prstGeom>
-          <a:solidFill>
-            <a:srgbClr val="FFFFFF"/>
-          </a:solidFill>
-          <a:ln w="12700">
-            <a:solidFill>
-              <a:srgbClr val="DDDDDD"/>
-            </a:solidFill>
-            <a:prstDash val="solid"/>
-          </a:ln>
-        </p:spPr>
-      </p:sp>
-      <p:sp>
-        <p:nvSpPr>
-          <p:cNvPr id="35" name="Text 33"/>
-          <p:cNvSpPr/>
-          <p:nvPr/>
-        </p:nvSpPr>
-        <p:spPr>
-          <a:xfrm>
-            <a:off x="3456432" y="3529584"/>
-            <a:ext cx="2048256" cy="256032"/>
-          </a:xfrm>
-          <a:prstGeom prst="rect">
-            <a:avLst/>
-          </a:prstGeom>
-          <a:noFill/>
-          <a:ln/>
-        </p:spPr>
-        <p:txBody>
-          <a:bodyPr wrap="square" lIns="0" tIns="0" rIns="0" bIns="0" rtlCol="0" anchor="ctr"/>
-          <a:lstStyle/>
-          <a:p>
-            <a:pPr algn="l" indent="0" marL="0">
-              <a:buNone/>
-            </a:pPr>
-            <a:r>
-              <a:rPr lang="en-US" sz="900" dirty="0">
-                <a:solidFill>
-                  <a:srgbClr val="2E75B6"/>
-                </a:solidFill>
-                <a:latin typeface="Courier New" pitchFamily="34" charset="0"/>
-                <a:ea typeface="Courier New" pitchFamily="34" charset="-122"/>
-                <a:cs typeface="Courier New" pitchFamily="34" charset="-120"/>
-              </a:rPr>
-              <a:t>FK categId</a:t>
-            </a:r>
-            <a:endParaRPr lang="en-US" sz="900" dirty="0"/>
-          </a:p>
-        </p:txBody>
-      </p:sp>
-      <p:sp>
-        <p:nvSpPr>
-          <p:cNvPr id="36" name="Shape 34"/>
-          <p:cNvSpPr/>
-          <p:nvPr/>
-        </p:nvSpPr>
-        <p:spPr>
-          <a:xfrm>
-            <a:off x="6675120" y="1645920"/>
-            <a:ext cx="2194560" cy="347472"/>
-          </a:xfrm>
-          <a:prstGeom prst="rect">
-            <a:avLst/>
-          </a:prstGeom>
-          <a:solidFill>
-            <a:srgbClr val="2E75B6"/>
-          </a:solidFill>
-          <a:ln w="12700">
-            <a:solidFill>
-              <a:srgbClr val="2E75B6"/>
-            </a:solidFill>
-            <a:prstDash val="solid"/>
-          </a:ln>
-        </p:spPr>
-      </p:sp>
-      <p:sp>
-        <p:nvSpPr>
-          <p:cNvPr id="37" name="Text 35"/>
-          <p:cNvSpPr/>
-          <p:nvPr/>
-        </p:nvSpPr>
-        <p:spPr>
-          <a:xfrm>
-            <a:off x="6675120" y="1645920"/>
-            <a:ext cx="2194560" cy="347472"/>
-          </a:xfrm>
-          <a:prstGeom prst="rect">
-            <a:avLst/>
-          </a:prstGeom>
-          <a:noFill/>
-          <a:ln/>
-        </p:spPr>
-        <p:txBody>
-          <a:bodyPr wrap="square" lIns="0" tIns="0" rIns="0" bIns="0" rtlCol="0" anchor="ctr"/>
-          <a:lstStyle/>
-          <a:p>
-            <a:pPr algn="ctr" indent="0" marL="0">
-              <a:buNone/>
-            </a:pPr>
-            <a:r>
-              <a:rPr lang="en-US" sz="1100" b="1" dirty="0">
-                <a:solidFill>
-                  <a:srgbClr val="FFFFFF"/>
-                </a:solidFill>
-                <a:latin typeface="Calibri" pitchFamily="34" charset="0"/>
-                <a:ea typeface="Calibri" pitchFamily="34" charset="-122"/>
-                <a:cs typeface="Calibri" pitchFamily="34" charset="-120"/>
-              </a:rPr>
-              <a:t>FAVORITO</a:t>
-            </a:r>
-            <a:endParaRPr lang="en-US" sz="1100" dirty="0"/>
-          </a:p>
-        </p:txBody>
-      </p:sp>
-      <p:sp>
-        <p:nvSpPr>
-          <p:cNvPr id="38" name="Shape 36"/>
-          <p:cNvSpPr/>
-          <p:nvPr/>
-        </p:nvSpPr>
-        <p:spPr>
-          <a:xfrm>
-            <a:off x="6675120" y="1993392"/>
-            <a:ext cx="2194560" cy="256032"/>
-          </a:xfrm>
-          <a:prstGeom prst="rect">
-            <a:avLst/>
-          </a:prstGeom>
-          <a:solidFill>
-            <a:srgbClr val="FFFFFF"/>
-          </a:solidFill>
-          <a:ln w="12700">
-            <a:solidFill>
-              <a:srgbClr val="DDDDDD"/>
-            </a:solidFill>
-            <a:prstDash val="solid"/>
-          </a:ln>
-        </p:spPr>
-      </p:sp>
-      <p:sp>
-        <p:nvSpPr>
-          <p:cNvPr id="39" name="Text 37"/>
-          <p:cNvSpPr/>
-          <p:nvPr/>
-        </p:nvSpPr>
-        <p:spPr>
-          <a:xfrm>
-            <a:off x="6748272" y="1993392"/>
-            <a:ext cx="2048256" cy="256032"/>
-          </a:xfrm>
-          <a:prstGeom prst="rect">
-            <a:avLst/>
-          </a:prstGeom>
-          <a:noFill/>
-          <a:ln/>
-        </p:spPr>
-        <p:txBody>
-          <a:bodyPr wrap="square" lIns="0" tIns="0" rIns="0" bIns="0" rtlCol="0" anchor="ctr"/>
-          <a:lstStyle/>
-          <a:p>
-            <a:pPr algn="l" indent="0" marL="0">
-              <a:buNone/>
-            </a:pPr>
-            <a:r>
-              <a:rPr lang="en-US" sz="900" b="1" dirty="0">
-                <a:solidFill>
-                  <a:srgbClr val="AA0000"/>
-                </a:solidFill>
-                <a:latin typeface="Courier New" pitchFamily="34" charset="0"/>
-                <a:ea typeface="Courier New" pitchFamily="34" charset="-122"/>
-                <a:cs typeface="Courier New" pitchFamily="34" charset="-120"/>
-              </a:rPr>
-              <a:t>PK favoId</a:t>
-            </a:r>
-            <a:endParaRPr lang="en-US" sz="900" dirty="0"/>
-          </a:p>
-        </p:txBody>
-      </p:sp>
-      <p:sp>
-        <p:nvSpPr>
-          <p:cNvPr id="40" name="Shape 38"/>
-          <p:cNvSpPr/>
-          <p:nvPr/>
-        </p:nvSpPr>
-        <p:spPr>
-          <a:xfrm>
-            <a:off x="6675120" y="2249424"/>
-            <a:ext cx="2194560" cy="256032"/>
-          </a:xfrm>
-          <a:prstGeom prst="rect">
-            <a:avLst/>
-          </a:prstGeom>
-          <a:solidFill>
-            <a:srgbClr val="F0F0F0"/>
-          </a:solidFill>
-          <a:ln w="12700">
-            <a:solidFill>
-              <a:srgbClr val="DDDDDD"/>
-            </a:solidFill>
-            <a:prstDash val="solid"/>
-          </a:ln>
-        </p:spPr>
-      </p:sp>
-      <p:sp>
-        <p:nvSpPr>
-          <p:cNvPr id="41" name="Text 39"/>
-          <p:cNvSpPr/>
-          <p:nvPr/>
-        </p:nvSpPr>
-        <p:spPr>
-          <a:xfrm>
-            <a:off x="6748272" y="2249424"/>
-            <a:ext cx="2048256" cy="256032"/>
-          </a:xfrm>
-          <a:prstGeom prst="rect">
-            <a:avLst/>
-          </a:prstGeom>
-          <a:noFill/>
-          <a:ln/>
-        </p:spPr>
-        <p:txBody>
-          <a:bodyPr wrap="square" lIns="0" tIns="0" rIns="0" bIns="0" rtlCol="0" anchor="ctr"/>
-          <a:lstStyle/>
-          <a:p>
-            <a:pPr algn="l" indent="0" marL="0">
-              <a:buNone/>
-            </a:pPr>
-            <a:r>
-              <a:rPr lang="en-US" sz="900" dirty="0">
-                <a:solidFill>
-                  <a:srgbClr val="1A1A1A"/>
-                </a:solidFill>
-                <a:latin typeface="Calibri" pitchFamily="34" charset="0"/>
-                <a:ea typeface="Calibri" pitchFamily="34" charset="-122"/>
-                <a:cs typeface="Calibri" pitchFamily="34" charset="-120"/>
-              </a:rPr>
-              <a:t>favoFechaGuardado</a:t>
-            </a:r>
-            <a:endParaRPr lang="en-US" sz="900" dirty="0"/>
-          </a:p>
-        </p:txBody>
-      </p:sp>
-      <p:sp>
-        <p:nvSpPr>
-          <p:cNvPr id="42" name="Shape 40"/>
-          <p:cNvSpPr/>
-          <p:nvPr/>
-        </p:nvSpPr>
-        <p:spPr>
-          <a:xfrm>
-            <a:off x="6675120" y="2505456"/>
-            <a:ext cx="2194560" cy="256032"/>
-          </a:xfrm>
-          <a:prstGeom prst="rect">
-            <a:avLst/>
-          </a:prstGeom>
-          <a:solidFill>
-            <a:srgbClr val="FFFFFF"/>
-          </a:solidFill>
-          <a:ln w="12700">
-            <a:solidFill>
-              <a:srgbClr val="DDDDDD"/>
-            </a:solidFill>
-            <a:prstDash val="solid"/>
-          </a:ln>
-        </p:spPr>
-      </p:sp>
-      <p:sp>
-        <p:nvSpPr>
-          <p:cNvPr id="43" name="Text 41"/>
-          <p:cNvSpPr/>
-          <p:nvPr/>
-        </p:nvSpPr>
-        <p:spPr>
-          <a:xfrm>
-            <a:off x="6748272" y="2505456"/>
-            <a:ext cx="2048256" cy="256032"/>
-          </a:xfrm>
-          <a:prstGeom prst="rect">
-            <a:avLst/>
-          </a:prstGeom>
-          <a:noFill/>
-          <a:ln/>
-        </p:spPr>
-        <p:txBody>
-          <a:bodyPr wrap="square" lIns="0" tIns="0" rIns="0" bIns="0" rtlCol="0" anchor="ctr"/>
-          <a:lstStyle/>
-          <a:p>
-            <a:pPr algn="l" indent="0" marL="0">
-              <a:buNone/>
-            </a:pPr>
-            <a:r>
-              <a:rPr lang="en-US" sz="900" dirty="0">
-                <a:solidFill>
-                  <a:srgbClr val="2E75B6"/>
-                </a:solidFill>
-                <a:latin typeface="Courier New" pitchFamily="34" charset="0"/>
-                <a:ea typeface="Courier New" pitchFamily="34" charset="-122"/>
-                <a:cs typeface="Courier New" pitchFamily="34" charset="-120"/>
-              </a:rPr>
-              <a:t>FK cuentoId</a:t>
-            </a:r>
-            <a:endParaRPr lang="en-US" sz="900" dirty="0"/>
-          </a:p>
-        </p:txBody>
-      </p:sp>
-      <p:sp>
-        <p:nvSpPr>
-          <p:cNvPr id="44" name="Shape 42"/>
-          <p:cNvSpPr/>
-          <p:nvPr/>
-        </p:nvSpPr>
-        <p:spPr>
-          <a:xfrm>
-            <a:off x="2560320" y="1645920"/>
-            <a:ext cx="822960" cy="457200"/>
-          </a:xfrm>
-          <a:prstGeom prst="line">
-            <a:avLst/>
-          </a:prstGeom>
-          <a:noFill/>
-          <a:ln w="19050">
-            <a:solidFill>
-              <a:srgbClr val="2E75B6"/>
-            </a:solidFill>
-            <a:prstDash val="solid"/>
-          </a:ln>
-        </p:spPr>
-      </p:sp>
-      <p:sp>
-        <p:nvSpPr>
-          <p:cNvPr id="45" name="Text 43"/>
-          <p:cNvSpPr/>
-          <p:nvPr/>
-        </p:nvSpPr>
-        <p:spPr>
-          <a:xfrm>
-            <a:off x="2468880" y="1719072"/>
-            <a:ext cx="457200" cy="256032"/>
-          </a:xfrm>
-          <a:prstGeom prst="rect">
-            <a:avLst/>
-          </a:prstGeom>
-          <a:noFill/>
-          <a:ln/>
-        </p:spPr>
-        <p:txBody>
-          <a:bodyPr wrap="square" lIns="0" tIns="0" rIns="0" bIns="0" rtlCol="0" anchor="ctr"/>
-          <a:lstStyle/>
-          <a:p>
-            <a:pPr indent="0" marL="0">
-              <a:buNone/>
-            </a:pPr>
-            <a:r>
-              <a:rPr lang="en-US" sz="900" dirty="0">
-                <a:solidFill>
-                  <a:srgbClr val="2E75B6"/>
-                </a:solidFill>
-                <a:latin typeface="Calibri" pitchFamily="34" charset="0"/>
-                <a:ea typeface="Calibri" pitchFamily="34" charset="-122"/>
-                <a:cs typeface="Calibri" pitchFamily="34" charset="-120"/>
-              </a:rPr>
-              <a:t>1:N</a:t>
-            </a:r>
-            <a:endParaRPr lang="en-US" sz="900" dirty="0"/>
-          </a:p>
-        </p:txBody>
-      </p:sp>
-      <p:sp>
-        <p:nvSpPr>
-          <p:cNvPr id="46" name="Shape 44"/>
-          <p:cNvSpPr/>
-          <p:nvPr/>
-        </p:nvSpPr>
-        <p:spPr>
-          <a:xfrm>
-            <a:off x="2560320" y="2907792"/>
-            <a:ext cx="822960" cy="-640080"/>
-          </a:xfrm>
-          <a:prstGeom prst="line">
-            <a:avLst/>
-          </a:prstGeom>
-          <a:noFill/>
-          <a:ln w="19050">
-            <a:solidFill>
-              <a:srgbClr val="2E75B6"/>
-            </a:solidFill>
-            <a:prstDash val="solid"/>
-          </a:ln>
-        </p:spPr>
-      </p:sp>
-      <p:sp>
-        <p:nvSpPr>
-          <p:cNvPr id="47" name="Text 45"/>
-          <p:cNvSpPr/>
-          <p:nvPr/>
-        </p:nvSpPr>
-        <p:spPr>
-          <a:xfrm>
-            <a:off x="2468880" y="2560320"/>
-            <a:ext cx="457200" cy="256032"/>
-          </a:xfrm>
-          <a:prstGeom prst="rect">
-            <a:avLst/>
-          </a:prstGeom>
-          <a:noFill/>
-          <a:ln/>
-        </p:spPr>
-        <p:txBody>
-          <a:bodyPr wrap="square" lIns="0" tIns="0" rIns="0" bIns="0" rtlCol="0" anchor="ctr"/>
-          <a:lstStyle/>
-          <a:p>
-            <a:pPr indent="0" marL="0">
-              <a:buNone/>
-            </a:pPr>
-            <a:r>
-              <a:rPr lang="en-US" sz="900" dirty="0">
-                <a:solidFill>
-                  <a:srgbClr val="2E75B6"/>
-                </a:solidFill>
-                <a:latin typeface="Calibri" pitchFamily="34" charset="0"/>
-                <a:ea typeface="Calibri" pitchFamily="34" charset="-122"/>
-                <a:cs typeface="Calibri" pitchFamily="34" charset="-120"/>
-              </a:rPr>
-              <a:t>1:N</a:t>
-            </a:r>
-            <a:endParaRPr lang="en-US" sz="900" dirty="0"/>
-          </a:p>
-        </p:txBody>
-      </p:sp>
-      <p:sp>
-        <p:nvSpPr>
-          <p:cNvPr id="48" name="Shape 46"/>
-          <p:cNvSpPr/>
-          <p:nvPr/>
-        </p:nvSpPr>
-        <p:spPr>
-          <a:xfrm>
-            <a:off x="5577840" y="2103120"/>
-            <a:ext cx="1097280" cy="0"/>
-          </a:xfrm>
-          <a:prstGeom prst="line">
-            <a:avLst/>
-          </a:prstGeom>
-          <a:noFill/>
-          <a:ln w="19050">
-            <a:solidFill>
-              <a:srgbClr val="2E75B6"/>
-            </a:solidFill>
-            <a:prstDash val="solid"/>
-          </a:ln>
-        </p:spPr>
-      </p:sp>
-      <p:sp>
-        <p:nvSpPr>
-          <p:cNvPr id="49" name="Text 47"/>
-          <p:cNvSpPr/>
-          <p:nvPr/>
-        </p:nvSpPr>
-        <p:spPr>
-          <a:xfrm>
-            <a:off x="5623560" y="1874520"/>
-            <a:ext cx="457200" cy="256032"/>
-          </a:xfrm>
-          <a:prstGeom prst="rect">
-            <a:avLst/>
-          </a:prstGeom>
-          <a:noFill/>
-          <a:ln/>
-        </p:spPr>
-        <p:txBody>
-          <a:bodyPr wrap="square" lIns="0" tIns="0" rIns="0" bIns="0" rtlCol="0" anchor="ctr"/>
-          <a:lstStyle/>
-          <a:p>
-            <a:pPr indent="0" marL="0">
-              <a:buNone/>
-            </a:pPr>
-            <a:r>
-              <a:rPr lang="en-US" sz="900" dirty="0">
-                <a:solidFill>
-                  <a:srgbClr val="2E75B6"/>
-                </a:solidFill>
-                <a:latin typeface="Calibri" pitchFamily="34" charset="0"/>
-                <a:ea typeface="Calibri" pitchFamily="34" charset="-122"/>
-                <a:cs typeface="Calibri" pitchFamily="34" charset="-120"/>
-              </a:rPr>
-              <a:t>1:N</a:t>
+              <a:t>PK = Clave Primaria (serial)   ·   FK = Clave Foránea (integer)   ·   Relaciones: 1:N</a:t>
             </a:r>
             <a:endParaRPr lang="en-US" sz="900" dirty="0"/>
           </a:p>
@@ -16045,7 +14777,7 @@
                 <a:ea typeface="Calibri" pitchFamily="34" charset="-122"/>
                 <a:cs typeface="Calibri" pitchFamily="34" charset="-120"/>
               </a:rPr>
-              <a:t>Diagrama de Clases</a:t>
+              <a:t>Diagrama de Clases UML</a:t>
             </a:r>
             <a:endParaRPr lang="en-US" sz="3000" dirty="0"/>
           </a:p>
@@ -16076,39 +14808,77 @@
       </p:sp>
       <p:sp>
         <p:nvSpPr>
-          <p:cNvPr id="4" name="Shape 2"/>
+          <p:cNvPr id="4" name="Text 2"/>
           <p:cNvSpPr/>
           <p:nvPr/>
         </p:nvSpPr>
         <p:spPr>
           <a:xfrm>
-            <a:off x="274320" y="1005840"/>
-            <a:ext cx="2011680" cy="329184"/>
+            <a:off x="365760" y="914400"/>
+            <a:ext cx="8412480" cy="292608"/>
           </a:xfrm>
           <a:prstGeom prst="rect">
             <a:avLst/>
           </a:prstGeom>
-          <a:solidFill>
-            <a:srgbClr val="2E75B6"/>
-          </a:solidFill>
-          <a:ln w="12700">
-            <a:solidFill>
-              <a:srgbClr val="2E75B6"/>
-            </a:solidFill>
-            <a:prstDash val="solid"/>
-          </a:ln>
+          <a:noFill/>
+          <a:ln/>
         </p:spPr>
+        <p:txBody>
+          <a:bodyPr wrap="square" lIns="0" tIns="0" rIns="0" bIns="0" rtlCol="0" anchor="ctr"/>
+          <a:lstStyle/>
+          <a:p>
+            <a:pPr algn="l" indent="0" marL="0">
+              <a:buNone/>
+            </a:pPr>
+            <a:r>
+              <a:rPr lang="en-US" sz="1000" i="1" dirty="0">
+                <a:solidFill>
+                  <a:srgbClr val="888888"/>
+                </a:solidFill>
+                <a:latin typeface="Calibri" pitchFamily="34" charset="0"/>
+                <a:ea typeface="Calibri" pitchFamily="34" charset="-122"/>
+                <a:cs typeface="Calibri" pitchFamily="34" charset="-120"/>
+              </a:rPr>
+              <a:t>Visibilidad: ( - ) privado · ( + ) público  |  4 clases con atributos, getters y setters</a:t>
+            </a:r>
+            <a:endParaRPr lang="en-US" sz="1000" dirty="0"/>
+          </a:p>
+        </p:txBody>
       </p:sp>
+      <p:pic>
+        <p:nvPicPr>
+          <p:cNvPr id="5" name="Image 0" descr="C:\Users\MARIA JOSE MORA MORA\Downloads\5 SEMESTRE\Metodologia\Spring\demo - copia\diagrama_clases.jpg">    </p:cNvPr>
+          <p:cNvPicPr>
+            <a:picLocks noChangeAspect="1"/>
+          </p:cNvPicPr>
+          <p:nvPr/>
+        </p:nvPicPr>
+        <p:blipFill>
+          <a:blip r:embed="rId1"/>
+          <a:stretch>
+            <a:fillRect/>
+          </a:stretch>
+        </p:blipFill>
+        <p:spPr>
+          <a:xfrm>
+            <a:off x="3441709" y="1234440"/>
+            <a:ext cx="2260582" cy="3611880"/>
+          </a:xfrm>
+          <a:prstGeom prst="rect">
+            <a:avLst/>
+          </a:prstGeom>
+        </p:spPr>
+      </p:pic>
       <p:sp>
         <p:nvSpPr>
-          <p:cNvPr id="5" name="Text 3"/>
+          <p:cNvPr id="6" name="Text 3"/>
           <p:cNvSpPr/>
           <p:nvPr/>
         </p:nvSpPr>
         <p:spPr>
           <a:xfrm>
-            <a:off x="274320" y="1005840"/>
-            <a:ext cx="2011680" cy="329184"/>
+            <a:off x="365760" y="4828032"/>
+            <a:ext cx="8412480" cy="237744"/>
           </a:xfrm>
           <a:prstGeom prst="rect">
             <a:avLst/>
@@ -16124,2669 +14894,17 @@
               <a:buNone/>
             </a:pPr>
             <a:r>
-              <a:rPr lang="en-US" sz="1100" b="1" dirty="0">
+              <a:rPr lang="en-US" sz="900" dirty="0">
                 <a:solidFill>
-                  <a:srgbClr val="FFFFFF"/>
+                  <a:srgbClr val="888888"/>
                 </a:solidFill>
                 <a:latin typeface="Calibri" pitchFamily="34" charset="0"/>
                 <a:ea typeface="Calibri" pitchFamily="34" charset="-122"/>
                 <a:cs typeface="Calibri" pitchFamily="34" charset="-120"/>
               </a:rPr>
-              <a:t>Autor</a:t>
+              <a:t>Relaciones: Autor → Cuento (1:N)  ·  Categoria → Cuento (1:N)  ·  Cuento → Favorito (1:N)</a:t>
             </a:r>
-            <a:endParaRPr lang="en-US" sz="1100" dirty="0"/>
-          </a:p>
-        </p:txBody>
-      </p:sp>
-      <p:sp>
-        <p:nvSpPr>
-          <p:cNvPr id="6" name="Shape 4"/>
-          <p:cNvSpPr/>
-          <p:nvPr/>
-        </p:nvSpPr>
-        <p:spPr>
-          <a:xfrm>
-            <a:off x="274320" y="1335024"/>
-            <a:ext cx="2011680" cy="219456"/>
-          </a:xfrm>
-          <a:prstGeom prst="rect">
-            <a:avLst/>
-          </a:prstGeom>
-          <a:solidFill>
-            <a:srgbClr val="FFFFFF"/>
-          </a:solidFill>
-          <a:ln w="12700">
-            <a:solidFill>
-              <a:srgbClr val="DDDDDD"/>
-            </a:solidFill>
-            <a:prstDash val="solid"/>
-          </a:ln>
-        </p:spPr>
-      </p:sp>
-      <p:sp>
-        <p:nvSpPr>
-          <p:cNvPr id="7" name="Text 5"/>
-          <p:cNvSpPr/>
-          <p:nvPr/>
-        </p:nvSpPr>
-        <p:spPr>
-          <a:xfrm>
-            <a:off x="329184" y="1335024"/>
-            <a:ext cx="1901952" cy="219456"/>
-          </a:xfrm>
-          <a:prstGeom prst="rect">
-            <a:avLst/>
-          </a:prstGeom>
-          <a:noFill/>
-          <a:ln/>
-        </p:spPr>
-        <p:txBody>
-          <a:bodyPr wrap="square" lIns="0" tIns="0" rIns="0" bIns="0" rtlCol="0" anchor="ctr"/>
-          <a:lstStyle/>
-          <a:p>
-            <a:pPr algn="l" indent="0" marL="0">
-              <a:buNone/>
-            </a:pPr>
-            <a:r>
-              <a:rPr lang="en-US" sz="800" dirty="0">
-                <a:solidFill>
-                  <a:srgbClr val="1A1A1A"/>
-                </a:solidFill>
-                <a:latin typeface="Courier New" pitchFamily="34" charset="0"/>
-                <a:ea typeface="Courier New" pitchFamily="34" charset="-122"/>
-                <a:cs typeface="Courier New" pitchFamily="34" charset="-120"/>
-              </a:rPr>
-              <a:t>- idAutor: int</a:t>
-            </a:r>
-            <a:endParaRPr lang="en-US" sz="800" dirty="0"/>
-          </a:p>
-        </p:txBody>
-      </p:sp>
-      <p:sp>
-        <p:nvSpPr>
-          <p:cNvPr id="8" name="Shape 6"/>
-          <p:cNvSpPr/>
-          <p:nvPr/>
-        </p:nvSpPr>
-        <p:spPr>
-          <a:xfrm>
-            <a:off x="274320" y="1554480"/>
-            <a:ext cx="2011680" cy="219456"/>
-          </a:xfrm>
-          <a:prstGeom prst="rect">
-            <a:avLst/>
-          </a:prstGeom>
-          <a:solidFill>
-            <a:srgbClr val="F0F0F0"/>
-          </a:solidFill>
-          <a:ln w="12700">
-            <a:solidFill>
-              <a:srgbClr val="DDDDDD"/>
-            </a:solidFill>
-            <a:prstDash val="solid"/>
-          </a:ln>
-        </p:spPr>
-      </p:sp>
-      <p:sp>
-        <p:nvSpPr>
-          <p:cNvPr id="9" name="Text 7"/>
-          <p:cNvSpPr/>
-          <p:nvPr/>
-        </p:nvSpPr>
-        <p:spPr>
-          <a:xfrm>
-            <a:off x="329184" y="1554480"/>
-            <a:ext cx="1901952" cy="219456"/>
-          </a:xfrm>
-          <a:prstGeom prst="rect">
-            <a:avLst/>
-          </a:prstGeom>
-          <a:noFill/>
-          <a:ln/>
-        </p:spPr>
-        <p:txBody>
-          <a:bodyPr wrap="square" lIns="0" tIns="0" rIns="0" bIns="0" rtlCol="0" anchor="ctr"/>
-          <a:lstStyle/>
-          <a:p>
-            <a:pPr algn="l" indent="0" marL="0">
-              <a:buNone/>
-            </a:pPr>
-            <a:r>
-              <a:rPr lang="en-US" sz="800" dirty="0">
-                <a:solidFill>
-                  <a:srgbClr val="1A1A1A"/>
-                </a:solidFill>
-                <a:latin typeface="Courier New" pitchFamily="34" charset="0"/>
-                <a:ea typeface="Courier New" pitchFamily="34" charset="-122"/>
-                <a:cs typeface="Courier New" pitchFamily="34" charset="-120"/>
-              </a:rPr>
-              <a:t>- nombre: String</a:t>
-            </a:r>
-            <a:endParaRPr lang="en-US" sz="800" dirty="0"/>
-          </a:p>
-        </p:txBody>
-      </p:sp>
-      <p:sp>
-        <p:nvSpPr>
-          <p:cNvPr id="10" name="Shape 8"/>
-          <p:cNvSpPr/>
-          <p:nvPr/>
-        </p:nvSpPr>
-        <p:spPr>
-          <a:xfrm>
-            <a:off x="274320" y="1773936"/>
-            <a:ext cx="2011680" cy="219456"/>
-          </a:xfrm>
-          <a:prstGeom prst="rect">
-            <a:avLst/>
-          </a:prstGeom>
-          <a:solidFill>
-            <a:srgbClr val="FFFFFF"/>
-          </a:solidFill>
-          <a:ln w="12700">
-            <a:solidFill>
-              <a:srgbClr val="DDDDDD"/>
-            </a:solidFill>
-            <a:prstDash val="solid"/>
-          </a:ln>
-        </p:spPr>
-      </p:sp>
-      <p:sp>
-        <p:nvSpPr>
-          <p:cNvPr id="11" name="Text 9"/>
-          <p:cNvSpPr/>
-          <p:nvPr/>
-        </p:nvSpPr>
-        <p:spPr>
-          <a:xfrm>
-            <a:off x="329184" y="1773936"/>
-            <a:ext cx="1901952" cy="219456"/>
-          </a:xfrm>
-          <a:prstGeom prst="rect">
-            <a:avLst/>
-          </a:prstGeom>
-          <a:noFill/>
-          <a:ln/>
-        </p:spPr>
-        <p:txBody>
-          <a:bodyPr wrap="square" lIns="0" tIns="0" rIns="0" bIns="0" rtlCol="0" anchor="ctr"/>
-          <a:lstStyle/>
-          <a:p>
-            <a:pPr algn="l" indent="0" marL="0">
-              <a:buNone/>
-            </a:pPr>
-            <a:r>
-              <a:rPr lang="en-US" sz="800" dirty="0">
-                <a:solidFill>
-                  <a:srgbClr val="1A1A1A"/>
-                </a:solidFill>
-                <a:latin typeface="Courier New" pitchFamily="34" charset="0"/>
-                <a:ea typeface="Courier New" pitchFamily="34" charset="-122"/>
-                <a:cs typeface="Courier New" pitchFamily="34" charset="-120"/>
-              </a:rPr>
-              <a:t>- email: String</a:t>
-            </a:r>
-            <a:endParaRPr lang="en-US" sz="800" dirty="0"/>
-          </a:p>
-        </p:txBody>
-      </p:sp>
-      <p:sp>
-        <p:nvSpPr>
-          <p:cNvPr id="12" name="Shape 10"/>
-          <p:cNvSpPr/>
-          <p:nvPr/>
-        </p:nvSpPr>
-        <p:spPr>
-          <a:xfrm>
-            <a:off x="274320" y="1993392"/>
-            <a:ext cx="2011680" cy="0"/>
-          </a:xfrm>
-          <a:prstGeom prst="line">
-            <a:avLst/>
-          </a:prstGeom>
-          <a:noFill/>
-          <a:ln w="12700">
-            <a:solidFill>
-              <a:srgbClr val="2E75B6"/>
-            </a:solidFill>
-            <a:prstDash val="solid"/>
-          </a:ln>
-        </p:spPr>
-      </p:sp>
-      <p:sp>
-        <p:nvSpPr>
-          <p:cNvPr id="13" name="Shape 11"/>
-          <p:cNvSpPr/>
-          <p:nvPr/>
-        </p:nvSpPr>
-        <p:spPr>
-          <a:xfrm>
-            <a:off x="274320" y="1993392"/>
-            <a:ext cx="2011680" cy="219456"/>
-          </a:xfrm>
-          <a:prstGeom prst="rect">
-            <a:avLst/>
-          </a:prstGeom>
-          <a:solidFill>
-            <a:srgbClr val="F7FAFD"/>
-          </a:solidFill>
-          <a:ln w="12700">
-            <a:solidFill>
-              <a:srgbClr val="DDDDDD"/>
-            </a:solidFill>
-            <a:prstDash val="solid"/>
-          </a:ln>
-        </p:spPr>
-      </p:sp>
-      <p:sp>
-        <p:nvSpPr>
-          <p:cNvPr id="14" name="Text 12"/>
-          <p:cNvSpPr/>
-          <p:nvPr/>
-        </p:nvSpPr>
-        <p:spPr>
-          <a:xfrm>
-            <a:off x="329184" y="1993392"/>
-            <a:ext cx="1901952" cy="219456"/>
-          </a:xfrm>
-          <a:prstGeom prst="rect">
-            <a:avLst/>
-          </a:prstGeom>
-          <a:noFill/>
-          <a:ln/>
-        </p:spPr>
-        <p:txBody>
-          <a:bodyPr wrap="square" lIns="0" tIns="0" rIns="0" bIns="0" rtlCol="0" anchor="ctr"/>
-          <a:lstStyle/>
-          <a:p>
-            <a:pPr algn="l" indent="0" marL="0">
-              <a:buNone/>
-            </a:pPr>
-            <a:r>
-              <a:rPr lang="en-US" sz="800" dirty="0">
-                <a:solidFill>
-                  <a:srgbClr val="224488"/>
-                </a:solidFill>
-                <a:latin typeface="Courier New" pitchFamily="34" charset="0"/>
-                <a:ea typeface="Courier New" pitchFamily="34" charset="-122"/>
-                <a:cs typeface="Courier New" pitchFamily="34" charset="-120"/>
-              </a:rPr>
-              <a:t>+ getIdAutor(): int</a:t>
-            </a:r>
-            <a:endParaRPr lang="en-US" sz="800" dirty="0"/>
-          </a:p>
-        </p:txBody>
-      </p:sp>
-      <p:sp>
-        <p:nvSpPr>
-          <p:cNvPr id="15" name="Shape 13"/>
-          <p:cNvSpPr/>
-          <p:nvPr/>
-        </p:nvSpPr>
-        <p:spPr>
-          <a:xfrm>
-            <a:off x="274320" y="2212848"/>
-            <a:ext cx="2011680" cy="219456"/>
-          </a:xfrm>
-          <a:prstGeom prst="rect">
-            <a:avLst/>
-          </a:prstGeom>
-          <a:solidFill>
-            <a:srgbClr val="FFFFFF"/>
-          </a:solidFill>
-          <a:ln w="12700">
-            <a:solidFill>
-              <a:srgbClr val="DDDDDD"/>
-            </a:solidFill>
-            <a:prstDash val="solid"/>
-          </a:ln>
-        </p:spPr>
-      </p:sp>
-      <p:sp>
-        <p:nvSpPr>
-          <p:cNvPr id="16" name="Text 14"/>
-          <p:cNvSpPr/>
-          <p:nvPr/>
-        </p:nvSpPr>
-        <p:spPr>
-          <a:xfrm>
-            <a:off x="329184" y="2212848"/>
-            <a:ext cx="1901952" cy="219456"/>
-          </a:xfrm>
-          <a:prstGeom prst="rect">
-            <a:avLst/>
-          </a:prstGeom>
-          <a:noFill/>
-          <a:ln/>
-        </p:spPr>
-        <p:txBody>
-          <a:bodyPr wrap="square" lIns="0" tIns="0" rIns="0" bIns="0" rtlCol="0" anchor="ctr"/>
-          <a:lstStyle/>
-          <a:p>
-            <a:pPr algn="l" indent="0" marL="0">
-              <a:buNone/>
-            </a:pPr>
-            <a:r>
-              <a:rPr lang="en-US" sz="800" dirty="0">
-                <a:solidFill>
-                  <a:srgbClr val="224488"/>
-                </a:solidFill>
-                <a:latin typeface="Courier New" pitchFamily="34" charset="0"/>
-                <a:ea typeface="Courier New" pitchFamily="34" charset="-122"/>
-                <a:cs typeface="Courier New" pitchFamily="34" charset="-120"/>
-              </a:rPr>
-              <a:t>+ setIdAutor(int)</a:t>
-            </a:r>
-            <a:endParaRPr lang="en-US" sz="800" dirty="0"/>
-          </a:p>
-        </p:txBody>
-      </p:sp>
-      <p:sp>
-        <p:nvSpPr>
-          <p:cNvPr id="17" name="Shape 15"/>
-          <p:cNvSpPr/>
-          <p:nvPr/>
-        </p:nvSpPr>
-        <p:spPr>
-          <a:xfrm>
-            <a:off x="274320" y="2432304"/>
-            <a:ext cx="2011680" cy="219456"/>
-          </a:xfrm>
-          <a:prstGeom prst="rect">
-            <a:avLst/>
-          </a:prstGeom>
-          <a:solidFill>
-            <a:srgbClr val="F7FAFD"/>
-          </a:solidFill>
-          <a:ln w="12700">
-            <a:solidFill>
-              <a:srgbClr val="DDDDDD"/>
-            </a:solidFill>
-            <a:prstDash val="solid"/>
-          </a:ln>
-        </p:spPr>
-      </p:sp>
-      <p:sp>
-        <p:nvSpPr>
-          <p:cNvPr id="18" name="Text 16"/>
-          <p:cNvSpPr/>
-          <p:nvPr/>
-        </p:nvSpPr>
-        <p:spPr>
-          <a:xfrm>
-            <a:off x="329184" y="2432304"/>
-            <a:ext cx="1901952" cy="219456"/>
-          </a:xfrm>
-          <a:prstGeom prst="rect">
-            <a:avLst/>
-          </a:prstGeom>
-          <a:noFill/>
-          <a:ln/>
-        </p:spPr>
-        <p:txBody>
-          <a:bodyPr wrap="square" lIns="0" tIns="0" rIns="0" bIns="0" rtlCol="0" anchor="ctr"/>
-          <a:lstStyle/>
-          <a:p>
-            <a:pPr algn="l" indent="0" marL="0">
-              <a:buNone/>
-            </a:pPr>
-            <a:r>
-              <a:rPr lang="en-US" sz="800" dirty="0">
-                <a:solidFill>
-                  <a:srgbClr val="224488"/>
-                </a:solidFill>
-                <a:latin typeface="Courier New" pitchFamily="34" charset="0"/>
-                <a:ea typeface="Courier New" pitchFamily="34" charset="-122"/>
-                <a:cs typeface="Courier New" pitchFamily="34" charset="-120"/>
-              </a:rPr>
-              <a:t>+ getNombre(): String</a:t>
-            </a:r>
-            <a:endParaRPr lang="en-US" sz="800" dirty="0"/>
-          </a:p>
-        </p:txBody>
-      </p:sp>
-      <p:sp>
-        <p:nvSpPr>
-          <p:cNvPr id="19" name="Shape 17"/>
-          <p:cNvSpPr/>
-          <p:nvPr/>
-        </p:nvSpPr>
-        <p:spPr>
-          <a:xfrm>
-            <a:off x="274320" y="2651760"/>
-            <a:ext cx="2011680" cy="219456"/>
-          </a:xfrm>
-          <a:prstGeom prst="rect">
-            <a:avLst/>
-          </a:prstGeom>
-          <a:solidFill>
-            <a:srgbClr val="FFFFFF"/>
-          </a:solidFill>
-          <a:ln w="12700">
-            <a:solidFill>
-              <a:srgbClr val="DDDDDD"/>
-            </a:solidFill>
-            <a:prstDash val="solid"/>
-          </a:ln>
-        </p:spPr>
-      </p:sp>
-      <p:sp>
-        <p:nvSpPr>
-          <p:cNvPr id="20" name="Text 18"/>
-          <p:cNvSpPr/>
-          <p:nvPr/>
-        </p:nvSpPr>
-        <p:spPr>
-          <a:xfrm>
-            <a:off x="329184" y="2651760"/>
-            <a:ext cx="1901952" cy="219456"/>
-          </a:xfrm>
-          <a:prstGeom prst="rect">
-            <a:avLst/>
-          </a:prstGeom>
-          <a:noFill/>
-          <a:ln/>
-        </p:spPr>
-        <p:txBody>
-          <a:bodyPr wrap="square" lIns="0" tIns="0" rIns="0" bIns="0" rtlCol="0" anchor="ctr"/>
-          <a:lstStyle/>
-          <a:p>
-            <a:pPr algn="l" indent="0" marL="0">
-              <a:buNone/>
-            </a:pPr>
-            <a:r>
-              <a:rPr lang="en-US" sz="800" dirty="0">
-                <a:solidFill>
-                  <a:srgbClr val="224488"/>
-                </a:solidFill>
-                <a:latin typeface="Courier New" pitchFamily="34" charset="0"/>
-                <a:ea typeface="Courier New" pitchFamily="34" charset="-122"/>
-                <a:cs typeface="Courier New" pitchFamily="34" charset="-120"/>
-              </a:rPr>
-              <a:t>+ setNombre(String)</a:t>
-            </a:r>
-            <a:endParaRPr lang="en-US" sz="800" dirty="0"/>
-          </a:p>
-        </p:txBody>
-      </p:sp>
-      <p:sp>
-        <p:nvSpPr>
-          <p:cNvPr id="21" name="Shape 19"/>
-          <p:cNvSpPr/>
-          <p:nvPr/>
-        </p:nvSpPr>
-        <p:spPr>
-          <a:xfrm>
-            <a:off x="274320" y="2871216"/>
-            <a:ext cx="2011680" cy="219456"/>
-          </a:xfrm>
-          <a:prstGeom prst="rect">
-            <a:avLst/>
-          </a:prstGeom>
-          <a:solidFill>
-            <a:srgbClr val="F7FAFD"/>
-          </a:solidFill>
-          <a:ln w="12700">
-            <a:solidFill>
-              <a:srgbClr val="DDDDDD"/>
-            </a:solidFill>
-            <a:prstDash val="solid"/>
-          </a:ln>
-        </p:spPr>
-      </p:sp>
-      <p:sp>
-        <p:nvSpPr>
-          <p:cNvPr id="22" name="Text 20"/>
-          <p:cNvSpPr/>
-          <p:nvPr/>
-        </p:nvSpPr>
-        <p:spPr>
-          <a:xfrm>
-            <a:off x="329184" y="2871216"/>
-            <a:ext cx="1901952" cy="219456"/>
-          </a:xfrm>
-          <a:prstGeom prst="rect">
-            <a:avLst/>
-          </a:prstGeom>
-          <a:noFill/>
-          <a:ln/>
-        </p:spPr>
-        <p:txBody>
-          <a:bodyPr wrap="square" lIns="0" tIns="0" rIns="0" bIns="0" rtlCol="0" anchor="ctr"/>
-          <a:lstStyle/>
-          <a:p>
-            <a:pPr algn="l" indent="0" marL="0">
-              <a:buNone/>
-            </a:pPr>
-            <a:r>
-              <a:rPr lang="en-US" sz="800" dirty="0">
-                <a:solidFill>
-                  <a:srgbClr val="224488"/>
-                </a:solidFill>
-                <a:latin typeface="Courier New" pitchFamily="34" charset="0"/>
-                <a:ea typeface="Courier New" pitchFamily="34" charset="-122"/>
-                <a:cs typeface="Courier New" pitchFamily="34" charset="-120"/>
-              </a:rPr>
-              <a:t>+ getEmail(): String</a:t>
-            </a:r>
-            <a:endParaRPr lang="en-US" sz="800" dirty="0"/>
-          </a:p>
-        </p:txBody>
-      </p:sp>
-      <p:sp>
-        <p:nvSpPr>
-          <p:cNvPr id="23" name="Shape 21"/>
-          <p:cNvSpPr/>
-          <p:nvPr/>
-        </p:nvSpPr>
-        <p:spPr>
-          <a:xfrm>
-            <a:off x="274320" y="3090672"/>
-            <a:ext cx="2011680" cy="219456"/>
-          </a:xfrm>
-          <a:prstGeom prst="rect">
-            <a:avLst/>
-          </a:prstGeom>
-          <a:solidFill>
-            <a:srgbClr val="FFFFFF"/>
-          </a:solidFill>
-          <a:ln w="12700">
-            <a:solidFill>
-              <a:srgbClr val="DDDDDD"/>
-            </a:solidFill>
-            <a:prstDash val="solid"/>
-          </a:ln>
-        </p:spPr>
-      </p:sp>
-      <p:sp>
-        <p:nvSpPr>
-          <p:cNvPr id="24" name="Text 22"/>
-          <p:cNvSpPr/>
-          <p:nvPr/>
-        </p:nvSpPr>
-        <p:spPr>
-          <a:xfrm>
-            <a:off x="329184" y="3090672"/>
-            <a:ext cx="1901952" cy="219456"/>
-          </a:xfrm>
-          <a:prstGeom prst="rect">
-            <a:avLst/>
-          </a:prstGeom>
-          <a:noFill/>
-          <a:ln/>
-        </p:spPr>
-        <p:txBody>
-          <a:bodyPr wrap="square" lIns="0" tIns="0" rIns="0" bIns="0" rtlCol="0" anchor="ctr"/>
-          <a:lstStyle/>
-          <a:p>
-            <a:pPr algn="l" indent="0" marL="0">
-              <a:buNone/>
-            </a:pPr>
-            <a:r>
-              <a:rPr lang="en-US" sz="800" dirty="0">
-                <a:solidFill>
-                  <a:srgbClr val="224488"/>
-                </a:solidFill>
-                <a:latin typeface="Courier New" pitchFamily="34" charset="0"/>
-                <a:ea typeface="Courier New" pitchFamily="34" charset="-122"/>
-                <a:cs typeface="Courier New" pitchFamily="34" charset="-120"/>
-              </a:rPr>
-              <a:t>+ setEmail(String)</a:t>
-            </a:r>
-            <a:endParaRPr lang="en-US" sz="800" dirty="0"/>
-          </a:p>
-        </p:txBody>
-      </p:sp>
-      <p:sp>
-        <p:nvSpPr>
-          <p:cNvPr id="25" name="Shape 23"/>
-          <p:cNvSpPr/>
-          <p:nvPr/>
-        </p:nvSpPr>
-        <p:spPr>
-          <a:xfrm>
-            <a:off x="2423160" y="1005840"/>
-            <a:ext cx="2011680" cy="329184"/>
-          </a:xfrm>
-          <a:prstGeom prst="rect">
-            <a:avLst/>
-          </a:prstGeom>
-          <a:solidFill>
-            <a:srgbClr val="2E75B6"/>
-          </a:solidFill>
-          <a:ln w="12700">
-            <a:solidFill>
-              <a:srgbClr val="2E75B6"/>
-            </a:solidFill>
-            <a:prstDash val="solid"/>
-          </a:ln>
-        </p:spPr>
-      </p:sp>
-      <p:sp>
-        <p:nvSpPr>
-          <p:cNvPr id="26" name="Text 24"/>
-          <p:cNvSpPr/>
-          <p:nvPr/>
-        </p:nvSpPr>
-        <p:spPr>
-          <a:xfrm>
-            <a:off x="2423160" y="1005840"/>
-            <a:ext cx="2011680" cy="329184"/>
-          </a:xfrm>
-          <a:prstGeom prst="rect">
-            <a:avLst/>
-          </a:prstGeom>
-          <a:noFill/>
-          <a:ln/>
-        </p:spPr>
-        <p:txBody>
-          <a:bodyPr wrap="square" lIns="0" tIns="0" rIns="0" bIns="0" rtlCol="0" anchor="ctr"/>
-          <a:lstStyle/>
-          <a:p>
-            <a:pPr algn="ctr" indent="0" marL="0">
-              <a:buNone/>
-            </a:pPr>
-            <a:r>
-              <a:rPr lang="en-US" sz="1100" b="1" dirty="0">
-                <a:solidFill>
-                  <a:srgbClr val="FFFFFF"/>
-                </a:solidFill>
-                <a:latin typeface="Calibri" pitchFamily="34" charset="0"/>
-                <a:ea typeface="Calibri" pitchFamily="34" charset="-122"/>
-                <a:cs typeface="Calibri" pitchFamily="34" charset="-120"/>
-              </a:rPr>
-              <a:t>Categoria</a:t>
-            </a:r>
-            <a:endParaRPr lang="en-US" sz="1100" dirty="0"/>
-          </a:p>
-        </p:txBody>
-      </p:sp>
-      <p:sp>
-        <p:nvSpPr>
-          <p:cNvPr id="27" name="Shape 25"/>
-          <p:cNvSpPr/>
-          <p:nvPr/>
-        </p:nvSpPr>
-        <p:spPr>
-          <a:xfrm>
-            <a:off x="2423160" y="1335024"/>
-            <a:ext cx="2011680" cy="219456"/>
-          </a:xfrm>
-          <a:prstGeom prst="rect">
-            <a:avLst/>
-          </a:prstGeom>
-          <a:solidFill>
-            <a:srgbClr val="FFFFFF"/>
-          </a:solidFill>
-          <a:ln w="12700">
-            <a:solidFill>
-              <a:srgbClr val="DDDDDD"/>
-            </a:solidFill>
-            <a:prstDash val="solid"/>
-          </a:ln>
-        </p:spPr>
-      </p:sp>
-      <p:sp>
-        <p:nvSpPr>
-          <p:cNvPr id="28" name="Text 26"/>
-          <p:cNvSpPr/>
-          <p:nvPr/>
-        </p:nvSpPr>
-        <p:spPr>
-          <a:xfrm>
-            <a:off x="2478024" y="1335024"/>
-            <a:ext cx="1901952" cy="219456"/>
-          </a:xfrm>
-          <a:prstGeom prst="rect">
-            <a:avLst/>
-          </a:prstGeom>
-          <a:noFill/>
-          <a:ln/>
-        </p:spPr>
-        <p:txBody>
-          <a:bodyPr wrap="square" lIns="0" tIns="0" rIns="0" bIns="0" rtlCol="0" anchor="ctr"/>
-          <a:lstStyle/>
-          <a:p>
-            <a:pPr algn="l" indent="0" marL="0">
-              <a:buNone/>
-            </a:pPr>
-            <a:r>
-              <a:rPr lang="en-US" sz="800" dirty="0">
-                <a:solidFill>
-                  <a:srgbClr val="1A1A1A"/>
-                </a:solidFill>
-                <a:latin typeface="Courier New" pitchFamily="34" charset="0"/>
-                <a:ea typeface="Courier New" pitchFamily="34" charset="-122"/>
-                <a:cs typeface="Courier New" pitchFamily="34" charset="-120"/>
-              </a:rPr>
-              <a:t>- idCategoria: int</a:t>
-            </a:r>
-            <a:endParaRPr lang="en-US" sz="800" dirty="0"/>
-          </a:p>
-        </p:txBody>
-      </p:sp>
-      <p:sp>
-        <p:nvSpPr>
-          <p:cNvPr id="29" name="Shape 27"/>
-          <p:cNvSpPr/>
-          <p:nvPr/>
-        </p:nvSpPr>
-        <p:spPr>
-          <a:xfrm>
-            <a:off x="2423160" y="1554480"/>
-            <a:ext cx="2011680" cy="219456"/>
-          </a:xfrm>
-          <a:prstGeom prst="rect">
-            <a:avLst/>
-          </a:prstGeom>
-          <a:solidFill>
-            <a:srgbClr val="F0F0F0"/>
-          </a:solidFill>
-          <a:ln w="12700">
-            <a:solidFill>
-              <a:srgbClr val="DDDDDD"/>
-            </a:solidFill>
-            <a:prstDash val="solid"/>
-          </a:ln>
-        </p:spPr>
-      </p:sp>
-      <p:sp>
-        <p:nvSpPr>
-          <p:cNvPr id="30" name="Text 28"/>
-          <p:cNvSpPr/>
-          <p:nvPr/>
-        </p:nvSpPr>
-        <p:spPr>
-          <a:xfrm>
-            <a:off x="2478024" y="1554480"/>
-            <a:ext cx="1901952" cy="219456"/>
-          </a:xfrm>
-          <a:prstGeom prst="rect">
-            <a:avLst/>
-          </a:prstGeom>
-          <a:noFill/>
-          <a:ln/>
-        </p:spPr>
-        <p:txBody>
-          <a:bodyPr wrap="square" lIns="0" tIns="0" rIns="0" bIns="0" rtlCol="0" anchor="ctr"/>
-          <a:lstStyle/>
-          <a:p>
-            <a:pPr algn="l" indent="0" marL="0">
-              <a:buNone/>
-            </a:pPr>
-            <a:r>
-              <a:rPr lang="en-US" sz="800" dirty="0">
-                <a:solidFill>
-                  <a:srgbClr val="1A1A1A"/>
-                </a:solidFill>
-                <a:latin typeface="Courier New" pitchFamily="34" charset="0"/>
-                <a:ea typeface="Courier New" pitchFamily="34" charset="-122"/>
-                <a:cs typeface="Courier New" pitchFamily="34" charset="-120"/>
-              </a:rPr>
-              <a:t>- nombre: String</a:t>
-            </a:r>
-            <a:endParaRPr lang="en-US" sz="800" dirty="0"/>
-          </a:p>
-        </p:txBody>
-      </p:sp>
-      <p:sp>
-        <p:nvSpPr>
-          <p:cNvPr id="31" name="Shape 29"/>
-          <p:cNvSpPr/>
-          <p:nvPr/>
-        </p:nvSpPr>
-        <p:spPr>
-          <a:xfrm>
-            <a:off x="2423160" y="1773936"/>
-            <a:ext cx="2011680" cy="219456"/>
-          </a:xfrm>
-          <a:prstGeom prst="rect">
-            <a:avLst/>
-          </a:prstGeom>
-          <a:solidFill>
-            <a:srgbClr val="FFFFFF"/>
-          </a:solidFill>
-          <a:ln w="12700">
-            <a:solidFill>
-              <a:srgbClr val="DDDDDD"/>
-            </a:solidFill>
-            <a:prstDash val="solid"/>
-          </a:ln>
-        </p:spPr>
-      </p:sp>
-      <p:sp>
-        <p:nvSpPr>
-          <p:cNvPr id="32" name="Text 30"/>
-          <p:cNvSpPr/>
-          <p:nvPr/>
-        </p:nvSpPr>
-        <p:spPr>
-          <a:xfrm>
-            <a:off x="2478024" y="1773936"/>
-            <a:ext cx="1901952" cy="219456"/>
-          </a:xfrm>
-          <a:prstGeom prst="rect">
-            <a:avLst/>
-          </a:prstGeom>
-          <a:noFill/>
-          <a:ln/>
-        </p:spPr>
-        <p:txBody>
-          <a:bodyPr wrap="square" lIns="0" tIns="0" rIns="0" bIns="0" rtlCol="0" anchor="ctr"/>
-          <a:lstStyle/>
-          <a:p>
-            <a:pPr algn="l" indent="0" marL="0">
-              <a:buNone/>
-            </a:pPr>
-            <a:r>
-              <a:rPr lang="en-US" sz="800" dirty="0">
-                <a:solidFill>
-                  <a:srgbClr val="1A1A1A"/>
-                </a:solidFill>
-                <a:latin typeface="Courier New" pitchFamily="34" charset="0"/>
-                <a:ea typeface="Courier New" pitchFamily="34" charset="-122"/>
-                <a:cs typeface="Courier New" pitchFamily="34" charset="-120"/>
-              </a:rPr>
-              <a:t>- descripcion: String</a:t>
-            </a:r>
-            <a:endParaRPr lang="en-US" sz="800" dirty="0"/>
-          </a:p>
-        </p:txBody>
-      </p:sp>
-      <p:sp>
-        <p:nvSpPr>
-          <p:cNvPr id="33" name="Shape 31"/>
-          <p:cNvSpPr/>
-          <p:nvPr/>
-        </p:nvSpPr>
-        <p:spPr>
-          <a:xfrm>
-            <a:off x="2423160" y="1993392"/>
-            <a:ext cx="2011680" cy="0"/>
-          </a:xfrm>
-          <a:prstGeom prst="line">
-            <a:avLst/>
-          </a:prstGeom>
-          <a:noFill/>
-          <a:ln w="12700">
-            <a:solidFill>
-              <a:srgbClr val="2E75B6"/>
-            </a:solidFill>
-            <a:prstDash val="solid"/>
-          </a:ln>
-        </p:spPr>
-      </p:sp>
-      <p:sp>
-        <p:nvSpPr>
-          <p:cNvPr id="34" name="Shape 32"/>
-          <p:cNvSpPr/>
-          <p:nvPr/>
-        </p:nvSpPr>
-        <p:spPr>
-          <a:xfrm>
-            <a:off x="2423160" y="1993392"/>
-            <a:ext cx="2011680" cy="219456"/>
-          </a:xfrm>
-          <a:prstGeom prst="rect">
-            <a:avLst/>
-          </a:prstGeom>
-          <a:solidFill>
-            <a:srgbClr val="F7FAFD"/>
-          </a:solidFill>
-          <a:ln w="12700">
-            <a:solidFill>
-              <a:srgbClr val="DDDDDD"/>
-            </a:solidFill>
-            <a:prstDash val="solid"/>
-          </a:ln>
-        </p:spPr>
-      </p:sp>
-      <p:sp>
-        <p:nvSpPr>
-          <p:cNvPr id="35" name="Text 33"/>
-          <p:cNvSpPr/>
-          <p:nvPr/>
-        </p:nvSpPr>
-        <p:spPr>
-          <a:xfrm>
-            <a:off x="2478024" y="1993392"/>
-            <a:ext cx="1901952" cy="219456"/>
-          </a:xfrm>
-          <a:prstGeom prst="rect">
-            <a:avLst/>
-          </a:prstGeom>
-          <a:noFill/>
-          <a:ln/>
-        </p:spPr>
-        <p:txBody>
-          <a:bodyPr wrap="square" lIns="0" tIns="0" rIns="0" bIns="0" rtlCol="0" anchor="ctr"/>
-          <a:lstStyle/>
-          <a:p>
-            <a:pPr algn="l" indent="0" marL="0">
-              <a:buNone/>
-            </a:pPr>
-            <a:r>
-              <a:rPr lang="en-US" sz="800" dirty="0">
-                <a:solidFill>
-                  <a:srgbClr val="224488"/>
-                </a:solidFill>
-                <a:latin typeface="Courier New" pitchFamily="34" charset="0"/>
-                <a:ea typeface="Courier New" pitchFamily="34" charset="-122"/>
-                <a:cs typeface="Courier New" pitchFamily="34" charset="-120"/>
-              </a:rPr>
-              <a:t>+ getIdCategoria(): int</a:t>
-            </a:r>
-            <a:endParaRPr lang="en-US" sz="800" dirty="0"/>
-          </a:p>
-        </p:txBody>
-      </p:sp>
-      <p:sp>
-        <p:nvSpPr>
-          <p:cNvPr id="36" name="Shape 34"/>
-          <p:cNvSpPr/>
-          <p:nvPr/>
-        </p:nvSpPr>
-        <p:spPr>
-          <a:xfrm>
-            <a:off x="2423160" y="2212848"/>
-            <a:ext cx="2011680" cy="219456"/>
-          </a:xfrm>
-          <a:prstGeom prst="rect">
-            <a:avLst/>
-          </a:prstGeom>
-          <a:solidFill>
-            <a:srgbClr val="FFFFFF"/>
-          </a:solidFill>
-          <a:ln w="12700">
-            <a:solidFill>
-              <a:srgbClr val="DDDDDD"/>
-            </a:solidFill>
-            <a:prstDash val="solid"/>
-          </a:ln>
-        </p:spPr>
-      </p:sp>
-      <p:sp>
-        <p:nvSpPr>
-          <p:cNvPr id="37" name="Text 35"/>
-          <p:cNvSpPr/>
-          <p:nvPr/>
-        </p:nvSpPr>
-        <p:spPr>
-          <a:xfrm>
-            <a:off x="2478024" y="2212848"/>
-            <a:ext cx="1901952" cy="219456"/>
-          </a:xfrm>
-          <a:prstGeom prst="rect">
-            <a:avLst/>
-          </a:prstGeom>
-          <a:noFill/>
-          <a:ln/>
-        </p:spPr>
-        <p:txBody>
-          <a:bodyPr wrap="square" lIns="0" tIns="0" rIns="0" bIns="0" rtlCol="0" anchor="ctr"/>
-          <a:lstStyle/>
-          <a:p>
-            <a:pPr algn="l" indent="0" marL="0">
-              <a:buNone/>
-            </a:pPr>
-            <a:r>
-              <a:rPr lang="en-US" sz="800" dirty="0">
-                <a:solidFill>
-                  <a:srgbClr val="224488"/>
-                </a:solidFill>
-                <a:latin typeface="Courier New" pitchFamily="34" charset="0"/>
-                <a:ea typeface="Courier New" pitchFamily="34" charset="-122"/>
-                <a:cs typeface="Courier New" pitchFamily="34" charset="-120"/>
-              </a:rPr>
-              <a:t>+ getNombre(): String</a:t>
-            </a:r>
-            <a:endParaRPr lang="en-US" sz="800" dirty="0"/>
-          </a:p>
-        </p:txBody>
-      </p:sp>
-      <p:sp>
-        <p:nvSpPr>
-          <p:cNvPr id="38" name="Shape 36"/>
-          <p:cNvSpPr/>
-          <p:nvPr/>
-        </p:nvSpPr>
-        <p:spPr>
-          <a:xfrm>
-            <a:off x="2423160" y="2432304"/>
-            <a:ext cx="2011680" cy="219456"/>
-          </a:xfrm>
-          <a:prstGeom prst="rect">
-            <a:avLst/>
-          </a:prstGeom>
-          <a:solidFill>
-            <a:srgbClr val="F7FAFD"/>
-          </a:solidFill>
-          <a:ln w="12700">
-            <a:solidFill>
-              <a:srgbClr val="DDDDDD"/>
-            </a:solidFill>
-            <a:prstDash val="solid"/>
-          </a:ln>
-        </p:spPr>
-      </p:sp>
-      <p:sp>
-        <p:nvSpPr>
-          <p:cNvPr id="39" name="Text 37"/>
-          <p:cNvSpPr/>
-          <p:nvPr/>
-        </p:nvSpPr>
-        <p:spPr>
-          <a:xfrm>
-            <a:off x="2478024" y="2432304"/>
-            <a:ext cx="1901952" cy="219456"/>
-          </a:xfrm>
-          <a:prstGeom prst="rect">
-            <a:avLst/>
-          </a:prstGeom>
-          <a:noFill/>
-          <a:ln/>
-        </p:spPr>
-        <p:txBody>
-          <a:bodyPr wrap="square" lIns="0" tIns="0" rIns="0" bIns="0" rtlCol="0" anchor="ctr"/>
-          <a:lstStyle/>
-          <a:p>
-            <a:pPr algn="l" indent="0" marL="0">
-              <a:buNone/>
-            </a:pPr>
-            <a:r>
-              <a:rPr lang="en-US" sz="800" dirty="0">
-                <a:solidFill>
-                  <a:srgbClr val="224488"/>
-                </a:solidFill>
-                <a:latin typeface="Courier New" pitchFamily="34" charset="0"/>
-                <a:ea typeface="Courier New" pitchFamily="34" charset="-122"/>
-                <a:cs typeface="Courier New" pitchFamily="34" charset="-120"/>
-              </a:rPr>
-              <a:t>+ getDescripcion(): String</a:t>
-            </a:r>
-            <a:endParaRPr lang="en-US" sz="800" dirty="0"/>
-          </a:p>
-        </p:txBody>
-      </p:sp>
-      <p:sp>
-        <p:nvSpPr>
-          <p:cNvPr id="40" name="Shape 38"/>
-          <p:cNvSpPr/>
-          <p:nvPr/>
-        </p:nvSpPr>
-        <p:spPr>
-          <a:xfrm>
-            <a:off x="2423160" y="2651760"/>
-            <a:ext cx="2011680" cy="219456"/>
-          </a:xfrm>
-          <a:prstGeom prst="rect">
-            <a:avLst/>
-          </a:prstGeom>
-          <a:solidFill>
-            <a:srgbClr val="FFFFFF"/>
-          </a:solidFill>
-          <a:ln w="12700">
-            <a:solidFill>
-              <a:srgbClr val="DDDDDD"/>
-            </a:solidFill>
-            <a:prstDash val="solid"/>
-          </a:ln>
-        </p:spPr>
-      </p:sp>
-      <p:sp>
-        <p:nvSpPr>
-          <p:cNvPr id="41" name="Text 39"/>
-          <p:cNvSpPr/>
-          <p:nvPr/>
-        </p:nvSpPr>
-        <p:spPr>
-          <a:xfrm>
-            <a:off x="2478024" y="2651760"/>
-            <a:ext cx="1901952" cy="219456"/>
-          </a:xfrm>
-          <a:prstGeom prst="rect">
-            <a:avLst/>
-          </a:prstGeom>
-          <a:noFill/>
-          <a:ln/>
-        </p:spPr>
-        <p:txBody>
-          <a:bodyPr wrap="square" lIns="0" tIns="0" rIns="0" bIns="0" rtlCol="0" anchor="ctr"/>
-          <a:lstStyle/>
-          <a:p>
-            <a:pPr algn="l" indent="0" marL="0">
-              <a:buNone/>
-            </a:pPr>
-            <a:r>
-              <a:rPr lang="en-US" sz="800" dirty="0">
-                <a:solidFill>
-                  <a:srgbClr val="224488"/>
-                </a:solidFill>
-                <a:latin typeface="Courier New" pitchFamily="34" charset="0"/>
-                <a:ea typeface="Courier New" pitchFamily="34" charset="-122"/>
-                <a:cs typeface="Courier New" pitchFamily="34" charset="-120"/>
-              </a:rPr>
-              <a:t>+ setIdCategoria(int)</a:t>
-            </a:r>
-            <a:endParaRPr lang="en-US" sz="800" dirty="0"/>
-          </a:p>
-        </p:txBody>
-      </p:sp>
-      <p:sp>
-        <p:nvSpPr>
-          <p:cNvPr id="42" name="Shape 40"/>
-          <p:cNvSpPr/>
-          <p:nvPr/>
-        </p:nvSpPr>
-        <p:spPr>
-          <a:xfrm>
-            <a:off x="2423160" y="2871216"/>
-            <a:ext cx="2011680" cy="219456"/>
-          </a:xfrm>
-          <a:prstGeom prst="rect">
-            <a:avLst/>
-          </a:prstGeom>
-          <a:solidFill>
-            <a:srgbClr val="F7FAFD"/>
-          </a:solidFill>
-          <a:ln w="12700">
-            <a:solidFill>
-              <a:srgbClr val="DDDDDD"/>
-            </a:solidFill>
-            <a:prstDash val="solid"/>
-          </a:ln>
-        </p:spPr>
-      </p:sp>
-      <p:sp>
-        <p:nvSpPr>
-          <p:cNvPr id="43" name="Text 41"/>
-          <p:cNvSpPr/>
-          <p:nvPr/>
-        </p:nvSpPr>
-        <p:spPr>
-          <a:xfrm>
-            <a:off x="2478024" y="2871216"/>
-            <a:ext cx="1901952" cy="219456"/>
-          </a:xfrm>
-          <a:prstGeom prst="rect">
-            <a:avLst/>
-          </a:prstGeom>
-          <a:noFill/>
-          <a:ln/>
-        </p:spPr>
-        <p:txBody>
-          <a:bodyPr wrap="square" lIns="0" tIns="0" rIns="0" bIns="0" rtlCol="0" anchor="ctr"/>
-          <a:lstStyle/>
-          <a:p>
-            <a:pPr algn="l" indent="0" marL="0">
-              <a:buNone/>
-            </a:pPr>
-            <a:r>
-              <a:rPr lang="en-US" sz="800" dirty="0">
-                <a:solidFill>
-                  <a:srgbClr val="224488"/>
-                </a:solidFill>
-                <a:latin typeface="Courier New" pitchFamily="34" charset="0"/>
-                <a:ea typeface="Courier New" pitchFamily="34" charset="-122"/>
-                <a:cs typeface="Courier New" pitchFamily="34" charset="-120"/>
-              </a:rPr>
-              <a:t>+ setNombre(String)</a:t>
-            </a:r>
-            <a:endParaRPr lang="en-US" sz="800" dirty="0"/>
-          </a:p>
-        </p:txBody>
-      </p:sp>
-      <p:sp>
-        <p:nvSpPr>
-          <p:cNvPr id="44" name="Shape 42"/>
-          <p:cNvSpPr/>
-          <p:nvPr/>
-        </p:nvSpPr>
-        <p:spPr>
-          <a:xfrm>
-            <a:off x="2423160" y="3090672"/>
-            <a:ext cx="2011680" cy="219456"/>
-          </a:xfrm>
-          <a:prstGeom prst="rect">
-            <a:avLst/>
-          </a:prstGeom>
-          <a:solidFill>
-            <a:srgbClr val="FFFFFF"/>
-          </a:solidFill>
-          <a:ln w="12700">
-            <a:solidFill>
-              <a:srgbClr val="DDDDDD"/>
-            </a:solidFill>
-            <a:prstDash val="solid"/>
-          </a:ln>
-        </p:spPr>
-      </p:sp>
-      <p:sp>
-        <p:nvSpPr>
-          <p:cNvPr id="45" name="Text 43"/>
-          <p:cNvSpPr/>
-          <p:nvPr/>
-        </p:nvSpPr>
-        <p:spPr>
-          <a:xfrm>
-            <a:off x="2478024" y="3090672"/>
-            <a:ext cx="1901952" cy="219456"/>
-          </a:xfrm>
-          <a:prstGeom prst="rect">
-            <a:avLst/>
-          </a:prstGeom>
-          <a:noFill/>
-          <a:ln/>
-        </p:spPr>
-        <p:txBody>
-          <a:bodyPr wrap="square" lIns="0" tIns="0" rIns="0" bIns="0" rtlCol="0" anchor="ctr"/>
-          <a:lstStyle/>
-          <a:p>
-            <a:pPr algn="l" indent="0" marL="0">
-              <a:buNone/>
-            </a:pPr>
-            <a:r>
-              <a:rPr lang="en-US" sz="800" dirty="0">
-                <a:solidFill>
-                  <a:srgbClr val="224488"/>
-                </a:solidFill>
-                <a:latin typeface="Courier New" pitchFamily="34" charset="0"/>
-                <a:ea typeface="Courier New" pitchFamily="34" charset="-122"/>
-                <a:cs typeface="Courier New" pitchFamily="34" charset="-120"/>
-              </a:rPr>
-              <a:t>+ setDescripcion(String)</a:t>
-            </a:r>
-            <a:endParaRPr lang="en-US" sz="800" dirty="0"/>
-          </a:p>
-        </p:txBody>
-      </p:sp>
-      <p:sp>
-        <p:nvSpPr>
-          <p:cNvPr id="46" name="Shape 44"/>
-          <p:cNvSpPr/>
-          <p:nvPr/>
-        </p:nvSpPr>
-        <p:spPr>
-          <a:xfrm>
-            <a:off x="4572000" y="1005840"/>
-            <a:ext cx="2011680" cy="329184"/>
-          </a:xfrm>
-          <a:prstGeom prst="rect">
-            <a:avLst/>
-          </a:prstGeom>
-          <a:solidFill>
-            <a:srgbClr val="2E75B6"/>
-          </a:solidFill>
-          <a:ln w="12700">
-            <a:solidFill>
-              <a:srgbClr val="2E75B6"/>
-            </a:solidFill>
-            <a:prstDash val="solid"/>
-          </a:ln>
-        </p:spPr>
-      </p:sp>
-      <p:sp>
-        <p:nvSpPr>
-          <p:cNvPr id="47" name="Text 45"/>
-          <p:cNvSpPr/>
-          <p:nvPr/>
-        </p:nvSpPr>
-        <p:spPr>
-          <a:xfrm>
-            <a:off x="4572000" y="1005840"/>
-            <a:ext cx="2011680" cy="329184"/>
-          </a:xfrm>
-          <a:prstGeom prst="rect">
-            <a:avLst/>
-          </a:prstGeom>
-          <a:noFill/>
-          <a:ln/>
-        </p:spPr>
-        <p:txBody>
-          <a:bodyPr wrap="square" lIns="0" tIns="0" rIns="0" bIns="0" rtlCol="0" anchor="ctr"/>
-          <a:lstStyle/>
-          <a:p>
-            <a:pPr algn="ctr" indent="0" marL="0">
-              <a:buNone/>
-            </a:pPr>
-            <a:r>
-              <a:rPr lang="en-US" sz="1100" b="1" dirty="0">
-                <a:solidFill>
-                  <a:srgbClr val="FFFFFF"/>
-                </a:solidFill>
-                <a:latin typeface="Calibri" pitchFamily="34" charset="0"/>
-                <a:ea typeface="Calibri" pitchFamily="34" charset="-122"/>
-                <a:cs typeface="Calibri" pitchFamily="34" charset="-120"/>
-              </a:rPr>
-              <a:t>Cuento</a:t>
-            </a:r>
-            <a:endParaRPr lang="en-US" sz="1100" dirty="0"/>
-          </a:p>
-        </p:txBody>
-      </p:sp>
-      <p:sp>
-        <p:nvSpPr>
-          <p:cNvPr id="48" name="Shape 46"/>
-          <p:cNvSpPr/>
-          <p:nvPr/>
-        </p:nvSpPr>
-        <p:spPr>
-          <a:xfrm>
-            <a:off x="4572000" y="1335024"/>
-            <a:ext cx="2011680" cy="219456"/>
-          </a:xfrm>
-          <a:prstGeom prst="rect">
-            <a:avLst/>
-          </a:prstGeom>
-          <a:solidFill>
-            <a:srgbClr val="FFFFFF"/>
-          </a:solidFill>
-          <a:ln w="12700">
-            <a:solidFill>
-              <a:srgbClr val="DDDDDD"/>
-            </a:solidFill>
-            <a:prstDash val="solid"/>
-          </a:ln>
-        </p:spPr>
-      </p:sp>
-      <p:sp>
-        <p:nvSpPr>
-          <p:cNvPr id="49" name="Text 47"/>
-          <p:cNvSpPr/>
-          <p:nvPr/>
-        </p:nvSpPr>
-        <p:spPr>
-          <a:xfrm>
-            <a:off x="4626864" y="1335024"/>
-            <a:ext cx="1901952" cy="219456"/>
-          </a:xfrm>
-          <a:prstGeom prst="rect">
-            <a:avLst/>
-          </a:prstGeom>
-          <a:noFill/>
-          <a:ln/>
-        </p:spPr>
-        <p:txBody>
-          <a:bodyPr wrap="square" lIns="0" tIns="0" rIns="0" bIns="0" rtlCol="0" anchor="ctr"/>
-          <a:lstStyle/>
-          <a:p>
-            <a:pPr algn="l" indent="0" marL="0">
-              <a:buNone/>
-            </a:pPr>
-            <a:r>
-              <a:rPr lang="en-US" sz="800" dirty="0">
-                <a:solidFill>
-                  <a:srgbClr val="1A1A1A"/>
-                </a:solidFill>
-                <a:latin typeface="Courier New" pitchFamily="34" charset="0"/>
-                <a:ea typeface="Courier New" pitchFamily="34" charset="-122"/>
-                <a:cs typeface="Courier New" pitchFamily="34" charset="-120"/>
-              </a:rPr>
-              <a:t>- cuentoId: int</a:t>
-            </a:r>
-            <a:endParaRPr lang="en-US" sz="800" dirty="0"/>
-          </a:p>
-        </p:txBody>
-      </p:sp>
-      <p:sp>
-        <p:nvSpPr>
-          <p:cNvPr id="50" name="Shape 48"/>
-          <p:cNvSpPr/>
-          <p:nvPr/>
-        </p:nvSpPr>
-        <p:spPr>
-          <a:xfrm>
-            <a:off x="4572000" y="1554480"/>
-            <a:ext cx="2011680" cy="219456"/>
-          </a:xfrm>
-          <a:prstGeom prst="rect">
-            <a:avLst/>
-          </a:prstGeom>
-          <a:solidFill>
-            <a:srgbClr val="F0F0F0"/>
-          </a:solidFill>
-          <a:ln w="12700">
-            <a:solidFill>
-              <a:srgbClr val="DDDDDD"/>
-            </a:solidFill>
-            <a:prstDash val="solid"/>
-          </a:ln>
-        </p:spPr>
-      </p:sp>
-      <p:sp>
-        <p:nvSpPr>
-          <p:cNvPr id="51" name="Text 49"/>
-          <p:cNvSpPr/>
-          <p:nvPr/>
-        </p:nvSpPr>
-        <p:spPr>
-          <a:xfrm>
-            <a:off x="4626864" y="1554480"/>
-            <a:ext cx="1901952" cy="219456"/>
-          </a:xfrm>
-          <a:prstGeom prst="rect">
-            <a:avLst/>
-          </a:prstGeom>
-          <a:noFill/>
-          <a:ln/>
-        </p:spPr>
-        <p:txBody>
-          <a:bodyPr wrap="square" lIns="0" tIns="0" rIns="0" bIns="0" rtlCol="0" anchor="ctr"/>
-          <a:lstStyle/>
-          <a:p>
-            <a:pPr algn="l" indent="0" marL="0">
-              <a:buNone/>
-            </a:pPr>
-            <a:r>
-              <a:rPr lang="en-US" sz="800" dirty="0">
-                <a:solidFill>
-                  <a:srgbClr val="1A1A1A"/>
-                </a:solidFill>
-                <a:latin typeface="Courier New" pitchFamily="34" charset="0"/>
-                <a:ea typeface="Courier New" pitchFamily="34" charset="-122"/>
-                <a:cs typeface="Courier New" pitchFamily="34" charset="-120"/>
-              </a:rPr>
-              <a:t>- cuentoTitulo: String</a:t>
-            </a:r>
-            <a:endParaRPr lang="en-US" sz="800" dirty="0"/>
-          </a:p>
-        </p:txBody>
-      </p:sp>
-      <p:sp>
-        <p:nvSpPr>
-          <p:cNvPr id="52" name="Shape 50"/>
-          <p:cNvSpPr/>
-          <p:nvPr/>
-        </p:nvSpPr>
-        <p:spPr>
-          <a:xfrm>
-            <a:off x="4572000" y="1773936"/>
-            <a:ext cx="2011680" cy="219456"/>
-          </a:xfrm>
-          <a:prstGeom prst="rect">
-            <a:avLst/>
-          </a:prstGeom>
-          <a:solidFill>
-            <a:srgbClr val="FFFFFF"/>
-          </a:solidFill>
-          <a:ln w="12700">
-            <a:solidFill>
-              <a:srgbClr val="DDDDDD"/>
-            </a:solidFill>
-            <a:prstDash val="solid"/>
-          </a:ln>
-        </p:spPr>
-      </p:sp>
-      <p:sp>
-        <p:nvSpPr>
-          <p:cNvPr id="53" name="Text 51"/>
-          <p:cNvSpPr/>
-          <p:nvPr/>
-        </p:nvSpPr>
-        <p:spPr>
-          <a:xfrm>
-            <a:off x="4626864" y="1773936"/>
-            <a:ext cx="1901952" cy="219456"/>
-          </a:xfrm>
-          <a:prstGeom prst="rect">
-            <a:avLst/>
-          </a:prstGeom>
-          <a:noFill/>
-          <a:ln/>
-        </p:spPr>
-        <p:txBody>
-          <a:bodyPr wrap="square" lIns="0" tIns="0" rIns="0" bIns="0" rtlCol="0" anchor="ctr"/>
-          <a:lstStyle/>
-          <a:p>
-            <a:pPr algn="l" indent="0" marL="0">
-              <a:buNone/>
-            </a:pPr>
-            <a:r>
-              <a:rPr lang="en-US" sz="800" dirty="0">
-                <a:solidFill>
-                  <a:srgbClr val="1A1A1A"/>
-                </a:solidFill>
-                <a:latin typeface="Courier New" pitchFamily="34" charset="0"/>
-                <a:ea typeface="Courier New" pitchFamily="34" charset="-122"/>
-                <a:cs typeface="Courier New" pitchFamily="34" charset="-120"/>
-              </a:rPr>
-              <a:t>- cuentoDescripcion: String</a:t>
-            </a:r>
-            <a:endParaRPr lang="en-US" sz="800" dirty="0"/>
-          </a:p>
-        </p:txBody>
-      </p:sp>
-      <p:sp>
-        <p:nvSpPr>
-          <p:cNvPr id="54" name="Shape 52"/>
-          <p:cNvSpPr/>
-          <p:nvPr/>
-        </p:nvSpPr>
-        <p:spPr>
-          <a:xfrm>
-            <a:off x="4572000" y="1993392"/>
-            <a:ext cx="2011680" cy="219456"/>
-          </a:xfrm>
-          <a:prstGeom prst="rect">
-            <a:avLst/>
-          </a:prstGeom>
-          <a:solidFill>
-            <a:srgbClr val="F0F0F0"/>
-          </a:solidFill>
-          <a:ln w="12700">
-            <a:solidFill>
-              <a:srgbClr val="DDDDDD"/>
-            </a:solidFill>
-            <a:prstDash val="solid"/>
-          </a:ln>
-        </p:spPr>
-      </p:sp>
-      <p:sp>
-        <p:nvSpPr>
-          <p:cNvPr id="55" name="Text 53"/>
-          <p:cNvSpPr/>
-          <p:nvPr/>
-        </p:nvSpPr>
-        <p:spPr>
-          <a:xfrm>
-            <a:off x="4626864" y="1993392"/>
-            <a:ext cx="1901952" cy="219456"/>
-          </a:xfrm>
-          <a:prstGeom prst="rect">
-            <a:avLst/>
-          </a:prstGeom>
-          <a:noFill/>
-          <a:ln/>
-        </p:spPr>
-        <p:txBody>
-          <a:bodyPr wrap="square" lIns="0" tIns="0" rIns="0" bIns="0" rtlCol="0" anchor="ctr"/>
-          <a:lstStyle/>
-          <a:p>
-            <a:pPr algn="l" indent="0" marL="0">
-              <a:buNone/>
-            </a:pPr>
-            <a:r>
-              <a:rPr lang="en-US" sz="800" dirty="0">
-                <a:solidFill>
-                  <a:srgbClr val="1A1A1A"/>
-                </a:solidFill>
-                <a:latin typeface="Courier New" pitchFamily="34" charset="0"/>
-                <a:ea typeface="Courier New" pitchFamily="34" charset="-122"/>
-                <a:cs typeface="Courier New" pitchFamily="34" charset="-120"/>
-              </a:rPr>
-              <a:t>- cuentoContenido: String</a:t>
-            </a:r>
-            <a:endParaRPr lang="en-US" sz="800" dirty="0"/>
-          </a:p>
-        </p:txBody>
-      </p:sp>
-      <p:sp>
-        <p:nvSpPr>
-          <p:cNvPr id="56" name="Shape 54"/>
-          <p:cNvSpPr/>
-          <p:nvPr/>
-        </p:nvSpPr>
-        <p:spPr>
-          <a:xfrm>
-            <a:off x="4572000" y="2212848"/>
-            <a:ext cx="2011680" cy="219456"/>
-          </a:xfrm>
-          <a:prstGeom prst="rect">
-            <a:avLst/>
-          </a:prstGeom>
-          <a:solidFill>
-            <a:srgbClr val="FFFFFF"/>
-          </a:solidFill>
-          <a:ln w="12700">
-            <a:solidFill>
-              <a:srgbClr val="DDDDDD"/>
-            </a:solidFill>
-            <a:prstDash val="solid"/>
-          </a:ln>
-        </p:spPr>
-      </p:sp>
-      <p:sp>
-        <p:nvSpPr>
-          <p:cNvPr id="57" name="Text 55"/>
-          <p:cNvSpPr/>
-          <p:nvPr/>
-        </p:nvSpPr>
-        <p:spPr>
-          <a:xfrm>
-            <a:off x="4626864" y="2212848"/>
-            <a:ext cx="1901952" cy="219456"/>
-          </a:xfrm>
-          <a:prstGeom prst="rect">
-            <a:avLst/>
-          </a:prstGeom>
-          <a:noFill/>
-          <a:ln/>
-        </p:spPr>
-        <p:txBody>
-          <a:bodyPr wrap="square" lIns="0" tIns="0" rIns="0" bIns="0" rtlCol="0" anchor="ctr"/>
-          <a:lstStyle/>
-          <a:p>
-            <a:pPr algn="l" indent="0" marL="0">
-              <a:buNone/>
-            </a:pPr>
-            <a:r>
-              <a:rPr lang="en-US" sz="800" dirty="0">
-                <a:solidFill>
-                  <a:srgbClr val="1A1A1A"/>
-                </a:solidFill>
-                <a:latin typeface="Courier New" pitchFamily="34" charset="0"/>
-                <a:ea typeface="Courier New" pitchFamily="34" charset="-122"/>
-                <a:cs typeface="Courier New" pitchFamily="34" charset="-120"/>
-              </a:rPr>
-              <a:t>- cuentoFechaPublicacion: Date</a:t>
-            </a:r>
-            <a:endParaRPr lang="en-US" sz="800" dirty="0"/>
-          </a:p>
-        </p:txBody>
-      </p:sp>
-      <p:sp>
-        <p:nvSpPr>
-          <p:cNvPr id="58" name="Shape 56"/>
-          <p:cNvSpPr/>
-          <p:nvPr/>
-        </p:nvSpPr>
-        <p:spPr>
-          <a:xfrm>
-            <a:off x="4572000" y="2432304"/>
-            <a:ext cx="2011680" cy="219456"/>
-          </a:xfrm>
-          <a:prstGeom prst="rect">
-            <a:avLst/>
-          </a:prstGeom>
-          <a:solidFill>
-            <a:srgbClr val="F0F0F0"/>
-          </a:solidFill>
-          <a:ln w="12700">
-            <a:solidFill>
-              <a:srgbClr val="DDDDDD"/>
-            </a:solidFill>
-            <a:prstDash val="solid"/>
-          </a:ln>
-        </p:spPr>
-      </p:sp>
-      <p:sp>
-        <p:nvSpPr>
-          <p:cNvPr id="59" name="Text 57"/>
-          <p:cNvSpPr/>
-          <p:nvPr/>
-        </p:nvSpPr>
-        <p:spPr>
-          <a:xfrm>
-            <a:off x="4626864" y="2432304"/>
-            <a:ext cx="1901952" cy="219456"/>
-          </a:xfrm>
-          <a:prstGeom prst="rect">
-            <a:avLst/>
-          </a:prstGeom>
-          <a:noFill/>
-          <a:ln/>
-        </p:spPr>
-        <p:txBody>
-          <a:bodyPr wrap="square" lIns="0" tIns="0" rIns="0" bIns="0" rtlCol="0" anchor="ctr"/>
-          <a:lstStyle/>
-          <a:p>
-            <a:pPr algn="l" indent="0" marL="0">
-              <a:buNone/>
-            </a:pPr>
-            <a:r>
-              <a:rPr lang="en-US" sz="800" dirty="0">
-                <a:solidFill>
-                  <a:srgbClr val="1A1A1A"/>
-                </a:solidFill>
-                <a:latin typeface="Courier New" pitchFamily="34" charset="0"/>
-                <a:ea typeface="Courier New" pitchFamily="34" charset="-122"/>
-                <a:cs typeface="Courier New" pitchFamily="34" charset="-120"/>
-              </a:rPr>
-              <a:t>- autoId: int</a:t>
-            </a:r>
-            <a:endParaRPr lang="en-US" sz="800" dirty="0"/>
-          </a:p>
-        </p:txBody>
-      </p:sp>
-      <p:sp>
-        <p:nvSpPr>
-          <p:cNvPr id="60" name="Shape 58"/>
-          <p:cNvSpPr/>
-          <p:nvPr/>
-        </p:nvSpPr>
-        <p:spPr>
-          <a:xfrm>
-            <a:off x="4572000" y="2651760"/>
-            <a:ext cx="2011680" cy="219456"/>
-          </a:xfrm>
-          <a:prstGeom prst="rect">
-            <a:avLst/>
-          </a:prstGeom>
-          <a:solidFill>
-            <a:srgbClr val="FFFFFF"/>
-          </a:solidFill>
-          <a:ln w="12700">
-            <a:solidFill>
-              <a:srgbClr val="DDDDDD"/>
-            </a:solidFill>
-            <a:prstDash val="solid"/>
-          </a:ln>
-        </p:spPr>
-      </p:sp>
-      <p:sp>
-        <p:nvSpPr>
-          <p:cNvPr id="61" name="Text 59"/>
-          <p:cNvSpPr/>
-          <p:nvPr/>
-        </p:nvSpPr>
-        <p:spPr>
-          <a:xfrm>
-            <a:off x="4626864" y="2651760"/>
-            <a:ext cx="1901952" cy="219456"/>
-          </a:xfrm>
-          <a:prstGeom prst="rect">
-            <a:avLst/>
-          </a:prstGeom>
-          <a:noFill/>
-          <a:ln/>
-        </p:spPr>
-        <p:txBody>
-          <a:bodyPr wrap="square" lIns="0" tIns="0" rIns="0" bIns="0" rtlCol="0" anchor="ctr"/>
-          <a:lstStyle/>
-          <a:p>
-            <a:pPr algn="l" indent="0" marL="0">
-              <a:buNone/>
-            </a:pPr>
-            <a:r>
-              <a:rPr lang="en-US" sz="800" dirty="0">
-                <a:solidFill>
-                  <a:srgbClr val="1A1A1A"/>
-                </a:solidFill>
-                <a:latin typeface="Courier New" pitchFamily="34" charset="0"/>
-                <a:ea typeface="Courier New" pitchFamily="34" charset="-122"/>
-                <a:cs typeface="Courier New" pitchFamily="34" charset="-120"/>
-              </a:rPr>
-              <a:t>- categId: int</a:t>
-            </a:r>
-            <a:endParaRPr lang="en-US" sz="800" dirty="0"/>
-          </a:p>
-        </p:txBody>
-      </p:sp>
-      <p:sp>
-        <p:nvSpPr>
-          <p:cNvPr id="62" name="Shape 60"/>
-          <p:cNvSpPr/>
-          <p:nvPr/>
-        </p:nvSpPr>
-        <p:spPr>
-          <a:xfrm>
-            <a:off x="4572000" y="2871216"/>
-            <a:ext cx="2011680" cy="0"/>
-          </a:xfrm>
-          <a:prstGeom prst="line">
-            <a:avLst/>
-          </a:prstGeom>
-          <a:noFill/>
-          <a:ln w="12700">
-            <a:solidFill>
-              <a:srgbClr val="2E75B6"/>
-            </a:solidFill>
-            <a:prstDash val="solid"/>
-          </a:ln>
-        </p:spPr>
-      </p:sp>
-      <p:sp>
-        <p:nvSpPr>
-          <p:cNvPr id="63" name="Shape 61"/>
-          <p:cNvSpPr/>
-          <p:nvPr/>
-        </p:nvSpPr>
-        <p:spPr>
-          <a:xfrm>
-            <a:off x="4572000" y="2871216"/>
-            <a:ext cx="2011680" cy="219456"/>
-          </a:xfrm>
-          <a:prstGeom prst="rect">
-            <a:avLst/>
-          </a:prstGeom>
-          <a:solidFill>
-            <a:srgbClr val="F7FAFD"/>
-          </a:solidFill>
-          <a:ln w="12700">
-            <a:solidFill>
-              <a:srgbClr val="DDDDDD"/>
-            </a:solidFill>
-            <a:prstDash val="solid"/>
-          </a:ln>
-        </p:spPr>
-      </p:sp>
-      <p:sp>
-        <p:nvSpPr>
-          <p:cNvPr id="64" name="Text 62"/>
-          <p:cNvSpPr/>
-          <p:nvPr/>
-        </p:nvSpPr>
-        <p:spPr>
-          <a:xfrm>
-            <a:off x="4626864" y="2871216"/>
-            <a:ext cx="1901952" cy="219456"/>
-          </a:xfrm>
-          <a:prstGeom prst="rect">
-            <a:avLst/>
-          </a:prstGeom>
-          <a:noFill/>
-          <a:ln/>
-        </p:spPr>
-        <p:txBody>
-          <a:bodyPr wrap="square" lIns="0" tIns="0" rIns="0" bIns="0" rtlCol="0" anchor="ctr"/>
-          <a:lstStyle/>
-          <a:p>
-            <a:pPr algn="l" indent="0" marL="0">
-              <a:buNone/>
-            </a:pPr>
-            <a:r>
-              <a:rPr lang="en-US" sz="800" dirty="0">
-                <a:solidFill>
-                  <a:srgbClr val="224488"/>
-                </a:solidFill>
-                <a:latin typeface="Courier New" pitchFamily="34" charset="0"/>
-                <a:ea typeface="Courier New" pitchFamily="34" charset="-122"/>
-                <a:cs typeface="Courier New" pitchFamily="34" charset="-120"/>
-              </a:rPr>
-              <a:t>+ getCuentoId(): int</a:t>
-            </a:r>
-            <a:endParaRPr lang="en-US" sz="800" dirty="0"/>
-          </a:p>
-        </p:txBody>
-      </p:sp>
-      <p:sp>
-        <p:nvSpPr>
-          <p:cNvPr id="65" name="Shape 63"/>
-          <p:cNvSpPr/>
-          <p:nvPr/>
-        </p:nvSpPr>
-        <p:spPr>
-          <a:xfrm>
-            <a:off x="4572000" y="3090672"/>
-            <a:ext cx="2011680" cy="219456"/>
-          </a:xfrm>
-          <a:prstGeom prst="rect">
-            <a:avLst/>
-          </a:prstGeom>
-          <a:solidFill>
-            <a:srgbClr val="FFFFFF"/>
-          </a:solidFill>
-          <a:ln w="12700">
-            <a:solidFill>
-              <a:srgbClr val="DDDDDD"/>
-            </a:solidFill>
-            <a:prstDash val="solid"/>
-          </a:ln>
-        </p:spPr>
-      </p:sp>
-      <p:sp>
-        <p:nvSpPr>
-          <p:cNvPr id="66" name="Text 64"/>
-          <p:cNvSpPr/>
-          <p:nvPr/>
-        </p:nvSpPr>
-        <p:spPr>
-          <a:xfrm>
-            <a:off x="4626864" y="3090672"/>
-            <a:ext cx="1901952" cy="219456"/>
-          </a:xfrm>
-          <a:prstGeom prst="rect">
-            <a:avLst/>
-          </a:prstGeom>
-          <a:noFill/>
-          <a:ln/>
-        </p:spPr>
-        <p:txBody>
-          <a:bodyPr wrap="square" lIns="0" tIns="0" rIns="0" bIns="0" rtlCol="0" anchor="ctr"/>
-          <a:lstStyle/>
-          <a:p>
-            <a:pPr algn="l" indent="0" marL="0">
-              <a:buNone/>
-            </a:pPr>
-            <a:r>
-              <a:rPr lang="en-US" sz="800" dirty="0">
-                <a:solidFill>
-                  <a:srgbClr val="224488"/>
-                </a:solidFill>
-                <a:latin typeface="Courier New" pitchFamily="34" charset="0"/>
-                <a:ea typeface="Courier New" pitchFamily="34" charset="-122"/>
-                <a:cs typeface="Courier New" pitchFamily="34" charset="-120"/>
-              </a:rPr>
-              <a:t>+ getCuentoTitulo(): String</a:t>
-            </a:r>
-            <a:endParaRPr lang="en-US" sz="800" dirty="0"/>
-          </a:p>
-        </p:txBody>
-      </p:sp>
-      <p:sp>
-        <p:nvSpPr>
-          <p:cNvPr id="67" name="Shape 65"/>
-          <p:cNvSpPr/>
-          <p:nvPr/>
-        </p:nvSpPr>
-        <p:spPr>
-          <a:xfrm>
-            <a:off x="4572000" y="3310128"/>
-            <a:ext cx="2011680" cy="219456"/>
-          </a:xfrm>
-          <a:prstGeom prst="rect">
-            <a:avLst/>
-          </a:prstGeom>
-          <a:solidFill>
-            <a:srgbClr val="F7FAFD"/>
-          </a:solidFill>
-          <a:ln w="12700">
-            <a:solidFill>
-              <a:srgbClr val="DDDDDD"/>
-            </a:solidFill>
-            <a:prstDash val="solid"/>
-          </a:ln>
-        </p:spPr>
-      </p:sp>
-      <p:sp>
-        <p:nvSpPr>
-          <p:cNvPr id="68" name="Text 66"/>
-          <p:cNvSpPr/>
-          <p:nvPr/>
-        </p:nvSpPr>
-        <p:spPr>
-          <a:xfrm>
-            <a:off x="4626864" y="3310128"/>
-            <a:ext cx="1901952" cy="219456"/>
-          </a:xfrm>
-          <a:prstGeom prst="rect">
-            <a:avLst/>
-          </a:prstGeom>
-          <a:noFill/>
-          <a:ln/>
-        </p:spPr>
-        <p:txBody>
-          <a:bodyPr wrap="square" lIns="0" tIns="0" rIns="0" bIns="0" rtlCol="0" anchor="ctr"/>
-          <a:lstStyle/>
-          <a:p>
-            <a:pPr algn="l" indent="0" marL="0">
-              <a:buNone/>
-            </a:pPr>
-            <a:r>
-              <a:rPr lang="en-US" sz="800" dirty="0">
-                <a:solidFill>
-                  <a:srgbClr val="224488"/>
-                </a:solidFill>
-                <a:latin typeface="Courier New" pitchFamily="34" charset="0"/>
-                <a:ea typeface="Courier New" pitchFamily="34" charset="-122"/>
-                <a:cs typeface="Courier New" pitchFamily="34" charset="-120"/>
-              </a:rPr>
-              <a:t>+ getAutoId(): int</a:t>
-            </a:r>
-            <a:endParaRPr lang="en-US" sz="800" dirty="0"/>
-          </a:p>
-        </p:txBody>
-      </p:sp>
-      <p:sp>
-        <p:nvSpPr>
-          <p:cNvPr id="69" name="Shape 67"/>
-          <p:cNvSpPr/>
-          <p:nvPr/>
-        </p:nvSpPr>
-        <p:spPr>
-          <a:xfrm>
-            <a:off x="4572000" y="3529584"/>
-            <a:ext cx="2011680" cy="219456"/>
-          </a:xfrm>
-          <a:prstGeom prst="rect">
-            <a:avLst/>
-          </a:prstGeom>
-          <a:solidFill>
-            <a:srgbClr val="FFFFFF"/>
-          </a:solidFill>
-          <a:ln w="12700">
-            <a:solidFill>
-              <a:srgbClr val="DDDDDD"/>
-            </a:solidFill>
-            <a:prstDash val="solid"/>
-          </a:ln>
-        </p:spPr>
-      </p:sp>
-      <p:sp>
-        <p:nvSpPr>
-          <p:cNvPr id="70" name="Text 68"/>
-          <p:cNvSpPr/>
-          <p:nvPr/>
-        </p:nvSpPr>
-        <p:spPr>
-          <a:xfrm>
-            <a:off x="4626864" y="3529584"/>
-            <a:ext cx="1901952" cy="219456"/>
-          </a:xfrm>
-          <a:prstGeom prst="rect">
-            <a:avLst/>
-          </a:prstGeom>
-          <a:noFill/>
-          <a:ln/>
-        </p:spPr>
-        <p:txBody>
-          <a:bodyPr wrap="square" lIns="0" tIns="0" rIns="0" bIns="0" rtlCol="0" anchor="ctr"/>
-          <a:lstStyle/>
-          <a:p>
-            <a:pPr algn="l" indent="0" marL="0">
-              <a:buNone/>
-            </a:pPr>
-            <a:r>
-              <a:rPr lang="en-US" sz="800" dirty="0">
-                <a:solidFill>
-                  <a:srgbClr val="224488"/>
-                </a:solidFill>
-                <a:latin typeface="Courier New" pitchFamily="34" charset="0"/>
-                <a:ea typeface="Courier New" pitchFamily="34" charset="-122"/>
-                <a:cs typeface="Courier New" pitchFamily="34" charset="-120"/>
-              </a:rPr>
-              <a:t>+ getCategId(): int</a:t>
-            </a:r>
-            <a:endParaRPr lang="en-US" sz="800" dirty="0"/>
-          </a:p>
-        </p:txBody>
-      </p:sp>
-      <p:sp>
-        <p:nvSpPr>
-          <p:cNvPr id="71" name="Shape 69"/>
-          <p:cNvSpPr/>
-          <p:nvPr/>
-        </p:nvSpPr>
-        <p:spPr>
-          <a:xfrm>
-            <a:off x="4572000" y="3749040"/>
-            <a:ext cx="2011680" cy="219456"/>
-          </a:xfrm>
-          <a:prstGeom prst="rect">
-            <a:avLst/>
-          </a:prstGeom>
-          <a:solidFill>
-            <a:srgbClr val="F7FAFD"/>
-          </a:solidFill>
-          <a:ln w="12700">
-            <a:solidFill>
-              <a:srgbClr val="DDDDDD"/>
-            </a:solidFill>
-            <a:prstDash val="solid"/>
-          </a:ln>
-        </p:spPr>
-      </p:sp>
-      <p:sp>
-        <p:nvSpPr>
-          <p:cNvPr id="72" name="Text 70"/>
-          <p:cNvSpPr/>
-          <p:nvPr/>
-        </p:nvSpPr>
-        <p:spPr>
-          <a:xfrm>
-            <a:off x="4626864" y="3749040"/>
-            <a:ext cx="1901952" cy="219456"/>
-          </a:xfrm>
-          <a:prstGeom prst="rect">
-            <a:avLst/>
-          </a:prstGeom>
-          <a:noFill/>
-          <a:ln/>
-        </p:spPr>
-        <p:txBody>
-          <a:bodyPr wrap="square" lIns="0" tIns="0" rIns="0" bIns="0" rtlCol="0" anchor="ctr"/>
-          <a:lstStyle/>
-          <a:p>
-            <a:pPr algn="l" indent="0" marL="0">
-              <a:buNone/>
-            </a:pPr>
-            <a:r>
-              <a:rPr lang="en-US" sz="800" dirty="0">
-                <a:solidFill>
-                  <a:srgbClr val="224488"/>
-                </a:solidFill>
-                <a:latin typeface="Courier New" pitchFamily="34" charset="0"/>
-                <a:ea typeface="Courier New" pitchFamily="34" charset="-122"/>
-                <a:cs typeface="Courier New" pitchFamily="34" charset="-120"/>
-              </a:rPr>
-              <a:t>+ set...()</a:t>
-            </a:r>
-            <a:endParaRPr lang="en-US" sz="800" dirty="0"/>
-          </a:p>
-        </p:txBody>
-      </p:sp>
-      <p:sp>
-        <p:nvSpPr>
-          <p:cNvPr id="73" name="Shape 71"/>
-          <p:cNvSpPr/>
-          <p:nvPr/>
-        </p:nvSpPr>
-        <p:spPr>
-          <a:xfrm>
-            <a:off x="6903720" y="1005840"/>
-            <a:ext cx="2011680" cy="329184"/>
-          </a:xfrm>
-          <a:prstGeom prst="rect">
-            <a:avLst/>
-          </a:prstGeom>
-          <a:solidFill>
-            <a:srgbClr val="2E75B6"/>
-          </a:solidFill>
-          <a:ln w="12700">
-            <a:solidFill>
-              <a:srgbClr val="2E75B6"/>
-            </a:solidFill>
-            <a:prstDash val="solid"/>
-          </a:ln>
-        </p:spPr>
-      </p:sp>
-      <p:sp>
-        <p:nvSpPr>
-          <p:cNvPr id="74" name="Text 72"/>
-          <p:cNvSpPr/>
-          <p:nvPr/>
-        </p:nvSpPr>
-        <p:spPr>
-          <a:xfrm>
-            <a:off x="6903720" y="1005840"/>
-            <a:ext cx="2011680" cy="329184"/>
-          </a:xfrm>
-          <a:prstGeom prst="rect">
-            <a:avLst/>
-          </a:prstGeom>
-          <a:noFill/>
-          <a:ln/>
-        </p:spPr>
-        <p:txBody>
-          <a:bodyPr wrap="square" lIns="0" tIns="0" rIns="0" bIns="0" rtlCol="0" anchor="ctr"/>
-          <a:lstStyle/>
-          <a:p>
-            <a:pPr algn="ctr" indent="0" marL="0">
-              <a:buNone/>
-            </a:pPr>
-            <a:r>
-              <a:rPr lang="en-US" sz="1100" b="1" dirty="0">
-                <a:solidFill>
-                  <a:srgbClr val="FFFFFF"/>
-                </a:solidFill>
-                <a:latin typeface="Calibri" pitchFamily="34" charset="0"/>
-                <a:ea typeface="Calibri" pitchFamily="34" charset="-122"/>
-                <a:cs typeface="Calibri" pitchFamily="34" charset="-120"/>
-              </a:rPr>
-              <a:t>Favorito</a:t>
-            </a:r>
-            <a:endParaRPr lang="en-US" sz="1100" dirty="0"/>
-          </a:p>
-        </p:txBody>
-      </p:sp>
-      <p:sp>
-        <p:nvSpPr>
-          <p:cNvPr id="75" name="Shape 73"/>
-          <p:cNvSpPr/>
-          <p:nvPr/>
-        </p:nvSpPr>
-        <p:spPr>
-          <a:xfrm>
-            <a:off x="6903720" y="1335024"/>
-            <a:ext cx="2011680" cy="219456"/>
-          </a:xfrm>
-          <a:prstGeom prst="rect">
-            <a:avLst/>
-          </a:prstGeom>
-          <a:solidFill>
-            <a:srgbClr val="FFFFFF"/>
-          </a:solidFill>
-          <a:ln w="12700">
-            <a:solidFill>
-              <a:srgbClr val="DDDDDD"/>
-            </a:solidFill>
-            <a:prstDash val="solid"/>
-          </a:ln>
-        </p:spPr>
-      </p:sp>
-      <p:sp>
-        <p:nvSpPr>
-          <p:cNvPr id="76" name="Text 74"/>
-          <p:cNvSpPr/>
-          <p:nvPr/>
-        </p:nvSpPr>
-        <p:spPr>
-          <a:xfrm>
-            <a:off x="6958584" y="1335024"/>
-            <a:ext cx="1901952" cy="219456"/>
-          </a:xfrm>
-          <a:prstGeom prst="rect">
-            <a:avLst/>
-          </a:prstGeom>
-          <a:noFill/>
-          <a:ln/>
-        </p:spPr>
-        <p:txBody>
-          <a:bodyPr wrap="square" lIns="0" tIns="0" rIns="0" bIns="0" rtlCol="0" anchor="ctr"/>
-          <a:lstStyle/>
-          <a:p>
-            <a:pPr algn="l" indent="0" marL="0">
-              <a:buNone/>
-            </a:pPr>
-            <a:r>
-              <a:rPr lang="en-US" sz="800" dirty="0">
-                <a:solidFill>
-                  <a:srgbClr val="1A1A1A"/>
-                </a:solidFill>
-                <a:latin typeface="Courier New" pitchFamily="34" charset="0"/>
-                <a:ea typeface="Courier New" pitchFamily="34" charset="-122"/>
-                <a:cs typeface="Courier New" pitchFamily="34" charset="-120"/>
-              </a:rPr>
-              <a:t>- favoId: int</a:t>
-            </a:r>
-            <a:endParaRPr lang="en-US" sz="800" dirty="0"/>
-          </a:p>
-        </p:txBody>
-      </p:sp>
-      <p:sp>
-        <p:nvSpPr>
-          <p:cNvPr id="77" name="Shape 75"/>
-          <p:cNvSpPr/>
-          <p:nvPr/>
-        </p:nvSpPr>
-        <p:spPr>
-          <a:xfrm>
-            <a:off x="6903720" y="1554480"/>
-            <a:ext cx="2011680" cy="219456"/>
-          </a:xfrm>
-          <a:prstGeom prst="rect">
-            <a:avLst/>
-          </a:prstGeom>
-          <a:solidFill>
-            <a:srgbClr val="F0F0F0"/>
-          </a:solidFill>
-          <a:ln w="12700">
-            <a:solidFill>
-              <a:srgbClr val="DDDDDD"/>
-            </a:solidFill>
-            <a:prstDash val="solid"/>
-          </a:ln>
-        </p:spPr>
-      </p:sp>
-      <p:sp>
-        <p:nvSpPr>
-          <p:cNvPr id="78" name="Text 76"/>
-          <p:cNvSpPr/>
-          <p:nvPr/>
-        </p:nvSpPr>
-        <p:spPr>
-          <a:xfrm>
-            <a:off x="6958584" y="1554480"/>
-            <a:ext cx="1901952" cy="219456"/>
-          </a:xfrm>
-          <a:prstGeom prst="rect">
-            <a:avLst/>
-          </a:prstGeom>
-          <a:noFill/>
-          <a:ln/>
-        </p:spPr>
-        <p:txBody>
-          <a:bodyPr wrap="square" lIns="0" tIns="0" rIns="0" bIns="0" rtlCol="0" anchor="ctr"/>
-          <a:lstStyle/>
-          <a:p>
-            <a:pPr algn="l" indent="0" marL="0">
-              <a:buNone/>
-            </a:pPr>
-            <a:r>
-              <a:rPr lang="en-US" sz="800" dirty="0">
-                <a:solidFill>
-                  <a:srgbClr val="1A1A1A"/>
-                </a:solidFill>
-                <a:latin typeface="Courier New" pitchFamily="34" charset="0"/>
-                <a:ea typeface="Courier New" pitchFamily="34" charset="-122"/>
-                <a:cs typeface="Courier New" pitchFamily="34" charset="-120"/>
-              </a:rPr>
-              <a:t>- favoFechaGuardado: Date</a:t>
-            </a:r>
-            <a:endParaRPr lang="en-US" sz="800" dirty="0"/>
-          </a:p>
-        </p:txBody>
-      </p:sp>
-      <p:sp>
-        <p:nvSpPr>
-          <p:cNvPr id="79" name="Shape 77"/>
-          <p:cNvSpPr/>
-          <p:nvPr/>
-        </p:nvSpPr>
-        <p:spPr>
-          <a:xfrm>
-            <a:off x="6903720" y="1773936"/>
-            <a:ext cx="2011680" cy="219456"/>
-          </a:xfrm>
-          <a:prstGeom prst="rect">
-            <a:avLst/>
-          </a:prstGeom>
-          <a:solidFill>
-            <a:srgbClr val="FFFFFF"/>
-          </a:solidFill>
-          <a:ln w="12700">
-            <a:solidFill>
-              <a:srgbClr val="DDDDDD"/>
-            </a:solidFill>
-            <a:prstDash val="solid"/>
-          </a:ln>
-        </p:spPr>
-      </p:sp>
-      <p:sp>
-        <p:nvSpPr>
-          <p:cNvPr id="80" name="Text 78"/>
-          <p:cNvSpPr/>
-          <p:nvPr/>
-        </p:nvSpPr>
-        <p:spPr>
-          <a:xfrm>
-            <a:off x="6958584" y="1773936"/>
-            <a:ext cx="1901952" cy="219456"/>
-          </a:xfrm>
-          <a:prstGeom prst="rect">
-            <a:avLst/>
-          </a:prstGeom>
-          <a:noFill/>
-          <a:ln/>
-        </p:spPr>
-        <p:txBody>
-          <a:bodyPr wrap="square" lIns="0" tIns="0" rIns="0" bIns="0" rtlCol="0" anchor="ctr"/>
-          <a:lstStyle/>
-          <a:p>
-            <a:pPr algn="l" indent="0" marL="0">
-              <a:buNone/>
-            </a:pPr>
-            <a:r>
-              <a:rPr lang="en-US" sz="800" dirty="0">
-                <a:solidFill>
-                  <a:srgbClr val="1A1A1A"/>
-                </a:solidFill>
-                <a:latin typeface="Courier New" pitchFamily="34" charset="0"/>
-                <a:ea typeface="Courier New" pitchFamily="34" charset="-122"/>
-                <a:cs typeface="Courier New" pitchFamily="34" charset="-120"/>
-              </a:rPr>
-              <a:t>- cuentoId: int</a:t>
-            </a:r>
-            <a:endParaRPr lang="en-US" sz="800" dirty="0"/>
-          </a:p>
-        </p:txBody>
-      </p:sp>
-      <p:sp>
-        <p:nvSpPr>
-          <p:cNvPr id="81" name="Shape 79"/>
-          <p:cNvSpPr/>
-          <p:nvPr/>
-        </p:nvSpPr>
-        <p:spPr>
-          <a:xfrm>
-            <a:off x="6903720" y="1993392"/>
-            <a:ext cx="2011680" cy="0"/>
-          </a:xfrm>
-          <a:prstGeom prst="line">
-            <a:avLst/>
-          </a:prstGeom>
-          <a:noFill/>
-          <a:ln w="12700">
-            <a:solidFill>
-              <a:srgbClr val="2E75B6"/>
-            </a:solidFill>
-            <a:prstDash val="solid"/>
-          </a:ln>
-        </p:spPr>
-      </p:sp>
-      <p:sp>
-        <p:nvSpPr>
-          <p:cNvPr id="82" name="Shape 80"/>
-          <p:cNvSpPr/>
-          <p:nvPr/>
-        </p:nvSpPr>
-        <p:spPr>
-          <a:xfrm>
-            <a:off x="6903720" y="1993392"/>
-            <a:ext cx="2011680" cy="219456"/>
-          </a:xfrm>
-          <a:prstGeom prst="rect">
-            <a:avLst/>
-          </a:prstGeom>
-          <a:solidFill>
-            <a:srgbClr val="F7FAFD"/>
-          </a:solidFill>
-          <a:ln w="12700">
-            <a:solidFill>
-              <a:srgbClr val="DDDDDD"/>
-            </a:solidFill>
-            <a:prstDash val="solid"/>
-          </a:ln>
-        </p:spPr>
-      </p:sp>
-      <p:sp>
-        <p:nvSpPr>
-          <p:cNvPr id="83" name="Text 81"/>
-          <p:cNvSpPr/>
-          <p:nvPr/>
-        </p:nvSpPr>
-        <p:spPr>
-          <a:xfrm>
-            <a:off x="6958584" y="1993392"/>
-            <a:ext cx="1901952" cy="219456"/>
-          </a:xfrm>
-          <a:prstGeom prst="rect">
-            <a:avLst/>
-          </a:prstGeom>
-          <a:noFill/>
-          <a:ln/>
-        </p:spPr>
-        <p:txBody>
-          <a:bodyPr wrap="square" lIns="0" tIns="0" rIns="0" bIns="0" rtlCol="0" anchor="ctr"/>
-          <a:lstStyle/>
-          <a:p>
-            <a:pPr algn="l" indent="0" marL="0">
-              <a:buNone/>
-            </a:pPr>
-            <a:r>
-              <a:rPr lang="en-US" sz="800" dirty="0">
-                <a:solidFill>
-                  <a:srgbClr val="224488"/>
-                </a:solidFill>
-                <a:latin typeface="Courier New" pitchFamily="34" charset="0"/>
-                <a:ea typeface="Courier New" pitchFamily="34" charset="-122"/>
-                <a:cs typeface="Courier New" pitchFamily="34" charset="-120"/>
-              </a:rPr>
-              <a:t>+ getFavoId(): int</a:t>
-            </a:r>
-            <a:endParaRPr lang="en-US" sz="800" dirty="0"/>
-          </a:p>
-        </p:txBody>
-      </p:sp>
-      <p:sp>
-        <p:nvSpPr>
-          <p:cNvPr id="84" name="Shape 82"/>
-          <p:cNvSpPr/>
-          <p:nvPr/>
-        </p:nvSpPr>
-        <p:spPr>
-          <a:xfrm>
-            <a:off x="6903720" y="2212848"/>
-            <a:ext cx="2011680" cy="219456"/>
-          </a:xfrm>
-          <a:prstGeom prst="rect">
-            <a:avLst/>
-          </a:prstGeom>
-          <a:solidFill>
-            <a:srgbClr val="FFFFFF"/>
-          </a:solidFill>
-          <a:ln w="12700">
-            <a:solidFill>
-              <a:srgbClr val="DDDDDD"/>
-            </a:solidFill>
-            <a:prstDash val="solid"/>
-          </a:ln>
-        </p:spPr>
-      </p:sp>
-      <p:sp>
-        <p:nvSpPr>
-          <p:cNvPr id="85" name="Text 83"/>
-          <p:cNvSpPr/>
-          <p:nvPr/>
-        </p:nvSpPr>
-        <p:spPr>
-          <a:xfrm>
-            <a:off x="6958584" y="2212848"/>
-            <a:ext cx="1901952" cy="219456"/>
-          </a:xfrm>
-          <a:prstGeom prst="rect">
-            <a:avLst/>
-          </a:prstGeom>
-          <a:noFill/>
-          <a:ln/>
-        </p:spPr>
-        <p:txBody>
-          <a:bodyPr wrap="square" lIns="0" tIns="0" rIns="0" bIns="0" rtlCol="0" anchor="ctr"/>
-          <a:lstStyle/>
-          <a:p>
-            <a:pPr algn="l" indent="0" marL="0">
-              <a:buNone/>
-            </a:pPr>
-            <a:r>
-              <a:rPr lang="en-US" sz="800" dirty="0">
-                <a:solidFill>
-                  <a:srgbClr val="224488"/>
-                </a:solidFill>
-                <a:latin typeface="Courier New" pitchFamily="34" charset="0"/>
-                <a:ea typeface="Courier New" pitchFamily="34" charset="-122"/>
-                <a:cs typeface="Courier New" pitchFamily="34" charset="-120"/>
-              </a:rPr>
-              <a:t>+ getFavoFechaGuardado(): Date</a:t>
-            </a:r>
-            <a:endParaRPr lang="en-US" sz="800" dirty="0"/>
-          </a:p>
-        </p:txBody>
-      </p:sp>
-      <p:sp>
-        <p:nvSpPr>
-          <p:cNvPr id="86" name="Shape 84"/>
-          <p:cNvSpPr/>
-          <p:nvPr/>
-        </p:nvSpPr>
-        <p:spPr>
-          <a:xfrm>
-            <a:off x="6903720" y="2432304"/>
-            <a:ext cx="2011680" cy="219456"/>
-          </a:xfrm>
-          <a:prstGeom prst="rect">
-            <a:avLst/>
-          </a:prstGeom>
-          <a:solidFill>
-            <a:srgbClr val="F7FAFD"/>
-          </a:solidFill>
-          <a:ln w="12700">
-            <a:solidFill>
-              <a:srgbClr val="DDDDDD"/>
-            </a:solidFill>
-            <a:prstDash val="solid"/>
-          </a:ln>
-        </p:spPr>
-      </p:sp>
-      <p:sp>
-        <p:nvSpPr>
-          <p:cNvPr id="87" name="Text 85"/>
-          <p:cNvSpPr/>
-          <p:nvPr/>
-        </p:nvSpPr>
-        <p:spPr>
-          <a:xfrm>
-            <a:off x="6958584" y="2432304"/>
-            <a:ext cx="1901952" cy="219456"/>
-          </a:xfrm>
-          <a:prstGeom prst="rect">
-            <a:avLst/>
-          </a:prstGeom>
-          <a:noFill/>
-          <a:ln/>
-        </p:spPr>
-        <p:txBody>
-          <a:bodyPr wrap="square" lIns="0" tIns="0" rIns="0" bIns="0" rtlCol="0" anchor="ctr"/>
-          <a:lstStyle/>
-          <a:p>
-            <a:pPr algn="l" indent="0" marL="0">
-              <a:buNone/>
-            </a:pPr>
-            <a:r>
-              <a:rPr lang="en-US" sz="800" dirty="0">
-                <a:solidFill>
-                  <a:srgbClr val="224488"/>
-                </a:solidFill>
-                <a:latin typeface="Courier New" pitchFamily="34" charset="0"/>
-                <a:ea typeface="Courier New" pitchFamily="34" charset="-122"/>
-                <a:cs typeface="Courier New" pitchFamily="34" charset="-120"/>
-              </a:rPr>
-              <a:t>+ getCuentoId(): int</a:t>
-            </a:r>
-            <a:endParaRPr lang="en-US" sz="800" dirty="0"/>
-          </a:p>
-        </p:txBody>
-      </p:sp>
-      <p:sp>
-        <p:nvSpPr>
-          <p:cNvPr id="88" name="Shape 86"/>
-          <p:cNvSpPr/>
-          <p:nvPr/>
-        </p:nvSpPr>
-        <p:spPr>
-          <a:xfrm>
-            <a:off x="6903720" y="2651760"/>
-            <a:ext cx="2011680" cy="219456"/>
-          </a:xfrm>
-          <a:prstGeom prst="rect">
-            <a:avLst/>
-          </a:prstGeom>
-          <a:solidFill>
-            <a:srgbClr val="FFFFFF"/>
-          </a:solidFill>
-          <a:ln w="12700">
-            <a:solidFill>
-              <a:srgbClr val="DDDDDD"/>
-            </a:solidFill>
-            <a:prstDash val="solid"/>
-          </a:ln>
-        </p:spPr>
-      </p:sp>
-      <p:sp>
-        <p:nvSpPr>
-          <p:cNvPr id="89" name="Text 87"/>
-          <p:cNvSpPr/>
-          <p:nvPr/>
-        </p:nvSpPr>
-        <p:spPr>
-          <a:xfrm>
-            <a:off x="6958584" y="2651760"/>
-            <a:ext cx="1901952" cy="219456"/>
-          </a:xfrm>
-          <a:prstGeom prst="rect">
-            <a:avLst/>
-          </a:prstGeom>
-          <a:noFill/>
-          <a:ln/>
-        </p:spPr>
-        <p:txBody>
-          <a:bodyPr wrap="square" lIns="0" tIns="0" rIns="0" bIns="0" rtlCol="0" anchor="ctr"/>
-          <a:lstStyle/>
-          <a:p>
-            <a:pPr algn="l" indent="0" marL="0">
-              <a:buNone/>
-            </a:pPr>
-            <a:r>
-              <a:rPr lang="en-US" sz="800" dirty="0">
-                <a:solidFill>
-                  <a:srgbClr val="224488"/>
-                </a:solidFill>
-                <a:latin typeface="Courier New" pitchFamily="34" charset="0"/>
-                <a:ea typeface="Courier New" pitchFamily="34" charset="-122"/>
-                <a:cs typeface="Courier New" pitchFamily="34" charset="-120"/>
-              </a:rPr>
-              <a:t>+ set...()</a:t>
-            </a:r>
-            <a:endParaRPr lang="en-US" sz="800" dirty="0"/>
+            <a:endParaRPr lang="en-US" sz="900" dirty="0"/>
           </a:p>
         </p:txBody>
       </p:sp>
@@ -18893,7 +15011,7 @@
         <p:spPr>
           <a:xfrm>
             <a:off x="365760" y="960120"/>
-            <a:ext cx="4206240" cy="3931920"/>
+            <a:ext cx="4114800" cy="3931920"/>
           </a:xfrm>
           <a:prstGeom prst="rect">
             <a:avLst/>
@@ -18917,8 +15035,8 @@
         </p:nvSpPr>
         <p:spPr>
           <a:xfrm>
-            <a:off x="475488" y="1005840"/>
-            <a:ext cx="3986784" cy="3840480"/>
+            <a:off x="475488" y="1014984"/>
+            <a:ext cx="3895344" cy="3822192"/>
           </a:xfrm>
           <a:prstGeom prst="rect">
             <a:avLst/>
@@ -18959,7 +15077,7 @@
                 <a:ea typeface="Courier New" pitchFamily="34" charset="-122"/>
                 <a:cs typeface="Courier New" pitchFamily="34" charset="-120"/>
               </a:rPr>
-              <a:t>  src/</a:t>
+              <a:t>  src/main/java/com/example/demo/</a:t>
             </a:r>
             <a:endParaRPr lang="en-US" sz="900" dirty="0"/>
           </a:p>
@@ -18976,7 +15094,7 @@
                 <a:ea typeface="Courier New" pitchFamily="34" charset="-122"/>
                 <a:cs typeface="Courier New" pitchFamily="34" charset="-120"/>
               </a:rPr>
-              <a:t>    main/</a:t>
+              <a:t>    DemoApplication.java</a:t>
             </a:r>
             <a:endParaRPr lang="en-US" sz="900" dirty="0"/>
           </a:p>
@@ -18993,7 +15111,7 @@
                 <a:ea typeface="Courier New" pitchFamily="34" charset="-122"/>
                 <a:cs typeface="Courier New" pitchFamily="34" charset="-120"/>
               </a:rPr>
-              <a:t>      java/com/example/demo/</a:t>
+              <a:t>    controller/</a:t>
             </a:r>
             <a:endParaRPr lang="en-US" sz="900" dirty="0"/>
           </a:p>
@@ -19010,7 +15128,7 @@
                 <a:ea typeface="Courier New" pitchFamily="34" charset="-122"/>
                 <a:cs typeface="Courier New" pitchFamily="34" charset="-120"/>
               </a:rPr>
-              <a:t>        DemoApplication.java</a:t>
+              <a:t>      AutorController.java</a:t>
             </a:r>
             <a:endParaRPr lang="en-US" sz="900" dirty="0"/>
           </a:p>
@@ -19027,7 +15145,7 @@
                 <a:ea typeface="Courier New" pitchFamily="34" charset="-122"/>
                 <a:cs typeface="Courier New" pitchFamily="34" charset="-120"/>
               </a:rPr>
-              <a:t>        controller/</a:t>
+              <a:t>      CategoriaController.java</a:t>
             </a:r>
             <a:endParaRPr lang="en-US" sz="900" dirty="0"/>
           </a:p>
@@ -19044,7 +15162,7 @@
                 <a:ea typeface="Courier New" pitchFamily="34" charset="-122"/>
                 <a:cs typeface="Courier New" pitchFamily="34" charset="-120"/>
               </a:rPr>
-              <a:t>          AutorController.java</a:t>
+              <a:t>      CuentoController.java</a:t>
             </a:r>
             <a:endParaRPr lang="en-US" sz="900" dirty="0"/>
           </a:p>
@@ -19061,7 +15179,7 @@
                 <a:ea typeface="Courier New" pitchFamily="34" charset="-122"/>
                 <a:cs typeface="Courier New" pitchFamily="34" charset="-120"/>
               </a:rPr>
-              <a:t>          CategoriaController.java</a:t>
+              <a:t>      FavoritoController.java</a:t>
             </a:r>
             <a:endParaRPr lang="en-US" sz="900" dirty="0"/>
           </a:p>
@@ -19078,7 +15196,7 @@
                 <a:ea typeface="Courier New" pitchFamily="34" charset="-122"/>
                 <a:cs typeface="Courier New" pitchFamily="34" charset="-120"/>
               </a:rPr>
-              <a:t>          CuentoController.java</a:t>
+              <a:t>    models/</a:t>
             </a:r>
             <a:endParaRPr lang="en-US" sz="900" dirty="0"/>
           </a:p>
@@ -19095,7 +15213,7 @@
                 <a:ea typeface="Courier New" pitchFamily="34" charset="-122"/>
                 <a:cs typeface="Courier New" pitchFamily="34" charset="-120"/>
               </a:rPr>
-              <a:t>          FavoritoController.java</a:t>
+              <a:t>      Autor.java</a:t>
             </a:r>
             <a:endParaRPr lang="en-US" sz="900" dirty="0"/>
           </a:p>
@@ -19112,7 +15230,7 @@
                 <a:ea typeface="Courier New" pitchFamily="34" charset="-122"/>
                 <a:cs typeface="Courier New" pitchFamily="34" charset="-120"/>
               </a:rPr>
-              <a:t>        models/</a:t>
+              <a:t>      Categoria.java</a:t>
             </a:r>
             <a:endParaRPr lang="en-US" sz="900" dirty="0"/>
           </a:p>
@@ -19129,7 +15247,7 @@
                 <a:ea typeface="Courier New" pitchFamily="34" charset="-122"/>
                 <a:cs typeface="Courier New" pitchFamily="34" charset="-120"/>
               </a:rPr>
-              <a:t>          Autor.java</a:t>
+              <a:t>      Cuento.java</a:t>
             </a:r>
             <a:endParaRPr lang="en-US" sz="900" dirty="0"/>
           </a:p>
@@ -19146,7 +15264,7 @@
                 <a:ea typeface="Courier New" pitchFamily="34" charset="-122"/>
                 <a:cs typeface="Courier New" pitchFamily="34" charset="-120"/>
               </a:rPr>
-              <a:t>          Categoria.java</a:t>
+              <a:t>      Favorito.java</a:t>
             </a:r>
             <a:endParaRPr lang="en-US" sz="900" dirty="0"/>
           </a:p>
@@ -19163,7 +15281,7 @@
                 <a:ea typeface="Courier New" pitchFamily="34" charset="-122"/>
                 <a:cs typeface="Courier New" pitchFamily="34" charset="-120"/>
               </a:rPr>
-              <a:t>          Cuento.java</a:t>
+              <a:t>  src/main/resources/</a:t>
             </a:r>
             <a:endParaRPr lang="en-US" sz="900" dirty="0"/>
           </a:p>
@@ -19180,41 +15298,7 @@
                 <a:ea typeface="Courier New" pitchFamily="34" charset="-122"/>
                 <a:cs typeface="Courier New" pitchFamily="34" charset="-120"/>
               </a:rPr>
-              <a:t>          Favorito.java</a:t>
-            </a:r>
-            <a:endParaRPr lang="en-US" sz="900" dirty="0"/>
-          </a:p>
-          <a:p>
-            <a:pPr algn="l" indent="0" marL="0">
-              <a:buNone/>
-            </a:pPr>
-            <a:r>
-              <a:rPr lang="en-US" sz="900" dirty="0">
-                <a:solidFill>
-                  <a:srgbClr val="1A1A1A"/>
-                </a:solidFill>
-                <a:latin typeface="Courier New" pitchFamily="34" charset="0"/>
-                <a:ea typeface="Courier New" pitchFamily="34" charset="-122"/>
-                <a:cs typeface="Courier New" pitchFamily="34" charset="-120"/>
-              </a:rPr>
-              <a:t>      resources/</a:t>
-            </a:r>
-            <a:endParaRPr lang="en-US" sz="900" dirty="0"/>
-          </a:p>
-          <a:p>
-            <a:pPr algn="l" indent="0" marL="0">
-              <a:buNone/>
-            </a:pPr>
-            <a:r>
-              <a:rPr lang="en-US" sz="900" dirty="0">
-                <a:solidFill>
-                  <a:srgbClr val="1A1A1A"/>
-                </a:solidFill>
-                <a:latin typeface="Courier New" pitchFamily="34" charset="0"/>
-                <a:ea typeface="Courier New" pitchFamily="34" charset="-122"/>
-                <a:cs typeface="Courier New" pitchFamily="34" charset="-120"/>
-              </a:rPr>
-              <a:t>        application.properties</a:t>
+              <a:t>    application.properties</a:t>
             </a:r>
             <a:endParaRPr lang="en-US" sz="900" dirty="0"/>
           </a:p>
@@ -19253,17 +15337,17 @@
         </p:nvGraphicFramePr>
         <p:xfrm>
           <a:off x="4754880" y="960120"/>
-          <a:ext cx="4023360" cy="2926080"/>
+          <a:ext cx="4023360" cy="2743200"/>
         </p:xfrm>
         <a:graphic>
           <a:graphicData uri="http://schemas.openxmlformats.org/drawingml/2006/table">
             <a:tbl>
               <a:tblPr/>
               <a:tblGrid>
-                <a:gridCol w="1463040"/>
-                <a:gridCol w="2560320"/>
+                <a:gridCol w="1554480"/>
+                <a:gridCol w="2468880"/>
               </a:tblGrid>
-              <a:tr h="487680">
+              <a:tr h="457200">
                 <a:tc>
                   <a:txBody>
                     <a:bodyPr/>
@@ -19349,7 +15433,7 @@
                           <a:ea typeface="Calibri" pitchFamily="34" charset="-122"/>
                           <a:cs typeface="Calibri" pitchFamily="34" charset="-120"/>
                         </a:rPr>
-                        <a:t>Descripcion</a:t>
+                        <a:t>Descripción</a:t>
                       </a:r>
                       <a:endParaRPr lang="en-US" sz="1100" dirty="0">
                         <a:latin typeface="Calibri" charset="0"/>
@@ -19401,7 +15485,7 @@
                   </a:tcPr>
                 </a:tc>
               </a:tr>
-              <a:tr h="487680">
+              <a:tr h="457200">
                 <a:tc>
                   <a:txBody>
                     <a:bodyPr/>
@@ -19487,7 +15571,7 @@
                           <a:ea typeface="Calibri" pitchFamily="34" charset="-122"/>
                           <a:cs typeface="Calibri" pitchFamily="34" charset="-120"/>
                         </a:rPr>
-                        <a:t>Endpoints REST: recibe peticiones HTTP y retorna JSON</a:t>
+                        <a:t>Recibe HTTP, procesa y retorna JSON</a:t>
                       </a:r>
                       <a:endParaRPr lang="en-US" sz="1000" dirty="0">
                         <a:latin typeface="Calibri" charset="0"/>
@@ -19539,7 +15623,7 @@
                   </a:tcPr>
                 </a:tc>
               </a:tr>
-              <a:tr h="487680">
+              <a:tr h="457200">
                 <a:tc>
                   <a:txBody>
                     <a:bodyPr/>
@@ -19625,7 +15709,7 @@
                           <a:ea typeface="Calibri" pitchFamily="34" charset="-122"/>
                           <a:cs typeface="Calibri" pitchFamily="34" charset="-120"/>
                         </a:rPr>
-                        <a:t>POJOs con atributos, getters y setters de cada entidad</a:t>
+                        <a:t>POJOs con atributos + getters/setters</a:t>
                       </a:r>
                       <a:endParaRPr lang="en-US" sz="1000" dirty="0">
                         <a:latin typeface="Calibri" charset="0"/>
@@ -19677,7 +15761,7 @@
                   </a:tcPr>
                 </a:tc>
               </a:tr>
-              <a:tr h="487680">
+              <a:tr h="457200">
                 <a:tc>
                   <a:txBody>
                     <a:bodyPr/>
@@ -19763,7 +15847,7 @@
                           <a:ea typeface="Calibri" pitchFamily="34" charset="-122"/>
                           <a:cs typeface="Calibri" pitchFamily="34" charset="-120"/>
                         </a:rPr>
-                        <a:t>Clase principal con @SpringBootApplication</a:t>
+                        <a:t>@SpringBootApplication — punto de entrada</a:t>
                       </a:r>
                       <a:endParaRPr lang="en-US" sz="1000" dirty="0">
                         <a:latin typeface="Calibri" charset="0"/>
@@ -19815,7 +15899,7 @@
                   </a:tcPr>
                 </a:tc>
               </a:tr>
-              <a:tr h="487680">
+              <a:tr h="457200">
                 <a:tc>
                   <a:txBody>
                     <a:bodyPr/>
@@ -19901,7 +15985,7 @@
                           <a:ea typeface="Calibri" pitchFamily="34" charset="-122"/>
                           <a:cs typeface="Calibri" pitchFamily="34" charset="-120"/>
                         </a:rPr>
-                        <a:t>Dependencias Maven: Spring Web, Spring Boot</a:t>
+                        <a:t>Dependencias Maven: Spring Web</a:t>
                       </a:r>
                       <a:endParaRPr lang="en-US" sz="1000" dirty="0">
                         <a:latin typeface="Calibri" charset="0"/>
@@ -19953,7 +16037,7 @@
                   </a:tcPr>
                 </a:tc>
               </a:tr>
-              <a:tr h="487680">
+              <a:tr h="457200">
                 <a:tc>
                   <a:txBody>
                     <a:bodyPr/>
@@ -19971,7 +16055,7 @@
                           <a:ea typeface="Calibri" pitchFamily="34" charset="-122"/>
                           <a:cs typeface="Calibri" pitchFamily="34" charset="-120"/>
                         </a:rPr>
-                        <a:t>application.properties</a:t>
+                        <a:t>app.properties</a:t>
                       </a:r>
                       <a:endParaRPr lang="en-US" sz="1000" dirty="0">
                         <a:latin typeface="Calibri" charset="0"/>
@@ -20039,7 +16123,7 @@
                           <a:ea typeface="Calibri" pitchFamily="34" charset="-122"/>
                           <a:cs typeface="Calibri" pitchFamily="34" charset="-120"/>
                         </a:rPr>
-                        <a:t>Configuracion del servidor (puerto 8080)</a:t>
+                        <a:t>Configuración del servidor (puerto 8080)</a:t>
                       </a:r>
                       <a:endParaRPr lang="en-US" sz="1000" dirty="0">
                         <a:latin typeface="Calibri" charset="0"/>
@@ -20103,8 +16187,8 @@
         </p:nvSpPr>
         <p:spPr>
           <a:xfrm>
-            <a:off x="365760" y="4526280"/>
-            <a:ext cx="8412480" cy="320040"/>
+            <a:off x="365760" y="4572000"/>
+            <a:ext cx="8412480" cy="274320"/>
           </a:xfrm>
           <a:prstGeom prst="rect">
             <a:avLst/>
@@ -20128,7 +16212,7 @@
                 <a:ea typeface="Calibri" pitchFamily="34" charset="-122"/>
                 <a:cs typeface="Calibri" pitchFamily="34" charset="-120"/>
               </a:rPr>
-              <a:t>Arquitectura: MVC simplificado  |  Almacenamiento: listas en memoria (ArrayList)  |  Puerto: 8080</a:t>
+              <a:t>Almacenamiento: ArrayList en memoria  ·  Sin BD externa en este Sprint  ·  Puerto: 8080</a:t>
             </a:r>
             <a:endParaRPr lang="en-US" sz="900" dirty="0"/>
           </a:p>
@@ -20199,7 +16283,7 @@
                 <a:ea typeface="Calibri" pitchFamily="34" charset="-122"/>
                 <a:cs typeface="Calibri" pitchFamily="34" charset="-120"/>
               </a:rPr>
-              <a:t>Modelo de Tabla: Autor</a:t>
+              <a:t>Modelo de Tabla: Cuento</a:t>
             </a:r>
             <a:endParaRPr lang="en-US" sz="3000" dirty="0"/>
           </a:p>
@@ -20243,21 +16327,21 @@
           </p:nvPr>
         </p:nvGraphicFramePr>
         <p:xfrm>
-          <a:off x="365760" y="1005840"/>
-          <a:ext cx="8412480" cy="1645920"/>
+          <a:off x="365760" y="960120"/>
+          <a:ext cx="8412480" cy="2377440"/>
         </p:xfrm>
         <a:graphic>
           <a:graphicData uri="http://schemas.openxmlformats.org/drawingml/2006/table">
             <a:tbl>
               <a:tblPr/>
               <a:tblGrid>
+                <a:gridCol w="1463040"/>
+                <a:gridCol w="1737360"/>
+                <a:gridCol w="1097280"/>
                 <a:gridCol w="1280160"/>
-                <a:gridCol w="1280160"/>
-                <a:gridCol w="1645920"/>
-                <a:gridCol w="1645920"/>
-                <a:gridCol w="2560320"/>
+                <a:gridCol w="2834640"/>
               </a:tblGrid>
-              <a:tr h="411480">
+              <a:tr h="297180">
                 <a:tc>
                   <a:txBody>
                     <a:bodyPr/>
@@ -20275,75 +16359,7 @@
                           <a:ea typeface="Calibri" pitchFamily="34" charset="-122"/>
                           <a:cs typeface="Calibri" pitchFamily="34" charset="-120"/>
                         </a:rPr>
-                        <a:t>Campo</a:t>
-                      </a:r>
-                      <a:endParaRPr lang="en-US" sz="1100" dirty="0">
-                        <a:latin typeface="Calibri" charset="0"/>
-                        <a:ea typeface="Calibri" charset="0"/>
-                        <a:cs typeface="Calibri" charset="0"/>
-                      </a:endParaRPr>
-                    </a:p>
-                  </a:txBody>
-                  <a:tcPr marL="91440" marR="91440" marT="45720" marB="45720" anchor="ctr">
-                    <a:lnL w="12700" cap="flat" cmpd="sng" algn="ctr">
-                      <a:solidFill>
-                        <a:srgbClr val="DDDDDD"/>
-                      </a:solidFill>
-                      <a:prstDash val="solid"/>
-                      <a:round/>
-                      <a:headEnd type="none" w="med" len="med"/>
-                      <a:tailEnd type="none" w="med" len="med"/>
-                    </a:lnL>
-                    <a:lnR w="12700" cap="flat" cmpd="sng" algn="ctr">
-                      <a:solidFill>
-                        <a:srgbClr val="DDDDDD"/>
-                      </a:solidFill>
-                      <a:prstDash val="solid"/>
-                      <a:round/>
-                      <a:headEnd type="none" w="med" len="med"/>
-                      <a:tailEnd type="none" w="med" len="med"/>
-                    </a:lnR>
-                    <a:lnT w="12700" cap="flat" cmpd="sng" algn="ctr">
-                      <a:solidFill>
-                        <a:srgbClr val="DDDDDD"/>
-                      </a:solidFill>
-                      <a:prstDash val="solid"/>
-                      <a:round/>
-                      <a:headEnd type="none" w="med" len="med"/>
-                      <a:tailEnd type="none" w="med" len="med"/>
-                    </a:lnT>
-                    <a:lnB w="12700" cap="flat" cmpd="sng" algn="ctr">
-                      <a:solidFill>
-                        <a:srgbClr val="DDDDDD"/>
-                      </a:solidFill>
-                      <a:prstDash val="solid"/>
-                      <a:round/>
-                      <a:headEnd type="none" w="med" len="med"/>
-                      <a:tailEnd type="none" w="med" len="med"/>
-                    </a:lnB>
-                    <a:solidFill>
-                      <a:srgbClr val="2E75B6"/>
-                    </a:solidFill>
-                  </a:tcPr>
-                </a:tc>
-                <a:tc>
-                  <a:txBody>
-                    <a:bodyPr/>
-                    <a:lstStyle/>
-                    <a:p>
-                      <a:pPr algn="ctr" indent="0" marL="0">
-                        <a:buNone/>
-                      </a:pPr>
-                      <a:r>
-                        <a:rPr lang="en-US" sz="1100" b="1" dirty="0">
-                          <a:solidFill>
-                            <a:srgbClr val="FFFFFF"/>
-                          </a:solidFill>
-                          <a:latin typeface="Calibri" pitchFamily="34" charset="0"/>
-                          <a:ea typeface="Calibri" pitchFamily="34" charset="-122"/>
-                          <a:cs typeface="Calibri" pitchFamily="34" charset="-120"/>
-                        </a:rPr>
-                        <a:t>Tipo Java</a:t>
+                        <a:t>Campo Java</a:t>
                       </a:r>
                       <a:endParaRPr lang="en-US" sz="1100" dirty="0">
                         <a:latin typeface="Calibri" charset="0"/>
@@ -20479,7 +16495,7 @@
                           <a:ea typeface="Calibri" pitchFamily="34" charset="-122"/>
                           <a:cs typeface="Calibri" pitchFamily="34" charset="-120"/>
                         </a:rPr>
-                        <a:t>Restriccion</a:t>
+                        <a:t>Tipo BD</a:t>
                       </a:r>
                       <a:endParaRPr lang="en-US" sz="1100" dirty="0">
                         <a:latin typeface="Calibri" charset="0"/>
@@ -20547,7 +16563,7 @@
                           <a:ea typeface="Calibri" pitchFamily="34" charset="-122"/>
                           <a:cs typeface="Calibri" pitchFamily="34" charset="-120"/>
                         </a:rPr>
-                        <a:t>Descripcion</a:t>
+                        <a:t>Restricción</a:t>
                       </a:r>
                       <a:endParaRPr lang="en-US" sz="1100" dirty="0">
                         <a:latin typeface="Calibri" charset="0"/>
@@ -20598,8 +16614,76 @@
                     </a:solidFill>
                   </a:tcPr>
                 </a:tc>
+                <a:tc>
+                  <a:txBody>
+                    <a:bodyPr/>
+                    <a:lstStyle/>
+                    <a:p>
+                      <a:pPr algn="ctr" indent="0" marL="0">
+                        <a:buNone/>
+                      </a:pPr>
+                      <a:r>
+                        <a:rPr lang="en-US" sz="1100" b="1" dirty="0">
+                          <a:solidFill>
+                            <a:srgbClr val="FFFFFF"/>
+                          </a:solidFill>
+                          <a:latin typeface="Calibri" pitchFamily="34" charset="0"/>
+                          <a:ea typeface="Calibri" pitchFamily="34" charset="-122"/>
+                          <a:cs typeface="Calibri" pitchFamily="34" charset="-120"/>
+                        </a:rPr>
+                        <a:t>Descripción</a:t>
+                      </a:r>
+                      <a:endParaRPr lang="en-US" sz="1100" dirty="0">
+                        <a:latin typeface="Calibri" charset="0"/>
+                        <a:ea typeface="Calibri" charset="0"/>
+                        <a:cs typeface="Calibri" charset="0"/>
+                      </a:endParaRPr>
+                    </a:p>
+                  </a:txBody>
+                  <a:tcPr marL="91440" marR="91440" marT="45720" marB="45720" anchor="ctr">
+                    <a:lnL w="12700" cap="flat" cmpd="sng" algn="ctr">
+                      <a:solidFill>
+                        <a:srgbClr val="DDDDDD"/>
+                      </a:solidFill>
+                      <a:prstDash val="solid"/>
+                      <a:round/>
+                      <a:headEnd type="none" w="med" len="med"/>
+                      <a:tailEnd type="none" w="med" len="med"/>
+                    </a:lnL>
+                    <a:lnR w="12700" cap="flat" cmpd="sng" algn="ctr">
+                      <a:solidFill>
+                        <a:srgbClr val="DDDDDD"/>
+                      </a:solidFill>
+                      <a:prstDash val="solid"/>
+                      <a:round/>
+                      <a:headEnd type="none" w="med" len="med"/>
+                      <a:tailEnd type="none" w="med" len="med"/>
+                    </a:lnR>
+                    <a:lnT w="12700" cap="flat" cmpd="sng" algn="ctr">
+                      <a:solidFill>
+                        <a:srgbClr val="DDDDDD"/>
+                      </a:solidFill>
+                      <a:prstDash val="solid"/>
+                      <a:round/>
+                      <a:headEnd type="none" w="med" len="med"/>
+                      <a:tailEnd type="none" w="med" len="med"/>
+                    </a:lnT>
+                    <a:lnB w="12700" cap="flat" cmpd="sng" algn="ctr">
+                      <a:solidFill>
+                        <a:srgbClr val="DDDDDD"/>
+                      </a:solidFill>
+                      <a:prstDash val="solid"/>
+                      <a:round/>
+                      <a:headEnd type="none" w="med" len="med"/>
+                      <a:tailEnd type="none" w="med" len="med"/>
+                    </a:lnB>
+                    <a:solidFill>
+                      <a:srgbClr val="2E75B6"/>
+                    </a:solidFill>
+                  </a:tcPr>
+                </a:tc>
               </a:tr>
-              <a:tr h="411480">
+              <a:tr h="297180">
                 <a:tc>
                   <a:txBody>
                     <a:bodyPr/>
@@ -20617,7 +16701,7 @@
                           <a:ea typeface="Calibri" pitchFamily="34" charset="-122"/>
                           <a:cs typeface="Calibri" pitchFamily="34" charset="-120"/>
                         </a:rPr>
-                        <a:t>idAutor</a:t>
+                        <a:t>cuentoId</a:t>
                       </a:r>
                       <a:endParaRPr lang="en-US" sz="1000" dirty="0">
                         <a:latin typeface="Calibri" charset="0"/>
@@ -20685,7 +16769,7 @@
                           <a:ea typeface="Calibri" pitchFamily="34" charset="-122"/>
                           <a:cs typeface="Calibri" pitchFamily="34" charset="-120"/>
                         </a:rPr>
-                        <a:t>int</a:t>
+                        <a:t>CUEN_ID</a:t>
                       </a:r>
                       <a:endParaRPr lang="en-US" sz="1000" dirty="0">
                         <a:latin typeface="Calibri" charset="0"/>
@@ -20753,7 +16837,7 @@
                           <a:ea typeface="Calibri" pitchFamily="34" charset="-122"/>
                           <a:cs typeface="Calibri" pitchFamily="34" charset="-120"/>
                         </a:rPr>
-                        <a:t>AUTOR_ID</a:t>
+                        <a:t>serial</a:t>
                       </a:r>
                       <a:endParaRPr lang="en-US" sz="1000" dirty="0">
                         <a:latin typeface="Calibri" charset="0"/>
@@ -20821,7 +16905,7 @@
                           <a:ea typeface="Calibri" pitchFamily="34" charset="-122"/>
                           <a:cs typeface="Calibri" pitchFamily="34" charset="-120"/>
                         </a:rPr>
-                        <a:t>PK, NOT NULL</a:t>
+                        <a:t>PK</a:t>
                       </a:r>
                       <a:endParaRPr lang="en-US" sz="1000" dirty="0">
                         <a:latin typeface="Calibri" charset="0"/>
@@ -20889,7 +16973,7 @@
                           <a:ea typeface="Calibri" pitchFamily="34" charset="-122"/>
                           <a:cs typeface="Calibri" pitchFamily="34" charset="-120"/>
                         </a:rPr>
-                        <a:t>Identificador unico</a:t>
+                        <a:t>Identificador único</a:t>
                       </a:r>
                       <a:endParaRPr lang="en-US" sz="1000" dirty="0">
                         <a:latin typeface="Calibri" charset="0"/>
@@ -20941,7 +17025,7 @@
                   </a:tcPr>
                 </a:tc>
               </a:tr>
-              <a:tr h="411480">
+              <a:tr h="297180">
                 <a:tc>
                   <a:txBody>
                     <a:bodyPr/>
@@ -20959,7 +17043,7 @@
                           <a:ea typeface="Calibri" pitchFamily="34" charset="-122"/>
                           <a:cs typeface="Calibri" pitchFamily="34" charset="-120"/>
                         </a:rPr>
-                        <a:t>nombre</a:t>
+                        <a:t>cuentoTitulo</a:t>
                       </a:r>
                       <a:endParaRPr lang="en-US" sz="1000" dirty="0">
                         <a:latin typeface="Calibri" charset="0"/>
@@ -21027,7 +17111,7 @@
                           <a:ea typeface="Calibri" pitchFamily="34" charset="-122"/>
                           <a:cs typeface="Calibri" pitchFamily="34" charset="-120"/>
                         </a:rPr>
-                        <a:t>String</a:t>
+                        <a:t>CUEN_TITULO</a:t>
                       </a:r>
                       <a:endParaRPr lang="en-US" sz="1000" dirty="0">
                         <a:latin typeface="Calibri" charset="0"/>
@@ -21095,7 +17179,7 @@
                           <a:ea typeface="Calibri" pitchFamily="34" charset="-122"/>
                           <a:cs typeface="Calibri" pitchFamily="34" charset="-120"/>
                         </a:rPr>
-                        <a:t>AUTOR_NOMBRE</a:t>
+                        <a:t>varchar(200)</a:t>
                       </a:r>
                       <a:endParaRPr lang="en-US" sz="1000" dirty="0">
                         <a:latin typeface="Calibri" charset="0"/>
@@ -21231,7 +17315,7 @@
                           <a:ea typeface="Calibri" pitchFamily="34" charset="-122"/>
                           <a:cs typeface="Calibri" pitchFamily="34" charset="-120"/>
                         </a:rPr>
-                        <a:t>Nombre completo</a:t>
+                        <a:t>Título del cuento</a:t>
                       </a:r>
                       <a:endParaRPr lang="en-US" sz="1000" dirty="0">
                         <a:latin typeface="Calibri" charset="0"/>
@@ -21283,7 +17367,7 @@
                   </a:tcPr>
                 </a:tc>
               </a:tr>
-              <a:tr h="411480">
+              <a:tr h="297180">
                 <a:tc>
                   <a:txBody>
                     <a:bodyPr/>
@@ -21301,7 +17385,7 @@
                           <a:ea typeface="Calibri" pitchFamily="34" charset="-122"/>
                           <a:cs typeface="Calibri" pitchFamily="34" charset="-120"/>
                         </a:rPr>
-                        <a:t>email</a:t>
+                        <a:t>cuentoDescripcion</a:t>
                       </a:r>
                       <a:endParaRPr lang="en-US" sz="1000" dirty="0">
                         <a:latin typeface="Calibri" charset="0"/>
@@ -21369,7 +17453,7 @@
                           <a:ea typeface="Calibri" pitchFamily="34" charset="-122"/>
                           <a:cs typeface="Calibri" pitchFamily="34" charset="-120"/>
                         </a:rPr>
-                        <a:t>String</a:t>
+                        <a:t>CUEN_DESCRIPCION</a:t>
                       </a:r>
                       <a:endParaRPr lang="en-US" sz="1000" dirty="0">
                         <a:latin typeface="Calibri" charset="0"/>
@@ -21437,7 +17521,7 @@
                           <a:ea typeface="Calibri" pitchFamily="34" charset="-122"/>
                           <a:cs typeface="Calibri" pitchFamily="34" charset="-120"/>
                         </a:rPr>
-                        <a:t>AUTOR_EMAIL</a:t>
+                        <a:t>text</a:t>
                       </a:r>
                       <a:endParaRPr lang="en-US" sz="1000" dirty="0">
                         <a:latin typeface="Calibri" charset="0"/>
@@ -21505,7 +17589,7 @@
                           <a:ea typeface="Calibri" pitchFamily="34" charset="-122"/>
                           <a:cs typeface="Calibri" pitchFamily="34" charset="-120"/>
                         </a:rPr>
-                        <a:t>UNIQUE</a:t>
+                        <a:t>—</a:t>
                       </a:r>
                       <a:endParaRPr lang="en-US" sz="1000" dirty="0">
                         <a:latin typeface="Calibri" charset="0"/>
@@ -21573,7 +17657,1375 @@
                           <a:ea typeface="Calibri" pitchFamily="34" charset="-122"/>
                           <a:cs typeface="Calibri" pitchFamily="34" charset="-120"/>
                         </a:rPr>
-                        <a:t>Correo electronico</a:t>
+                        <a:t>Resumen corto</a:t>
+                      </a:r>
+                      <a:endParaRPr lang="en-US" sz="1000" dirty="0">
+                        <a:latin typeface="Calibri" charset="0"/>
+                        <a:ea typeface="Calibri" charset="0"/>
+                        <a:cs typeface="Calibri" charset="0"/>
+                      </a:endParaRPr>
+                    </a:p>
+                  </a:txBody>
+                  <a:tcPr marL="91440" marR="91440" marT="45720" marB="45720" anchor="ctr">
+                    <a:lnL w="12700" cap="flat" cmpd="sng" algn="ctr">
+                      <a:solidFill>
+                        <a:srgbClr val="DDDDDD"/>
+                      </a:solidFill>
+                      <a:prstDash val="solid"/>
+                      <a:round/>
+                      <a:headEnd type="none" w="med" len="med"/>
+                      <a:tailEnd type="none" w="med" len="med"/>
+                    </a:lnL>
+                    <a:lnR w="12700" cap="flat" cmpd="sng" algn="ctr">
+                      <a:solidFill>
+                        <a:srgbClr val="DDDDDD"/>
+                      </a:solidFill>
+                      <a:prstDash val="solid"/>
+                      <a:round/>
+                      <a:headEnd type="none" w="med" len="med"/>
+                      <a:tailEnd type="none" w="med" len="med"/>
+                    </a:lnR>
+                    <a:lnT w="12700" cap="flat" cmpd="sng" algn="ctr">
+                      <a:solidFill>
+                        <a:srgbClr val="DDDDDD"/>
+                      </a:solidFill>
+                      <a:prstDash val="solid"/>
+                      <a:round/>
+                      <a:headEnd type="none" w="med" len="med"/>
+                      <a:tailEnd type="none" w="med" len="med"/>
+                    </a:lnT>
+                    <a:lnB w="12700" cap="flat" cmpd="sng" algn="ctr">
+                      <a:solidFill>
+                        <a:srgbClr val="DDDDDD"/>
+                      </a:solidFill>
+                      <a:prstDash val="solid"/>
+                      <a:round/>
+                      <a:headEnd type="none" w="med" len="med"/>
+                      <a:tailEnd type="none" w="med" len="med"/>
+                    </a:lnB>
+                    <a:solidFill>
+                      <a:srgbClr val="FFFFFF"/>
+                    </a:solidFill>
+                  </a:tcPr>
+                </a:tc>
+              </a:tr>
+              <a:tr h="297180">
+                <a:tc>
+                  <a:txBody>
+                    <a:bodyPr/>
+                    <a:lstStyle/>
+                    <a:p>
+                      <a:pPr algn="l" indent="0" marL="0">
+                        <a:buNone/>
+                      </a:pPr>
+                      <a:r>
+                        <a:rPr lang="en-US" sz="1000" dirty="0">
+                          <a:solidFill>
+                            <a:srgbClr val="1A1A1A"/>
+                          </a:solidFill>
+                          <a:latin typeface="Calibri" pitchFamily="34" charset="0"/>
+                          <a:ea typeface="Calibri" pitchFamily="34" charset="-122"/>
+                          <a:cs typeface="Calibri" pitchFamily="34" charset="-120"/>
+                        </a:rPr>
+                        <a:t>cuentoContenido</a:t>
+                      </a:r>
+                      <a:endParaRPr lang="en-US" sz="1000" dirty="0">
+                        <a:latin typeface="Calibri" charset="0"/>
+                        <a:ea typeface="Calibri" charset="0"/>
+                        <a:cs typeface="Calibri" charset="0"/>
+                      </a:endParaRPr>
+                    </a:p>
+                  </a:txBody>
+                  <a:tcPr marL="91440" marR="91440" marT="45720" marB="45720" anchor="ctr">
+                    <a:lnL w="12700" cap="flat" cmpd="sng" algn="ctr">
+                      <a:solidFill>
+                        <a:srgbClr val="DDDDDD"/>
+                      </a:solidFill>
+                      <a:prstDash val="solid"/>
+                      <a:round/>
+                      <a:headEnd type="none" w="med" len="med"/>
+                      <a:tailEnd type="none" w="med" len="med"/>
+                    </a:lnL>
+                    <a:lnR w="12700" cap="flat" cmpd="sng" algn="ctr">
+                      <a:solidFill>
+                        <a:srgbClr val="DDDDDD"/>
+                      </a:solidFill>
+                      <a:prstDash val="solid"/>
+                      <a:round/>
+                      <a:headEnd type="none" w="med" len="med"/>
+                      <a:tailEnd type="none" w="med" len="med"/>
+                    </a:lnR>
+                    <a:lnT w="12700" cap="flat" cmpd="sng" algn="ctr">
+                      <a:solidFill>
+                        <a:srgbClr val="DDDDDD"/>
+                      </a:solidFill>
+                      <a:prstDash val="solid"/>
+                      <a:round/>
+                      <a:headEnd type="none" w="med" len="med"/>
+                      <a:tailEnd type="none" w="med" len="med"/>
+                    </a:lnT>
+                    <a:lnB w="12700" cap="flat" cmpd="sng" algn="ctr">
+                      <a:solidFill>
+                        <a:srgbClr val="DDDDDD"/>
+                      </a:solidFill>
+                      <a:prstDash val="solid"/>
+                      <a:round/>
+                      <a:headEnd type="none" w="med" len="med"/>
+                      <a:tailEnd type="none" w="med" len="med"/>
+                    </a:lnB>
+                    <a:solidFill>
+                      <a:srgbClr val="F0F0F0"/>
+                    </a:solidFill>
+                  </a:tcPr>
+                </a:tc>
+                <a:tc>
+                  <a:txBody>
+                    <a:bodyPr/>
+                    <a:lstStyle/>
+                    <a:p>
+                      <a:pPr algn="l" indent="0" marL="0">
+                        <a:buNone/>
+                      </a:pPr>
+                      <a:r>
+                        <a:rPr lang="en-US" sz="1000" dirty="0">
+                          <a:solidFill>
+                            <a:srgbClr val="1A1A1A"/>
+                          </a:solidFill>
+                          <a:latin typeface="Calibri" pitchFamily="34" charset="0"/>
+                          <a:ea typeface="Calibri" pitchFamily="34" charset="-122"/>
+                          <a:cs typeface="Calibri" pitchFamily="34" charset="-120"/>
+                        </a:rPr>
+                        <a:t>CUEN_CONTENIDO</a:t>
+                      </a:r>
+                      <a:endParaRPr lang="en-US" sz="1000" dirty="0">
+                        <a:latin typeface="Calibri" charset="0"/>
+                        <a:ea typeface="Calibri" charset="0"/>
+                        <a:cs typeface="Calibri" charset="0"/>
+                      </a:endParaRPr>
+                    </a:p>
+                  </a:txBody>
+                  <a:tcPr marL="91440" marR="91440" marT="45720" marB="45720" anchor="ctr">
+                    <a:lnL w="12700" cap="flat" cmpd="sng" algn="ctr">
+                      <a:solidFill>
+                        <a:srgbClr val="DDDDDD"/>
+                      </a:solidFill>
+                      <a:prstDash val="solid"/>
+                      <a:round/>
+                      <a:headEnd type="none" w="med" len="med"/>
+                      <a:tailEnd type="none" w="med" len="med"/>
+                    </a:lnL>
+                    <a:lnR w="12700" cap="flat" cmpd="sng" algn="ctr">
+                      <a:solidFill>
+                        <a:srgbClr val="DDDDDD"/>
+                      </a:solidFill>
+                      <a:prstDash val="solid"/>
+                      <a:round/>
+                      <a:headEnd type="none" w="med" len="med"/>
+                      <a:tailEnd type="none" w="med" len="med"/>
+                    </a:lnR>
+                    <a:lnT w="12700" cap="flat" cmpd="sng" algn="ctr">
+                      <a:solidFill>
+                        <a:srgbClr val="DDDDDD"/>
+                      </a:solidFill>
+                      <a:prstDash val="solid"/>
+                      <a:round/>
+                      <a:headEnd type="none" w="med" len="med"/>
+                      <a:tailEnd type="none" w="med" len="med"/>
+                    </a:lnT>
+                    <a:lnB w="12700" cap="flat" cmpd="sng" algn="ctr">
+                      <a:solidFill>
+                        <a:srgbClr val="DDDDDD"/>
+                      </a:solidFill>
+                      <a:prstDash val="solid"/>
+                      <a:round/>
+                      <a:headEnd type="none" w="med" len="med"/>
+                      <a:tailEnd type="none" w="med" len="med"/>
+                    </a:lnB>
+                    <a:solidFill>
+                      <a:srgbClr val="F0F0F0"/>
+                    </a:solidFill>
+                  </a:tcPr>
+                </a:tc>
+                <a:tc>
+                  <a:txBody>
+                    <a:bodyPr/>
+                    <a:lstStyle/>
+                    <a:p>
+                      <a:pPr algn="l" indent="0" marL="0">
+                        <a:buNone/>
+                      </a:pPr>
+                      <a:r>
+                        <a:rPr lang="en-US" sz="1000" dirty="0">
+                          <a:solidFill>
+                            <a:srgbClr val="1A1A1A"/>
+                          </a:solidFill>
+                          <a:latin typeface="Calibri" pitchFamily="34" charset="0"/>
+                          <a:ea typeface="Calibri" pitchFamily="34" charset="-122"/>
+                          <a:cs typeface="Calibri" pitchFamily="34" charset="-120"/>
+                        </a:rPr>
+                        <a:t>text</a:t>
+                      </a:r>
+                      <a:endParaRPr lang="en-US" sz="1000" dirty="0">
+                        <a:latin typeface="Calibri" charset="0"/>
+                        <a:ea typeface="Calibri" charset="0"/>
+                        <a:cs typeface="Calibri" charset="0"/>
+                      </a:endParaRPr>
+                    </a:p>
+                  </a:txBody>
+                  <a:tcPr marL="91440" marR="91440" marT="45720" marB="45720" anchor="ctr">
+                    <a:lnL w="12700" cap="flat" cmpd="sng" algn="ctr">
+                      <a:solidFill>
+                        <a:srgbClr val="DDDDDD"/>
+                      </a:solidFill>
+                      <a:prstDash val="solid"/>
+                      <a:round/>
+                      <a:headEnd type="none" w="med" len="med"/>
+                      <a:tailEnd type="none" w="med" len="med"/>
+                    </a:lnL>
+                    <a:lnR w="12700" cap="flat" cmpd="sng" algn="ctr">
+                      <a:solidFill>
+                        <a:srgbClr val="DDDDDD"/>
+                      </a:solidFill>
+                      <a:prstDash val="solid"/>
+                      <a:round/>
+                      <a:headEnd type="none" w="med" len="med"/>
+                      <a:tailEnd type="none" w="med" len="med"/>
+                    </a:lnR>
+                    <a:lnT w="12700" cap="flat" cmpd="sng" algn="ctr">
+                      <a:solidFill>
+                        <a:srgbClr val="DDDDDD"/>
+                      </a:solidFill>
+                      <a:prstDash val="solid"/>
+                      <a:round/>
+                      <a:headEnd type="none" w="med" len="med"/>
+                      <a:tailEnd type="none" w="med" len="med"/>
+                    </a:lnT>
+                    <a:lnB w="12700" cap="flat" cmpd="sng" algn="ctr">
+                      <a:solidFill>
+                        <a:srgbClr val="DDDDDD"/>
+                      </a:solidFill>
+                      <a:prstDash val="solid"/>
+                      <a:round/>
+                      <a:headEnd type="none" w="med" len="med"/>
+                      <a:tailEnd type="none" w="med" len="med"/>
+                    </a:lnB>
+                    <a:solidFill>
+                      <a:srgbClr val="F0F0F0"/>
+                    </a:solidFill>
+                  </a:tcPr>
+                </a:tc>
+                <a:tc>
+                  <a:txBody>
+                    <a:bodyPr/>
+                    <a:lstStyle/>
+                    <a:p>
+                      <a:pPr algn="l" indent="0" marL="0">
+                        <a:buNone/>
+                      </a:pPr>
+                      <a:r>
+                        <a:rPr lang="en-US" sz="1000" dirty="0">
+                          <a:solidFill>
+                            <a:srgbClr val="1A1A1A"/>
+                          </a:solidFill>
+                          <a:latin typeface="Calibri" pitchFamily="34" charset="0"/>
+                          <a:ea typeface="Calibri" pitchFamily="34" charset="-122"/>
+                          <a:cs typeface="Calibri" pitchFamily="34" charset="-120"/>
+                        </a:rPr>
+                        <a:t>—</a:t>
+                      </a:r>
+                      <a:endParaRPr lang="en-US" sz="1000" dirty="0">
+                        <a:latin typeface="Calibri" charset="0"/>
+                        <a:ea typeface="Calibri" charset="0"/>
+                        <a:cs typeface="Calibri" charset="0"/>
+                      </a:endParaRPr>
+                    </a:p>
+                  </a:txBody>
+                  <a:tcPr marL="91440" marR="91440" marT="45720" marB="45720" anchor="ctr">
+                    <a:lnL w="12700" cap="flat" cmpd="sng" algn="ctr">
+                      <a:solidFill>
+                        <a:srgbClr val="DDDDDD"/>
+                      </a:solidFill>
+                      <a:prstDash val="solid"/>
+                      <a:round/>
+                      <a:headEnd type="none" w="med" len="med"/>
+                      <a:tailEnd type="none" w="med" len="med"/>
+                    </a:lnL>
+                    <a:lnR w="12700" cap="flat" cmpd="sng" algn="ctr">
+                      <a:solidFill>
+                        <a:srgbClr val="DDDDDD"/>
+                      </a:solidFill>
+                      <a:prstDash val="solid"/>
+                      <a:round/>
+                      <a:headEnd type="none" w="med" len="med"/>
+                      <a:tailEnd type="none" w="med" len="med"/>
+                    </a:lnR>
+                    <a:lnT w="12700" cap="flat" cmpd="sng" algn="ctr">
+                      <a:solidFill>
+                        <a:srgbClr val="DDDDDD"/>
+                      </a:solidFill>
+                      <a:prstDash val="solid"/>
+                      <a:round/>
+                      <a:headEnd type="none" w="med" len="med"/>
+                      <a:tailEnd type="none" w="med" len="med"/>
+                    </a:lnT>
+                    <a:lnB w="12700" cap="flat" cmpd="sng" algn="ctr">
+                      <a:solidFill>
+                        <a:srgbClr val="DDDDDD"/>
+                      </a:solidFill>
+                      <a:prstDash val="solid"/>
+                      <a:round/>
+                      <a:headEnd type="none" w="med" len="med"/>
+                      <a:tailEnd type="none" w="med" len="med"/>
+                    </a:lnB>
+                    <a:solidFill>
+                      <a:srgbClr val="F0F0F0"/>
+                    </a:solidFill>
+                  </a:tcPr>
+                </a:tc>
+                <a:tc>
+                  <a:txBody>
+                    <a:bodyPr/>
+                    <a:lstStyle/>
+                    <a:p>
+                      <a:pPr algn="l" indent="0" marL="0">
+                        <a:buNone/>
+                      </a:pPr>
+                      <a:r>
+                        <a:rPr lang="en-US" sz="1000" dirty="0">
+                          <a:solidFill>
+                            <a:srgbClr val="1A1A1A"/>
+                          </a:solidFill>
+                          <a:latin typeface="Calibri" pitchFamily="34" charset="0"/>
+                          <a:ea typeface="Calibri" pitchFamily="34" charset="-122"/>
+                          <a:cs typeface="Calibri" pitchFamily="34" charset="-120"/>
+                        </a:rPr>
+                        <a:t>Texto completo</a:t>
+                      </a:r>
+                      <a:endParaRPr lang="en-US" sz="1000" dirty="0">
+                        <a:latin typeface="Calibri" charset="0"/>
+                        <a:ea typeface="Calibri" charset="0"/>
+                        <a:cs typeface="Calibri" charset="0"/>
+                      </a:endParaRPr>
+                    </a:p>
+                  </a:txBody>
+                  <a:tcPr marL="91440" marR="91440" marT="45720" marB="45720" anchor="ctr">
+                    <a:lnL w="12700" cap="flat" cmpd="sng" algn="ctr">
+                      <a:solidFill>
+                        <a:srgbClr val="DDDDDD"/>
+                      </a:solidFill>
+                      <a:prstDash val="solid"/>
+                      <a:round/>
+                      <a:headEnd type="none" w="med" len="med"/>
+                      <a:tailEnd type="none" w="med" len="med"/>
+                    </a:lnL>
+                    <a:lnR w="12700" cap="flat" cmpd="sng" algn="ctr">
+                      <a:solidFill>
+                        <a:srgbClr val="DDDDDD"/>
+                      </a:solidFill>
+                      <a:prstDash val="solid"/>
+                      <a:round/>
+                      <a:headEnd type="none" w="med" len="med"/>
+                      <a:tailEnd type="none" w="med" len="med"/>
+                    </a:lnR>
+                    <a:lnT w="12700" cap="flat" cmpd="sng" algn="ctr">
+                      <a:solidFill>
+                        <a:srgbClr val="DDDDDD"/>
+                      </a:solidFill>
+                      <a:prstDash val="solid"/>
+                      <a:round/>
+                      <a:headEnd type="none" w="med" len="med"/>
+                      <a:tailEnd type="none" w="med" len="med"/>
+                    </a:lnT>
+                    <a:lnB w="12700" cap="flat" cmpd="sng" algn="ctr">
+                      <a:solidFill>
+                        <a:srgbClr val="DDDDDD"/>
+                      </a:solidFill>
+                      <a:prstDash val="solid"/>
+                      <a:round/>
+                      <a:headEnd type="none" w="med" len="med"/>
+                      <a:tailEnd type="none" w="med" len="med"/>
+                    </a:lnB>
+                    <a:solidFill>
+                      <a:srgbClr val="F0F0F0"/>
+                    </a:solidFill>
+                  </a:tcPr>
+                </a:tc>
+              </a:tr>
+              <a:tr h="297180">
+                <a:tc>
+                  <a:txBody>
+                    <a:bodyPr/>
+                    <a:lstStyle/>
+                    <a:p>
+                      <a:pPr algn="l" indent="0" marL="0">
+                        <a:buNone/>
+                      </a:pPr>
+                      <a:r>
+                        <a:rPr lang="en-US" sz="1000" dirty="0">
+                          <a:solidFill>
+                            <a:srgbClr val="1A1A1A"/>
+                          </a:solidFill>
+                          <a:latin typeface="Calibri" pitchFamily="34" charset="0"/>
+                          <a:ea typeface="Calibri" pitchFamily="34" charset="-122"/>
+                          <a:cs typeface="Calibri" pitchFamily="34" charset="-120"/>
+                        </a:rPr>
+                        <a:t>cuentoFechaPublicacion</a:t>
+                      </a:r>
+                      <a:endParaRPr lang="en-US" sz="1000" dirty="0">
+                        <a:latin typeface="Calibri" charset="0"/>
+                        <a:ea typeface="Calibri" charset="0"/>
+                        <a:cs typeface="Calibri" charset="0"/>
+                      </a:endParaRPr>
+                    </a:p>
+                  </a:txBody>
+                  <a:tcPr marL="91440" marR="91440" marT="45720" marB="45720" anchor="ctr">
+                    <a:lnL w="12700" cap="flat" cmpd="sng" algn="ctr">
+                      <a:solidFill>
+                        <a:srgbClr val="DDDDDD"/>
+                      </a:solidFill>
+                      <a:prstDash val="solid"/>
+                      <a:round/>
+                      <a:headEnd type="none" w="med" len="med"/>
+                      <a:tailEnd type="none" w="med" len="med"/>
+                    </a:lnL>
+                    <a:lnR w="12700" cap="flat" cmpd="sng" algn="ctr">
+                      <a:solidFill>
+                        <a:srgbClr val="DDDDDD"/>
+                      </a:solidFill>
+                      <a:prstDash val="solid"/>
+                      <a:round/>
+                      <a:headEnd type="none" w="med" len="med"/>
+                      <a:tailEnd type="none" w="med" len="med"/>
+                    </a:lnR>
+                    <a:lnT w="12700" cap="flat" cmpd="sng" algn="ctr">
+                      <a:solidFill>
+                        <a:srgbClr val="DDDDDD"/>
+                      </a:solidFill>
+                      <a:prstDash val="solid"/>
+                      <a:round/>
+                      <a:headEnd type="none" w="med" len="med"/>
+                      <a:tailEnd type="none" w="med" len="med"/>
+                    </a:lnT>
+                    <a:lnB w="12700" cap="flat" cmpd="sng" algn="ctr">
+                      <a:solidFill>
+                        <a:srgbClr val="DDDDDD"/>
+                      </a:solidFill>
+                      <a:prstDash val="solid"/>
+                      <a:round/>
+                      <a:headEnd type="none" w="med" len="med"/>
+                      <a:tailEnd type="none" w="med" len="med"/>
+                    </a:lnB>
+                    <a:solidFill>
+                      <a:srgbClr val="FFFFFF"/>
+                    </a:solidFill>
+                  </a:tcPr>
+                </a:tc>
+                <a:tc>
+                  <a:txBody>
+                    <a:bodyPr/>
+                    <a:lstStyle/>
+                    <a:p>
+                      <a:pPr algn="l" indent="0" marL="0">
+                        <a:buNone/>
+                      </a:pPr>
+                      <a:r>
+                        <a:rPr lang="en-US" sz="1000" dirty="0">
+                          <a:solidFill>
+                            <a:srgbClr val="1A1A1A"/>
+                          </a:solidFill>
+                          <a:latin typeface="Calibri" pitchFamily="34" charset="0"/>
+                          <a:ea typeface="Calibri" pitchFamily="34" charset="-122"/>
+                          <a:cs typeface="Calibri" pitchFamily="34" charset="-120"/>
+                        </a:rPr>
+                        <a:t>CUENT_FECHA_PUBLICACION</a:t>
+                      </a:r>
+                      <a:endParaRPr lang="en-US" sz="1000" dirty="0">
+                        <a:latin typeface="Calibri" charset="0"/>
+                        <a:ea typeface="Calibri" charset="0"/>
+                        <a:cs typeface="Calibri" charset="0"/>
+                      </a:endParaRPr>
+                    </a:p>
+                  </a:txBody>
+                  <a:tcPr marL="91440" marR="91440" marT="45720" marB="45720" anchor="ctr">
+                    <a:lnL w="12700" cap="flat" cmpd="sng" algn="ctr">
+                      <a:solidFill>
+                        <a:srgbClr val="DDDDDD"/>
+                      </a:solidFill>
+                      <a:prstDash val="solid"/>
+                      <a:round/>
+                      <a:headEnd type="none" w="med" len="med"/>
+                      <a:tailEnd type="none" w="med" len="med"/>
+                    </a:lnL>
+                    <a:lnR w="12700" cap="flat" cmpd="sng" algn="ctr">
+                      <a:solidFill>
+                        <a:srgbClr val="DDDDDD"/>
+                      </a:solidFill>
+                      <a:prstDash val="solid"/>
+                      <a:round/>
+                      <a:headEnd type="none" w="med" len="med"/>
+                      <a:tailEnd type="none" w="med" len="med"/>
+                    </a:lnR>
+                    <a:lnT w="12700" cap="flat" cmpd="sng" algn="ctr">
+                      <a:solidFill>
+                        <a:srgbClr val="DDDDDD"/>
+                      </a:solidFill>
+                      <a:prstDash val="solid"/>
+                      <a:round/>
+                      <a:headEnd type="none" w="med" len="med"/>
+                      <a:tailEnd type="none" w="med" len="med"/>
+                    </a:lnT>
+                    <a:lnB w="12700" cap="flat" cmpd="sng" algn="ctr">
+                      <a:solidFill>
+                        <a:srgbClr val="DDDDDD"/>
+                      </a:solidFill>
+                      <a:prstDash val="solid"/>
+                      <a:round/>
+                      <a:headEnd type="none" w="med" len="med"/>
+                      <a:tailEnd type="none" w="med" len="med"/>
+                    </a:lnB>
+                    <a:solidFill>
+                      <a:srgbClr val="FFFFFF"/>
+                    </a:solidFill>
+                  </a:tcPr>
+                </a:tc>
+                <a:tc>
+                  <a:txBody>
+                    <a:bodyPr/>
+                    <a:lstStyle/>
+                    <a:p>
+                      <a:pPr algn="l" indent="0" marL="0">
+                        <a:buNone/>
+                      </a:pPr>
+                      <a:r>
+                        <a:rPr lang="en-US" sz="1000" dirty="0">
+                          <a:solidFill>
+                            <a:srgbClr val="1A1A1A"/>
+                          </a:solidFill>
+                          <a:latin typeface="Calibri" pitchFamily="34" charset="0"/>
+                          <a:ea typeface="Calibri" pitchFamily="34" charset="-122"/>
+                          <a:cs typeface="Calibri" pitchFamily="34" charset="-120"/>
+                        </a:rPr>
+                        <a:t>date</a:t>
+                      </a:r>
+                      <a:endParaRPr lang="en-US" sz="1000" dirty="0">
+                        <a:latin typeface="Calibri" charset="0"/>
+                        <a:ea typeface="Calibri" charset="0"/>
+                        <a:cs typeface="Calibri" charset="0"/>
+                      </a:endParaRPr>
+                    </a:p>
+                  </a:txBody>
+                  <a:tcPr marL="91440" marR="91440" marT="45720" marB="45720" anchor="ctr">
+                    <a:lnL w="12700" cap="flat" cmpd="sng" algn="ctr">
+                      <a:solidFill>
+                        <a:srgbClr val="DDDDDD"/>
+                      </a:solidFill>
+                      <a:prstDash val="solid"/>
+                      <a:round/>
+                      <a:headEnd type="none" w="med" len="med"/>
+                      <a:tailEnd type="none" w="med" len="med"/>
+                    </a:lnL>
+                    <a:lnR w="12700" cap="flat" cmpd="sng" algn="ctr">
+                      <a:solidFill>
+                        <a:srgbClr val="DDDDDD"/>
+                      </a:solidFill>
+                      <a:prstDash val="solid"/>
+                      <a:round/>
+                      <a:headEnd type="none" w="med" len="med"/>
+                      <a:tailEnd type="none" w="med" len="med"/>
+                    </a:lnR>
+                    <a:lnT w="12700" cap="flat" cmpd="sng" algn="ctr">
+                      <a:solidFill>
+                        <a:srgbClr val="DDDDDD"/>
+                      </a:solidFill>
+                      <a:prstDash val="solid"/>
+                      <a:round/>
+                      <a:headEnd type="none" w="med" len="med"/>
+                      <a:tailEnd type="none" w="med" len="med"/>
+                    </a:lnT>
+                    <a:lnB w="12700" cap="flat" cmpd="sng" algn="ctr">
+                      <a:solidFill>
+                        <a:srgbClr val="DDDDDD"/>
+                      </a:solidFill>
+                      <a:prstDash val="solid"/>
+                      <a:round/>
+                      <a:headEnd type="none" w="med" len="med"/>
+                      <a:tailEnd type="none" w="med" len="med"/>
+                    </a:lnB>
+                    <a:solidFill>
+                      <a:srgbClr val="FFFFFF"/>
+                    </a:solidFill>
+                  </a:tcPr>
+                </a:tc>
+                <a:tc>
+                  <a:txBody>
+                    <a:bodyPr/>
+                    <a:lstStyle/>
+                    <a:p>
+                      <a:pPr algn="l" indent="0" marL="0">
+                        <a:buNone/>
+                      </a:pPr>
+                      <a:r>
+                        <a:rPr lang="en-US" sz="1000" dirty="0">
+                          <a:solidFill>
+                            <a:srgbClr val="1A1A1A"/>
+                          </a:solidFill>
+                          <a:latin typeface="Calibri" pitchFamily="34" charset="0"/>
+                          <a:ea typeface="Calibri" pitchFamily="34" charset="-122"/>
+                          <a:cs typeface="Calibri" pitchFamily="34" charset="-120"/>
+                        </a:rPr>
+                        <a:t>—</a:t>
+                      </a:r>
+                      <a:endParaRPr lang="en-US" sz="1000" dirty="0">
+                        <a:latin typeface="Calibri" charset="0"/>
+                        <a:ea typeface="Calibri" charset="0"/>
+                        <a:cs typeface="Calibri" charset="0"/>
+                      </a:endParaRPr>
+                    </a:p>
+                  </a:txBody>
+                  <a:tcPr marL="91440" marR="91440" marT="45720" marB="45720" anchor="ctr">
+                    <a:lnL w="12700" cap="flat" cmpd="sng" algn="ctr">
+                      <a:solidFill>
+                        <a:srgbClr val="DDDDDD"/>
+                      </a:solidFill>
+                      <a:prstDash val="solid"/>
+                      <a:round/>
+                      <a:headEnd type="none" w="med" len="med"/>
+                      <a:tailEnd type="none" w="med" len="med"/>
+                    </a:lnL>
+                    <a:lnR w="12700" cap="flat" cmpd="sng" algn="ctr">
+                      <a:solidFill>
+                        <a:srgbClr val="DDDDDD"/>
+                      </a:solidFill>
+                      <a:prstDash val="solid"/>
+                      <a:round/>
+                      <a:headEnd type="none" w="med" len="med"/>
+                      <a:tailEnd type="none" w="med" len="med"/>
+                    </a:lnR>
+                    <a:lnT w="12700" cap="flat" cmpd="sng" algn="ctr">
+                      <a:solidFill>
+                        <a:srgbClr val="DDDDDD"/>
+                      </a:solidFill>
+                      <a:prstDash val="solid"/>
+                      <a:round/>
+                      <a:headEnd type="none" w="med" len="med"/>
+                      <a:tailEnd type="none" w="med" len="med"/>
+                    </a:lnT>
+                    <a:lnB w="12700" cap="flat" cmpd="sng" algn="ctr">
+                      <a:solidFill>
+                        <a:srgbClr val="DDDDDD"/>
+                      </a:solidFill>
+                      <a:prstDash val="solid"/>
+                      <a:round/>
+                      <a:headEnd type="none" w="med" len="med"/>
+                      <a:tailEnd type="none" w="med" len="med"/>
+                    </a:lnB>
+                    <a:solidFill>
+                      <a:srgbClr val="FFFFFF"/>
+                    </a:solidFill>
+                  </a:tcPr>
+                </a:tc>
+                <a:tc>
+                  <a:txBody>
+                    <a:bodyPr/>
+                    <a:lstStyle/>
+                    <a:p>
+                      <a:pPr algn="l" indent="0" marL="0">
+                        <a:buNone/>
+                      </a:pPr>
+                      <a:r>
+                        <a:rPr lang="en-US" sz="1000" dirty="0">
+                          <a:solidFill>
+                            <a:srgbClr val="1A1A1A"/>
+                          </a:solidFill>
+                          <a:latin typeface="Calibri" pitchFamily="34" charset="0"/>
+                          <a:ea typeface="Calibri" pitchFamily="34" charset="-122"/>
+                          <a:cs typeface="Calibri" pitchFamily="34" charset="-120"/>
+                        </a:rPr>
+                        <a:t>Fecha de publicación</a:t>
+                      </a:r>
+                      <a:endParaRPr lang="en-US" sz="1000" dirty="0">
+                        <a:latin typeface="Calibri" charset="0"/>
+                        <a:ea typeface="Calibri" charset="0"/>
+                        <a:cs typeface="Calibri" charset="0"/>
+                      </a:endParaRPr>
+                    </a:p>
+                  </a:txBody>
+                  <a:tcPr marL="91440" marR="91440" marT="45720" marB="45720" anchor="ctr">
+                    <a:lnL w="12700" cap="flat" cmpd="sng" algn="ctr">
+                      <a:solidFill>
+                        <a:srgbClr val="DDDDDD"/>
+                      </a:solidFill>
+                      <a:prstDash val="solid"/>
+                      <a:round/>
+                      <a:headEnd type="none" w="med" len="med"/>
+                      <a:tailEnd type="none" w="med" len="med"/>
+                    </a:lnL>
+                    <a:lnR w="12700" cap="flat" cmpd="sng" algn="ctr">
+                      <a:solidFill>
+                        <a:srgbClr val="DDDDDD"/>
+                      </a:solidFill>
+                      <a:prstDash val="solid"/>
+                      <a:round/>
+                      <a:headEnd type="none" w="med" len="med"/>
+                      <a:tailEnd type="none" w="med" len="med"/>
+                    </a:lnR>
+                    <a:lnT w="12700" cap="flat" cmpd="sng" algn="ctr">
+                      <a:solidFill>
+                        <a:srgbClr val="DDDDDD"/>
+                      </a:solidFill>
+                      <a:prstDash val="solid"/>
+                      <a:round/>
+                      <a:headEnd type="none" w="med" len="med"/>
+                      <a:tailEnd type="none" w="med" len="med"/>
+                    </a:lnT>
+                    <a:lnB w="12700" cap="flat" cmpd="sng" algn="ctr">
+                      <a:solidFill>
+                        <a:srgbClr val="DDDDDD"/>
+                      </a:solidFill>
+                      <a:prstDash val="solid"/>
+                      <a:round/>
+                      <a:headEnd type="none" w="med" len="med"/>
+                      <a:tailEnd type="none" w="med" len="med"/>
+                    </a:lnB>
+                    <a:solidFill>
+                      <a:srgbClr val="FFFFFF"/>
+                    </a:solidFill>
+                  </a:tcPr>
+                </a:tc>
+              </a:tr>
+              <a:tr h="297180">
+                <a:tc>
+                  <a:txBody>
+                    <a:bodyPr/>
+                    <a:lstStyle/>
+                    <a:p>
+                      <a:pPr algn="l" indent="0" marL="0">
+                        <a:buNone/>
+                      </a:pPr>
+                      <a:r>
+                        <a:rPr lang="en-US" sz="1000" dirty="0">
+                          <a:solidFill>
+                            <a:srgbClr val="1A1A1A"/>
+                          </a:solidFill>
+                          <a:latin typeface="Calibri" pitchFamily="34" charset="0"/>
+                          <a:ea typeface="Calibri" pitchFamily="34" charset="-122"/>
+                          <a:cs typeface="Calibri" pitchFamily="34" charset="-120"/>
+                        </a:rPr>
+                        <a:t>autoId</a:t>
+                      </a:r>
+                      <a:endParaRPr lang="en-US" sz="1000" dirty="0">
+                        <a:latin typeface="Calibri" charset="0"/>
+                        <a:ea typeface="Calibri" charset="0"/>
+                        <a:cs typeface="Calibri" charset="0"/>
+                      </a:endParaRPr>
+                    </a:p>
+                  </a:txBody>
+                  <a:tcPr marL="91440" marR="91440" marT="45720" marB="45720" anchor="ctr">
+                    <a:lnL w="12700" cap="flat" cmpd="sng" algn="ctr">
+                      <a:solidFill>
+                        <a:srgbClr val="DDDDDD"/>
+                      </a:solidFill>
+                      <a:prstDash val="solid"/>
+                      <a:round/>
+                      <a:headEnd type="none" w="med" len="med"/>
+                      <a:tailEnd type="none" w="med" len="med"/>
+                    </a:lnL>
+                    <a:lnR w="12700" cap="flat" cmpd="sng" algn="ctr">
+                      <a:solidFill>
+                        <a:srgbClr val="DDDDDD"/>
+                      </a:solidFill>
+                      <a:prstDash val="solid"/>
+                      <a:round/>
+                      <a:headEnd type="none" w="med" len="med"/>
+                      <a:tailEnd type="none" w="med" len="med"/>
+                    </a:lnR>
+                    <a:lnT w="12700" cap="flat" cmpd="sng" algn="ctr">
+                      <a:solidFill>
+                        <a:srgbClr val="DDDDDD"/>
+                      </a:solidFill>
+                      <a:prstDash val="solid"/>
+                      <a:round/>
+                      <a:headEnd type="none" w="med" len="med"/>
+                      <a:tailEnd type="none" w="med" len="med"/>
+                    </a:lnT>
+                    <a:lnB w="12700" cap="flat" cmpd="sng" algn="ctr">
+                      <a:solidFill>
+                        <a:srgbClr val="DDDDDD"/>
+                      </a:solidFill>
+                      <a:prstDash val="solid"/>
+                      <a:round/>
+                      <a:headEnd type="none" w="med" len="med"/>
+                      <a:tailEnd type="none" w="med" len="med"/>
+                    </a:lnB>
+                    <a:solidFill>
+                      <a:srgbClr val="F0F0F0"/>
+                    </a:solidFill>
+                  </a:tcPr>
+                </a:tc>
+                <a:tc>
+                  <a:txBody>
+                    <a:bodyPr/>
+                    <a:lstStyle/>
+                    <a:p>
+                      <a:pPr algn="l" indent="0" marL="0">
+                        <a:buNone/>
+                      </a:pPr>
+                      <a:r>
+                        <a:rPr lang="en-US" sz="1000" dirty="0">
+                          <a:solidFill>
+                            <a:srgbClr val="1A1A1A"/>
+                          </a:solidFill>
+                          <a:latin typeface="Calibri" pitchFamily="34" charset="0"/>
+                          <a:ea typeface="Calibri" pitchFamily="34" charset="-122"/>
+                          <a:cs typeface="Calibri" pitchFamily="34" charset="-120"/>
+                        </a:rPr>
+                        <a:t>AUTO_ID</a:t>
+                      </a:r>
+                      <a:endParaRPr lang="en-US" sz="1000" dirty="0">
+                        <a:latin typeface="Calibri" charset="0"/>
+                        <a:ea typeface="Calibri" charset="0"/>
+                        <a:cs typeface="Calibri" charset="0"/>
+                      </a:endParaRPr>
+                    </a:p>
+                  </a:txBody>
+                  <a:tcPr marL="91440" marR="91440" marT="45720" marB="45720" anchor="ctr">
+                    <a:lnL w="12700" cap="flat" cmpd="sng" algn="ctr">
+                      <a:solidFill>
+                        <a:srgbClr val="DDDDDD"/>
+                      </a:solidFill>
+                      <a:prstDash val="solid"/>
+                      <a:round/>
+                      <a:headEnd type="none" w="med" len="med"/>
+                      <a:tailEnd type="none" w="med" len="med"/>
+                    </a:lnL>
+                    <a:lnR w="12700" cap="flat" cmpd="sng" algn="ctr">
+                      <a:solidFill>
+                        <a:srgbClr val="DDDDDD"/>
+                      </a:solidFill>
+                      <a:prstDash val="solid"/>
+                      <a:round/>
+                      <a:headEnd type="none" w="med" len="med"/>
+                      <a:tailEnd type="none" w="med" len="med"/>
+                    </a:lnR>
+                    <a:lnT w="12700" cap="flat" cmpd="sng" algn="ctr">
+                      <a:solidFill>
+                        <a:srgbClr val="DDDDDD"/>
+                      </a:solidFill>
+                      <a:prstDash val="solid"/>
+                      <a:round/>
+                      <a:headEnd type="none" w="med" len="med"/>
+                      <a:tailEnd type="none" w="med" len="med"/>
+                    </a:lnT>
+                    <a:lnB w="12700" cap="flat" cmpd="sng" algn="ctr">
+                      <a:solidFill>
+                        <a:srgbClr val="DDDDDD"/>
+                      </a:solidFill>
+                      <a:prstDash val="solid"/>
+                      <a:round/>
+                      <a:headEnd type="none" w="med" len="med"/>
+                      <a:tailEnd type="none" w="med" len="med"/>
+                    </a:lnB>
+                    <a:solidFill>
+                      <a:srgbClr val="F0F0F0"/>
+                    </a:solidFill>
+                  </a:tcPr>
+                </a:tc>
+                <a:tc>
+                  <a:txBody>
+                    <a:bodyPr/>
+                    <a:lstStyle/>
+                    <a:p>
+                      <a:pPr algn="l" indent="0" marL="0">
+                        <a:buNone/>
+                      </a:pPr>
+                      <a:r>
+                        <a:rPr lang="en-US" sz="1000" dirty="0">
+                          <a:solidFill>
+                            <a:srgbClr val="1A1A1A"/>
+                          </a:solidFill>
+                          <a:latin typeface="Calibri" pitchFamily="34" charset="0"/>
+                          <a:ea typeface="Calibri" pitchFamily="34" charset="-122"/>
+                          <a:cs typeface="Calibri" pitchFamily="34" charset="-120"/>
+                        </a:rPr>
+                        <a:t>integer</a:t>
+                      </a:r>
+                      <a:endParaRPr lang="en-US" sz="1000" dirty="0">
+                        <a:latin typeface="Calibri" charset="0"/>
+                        <a:ea typeface="Calibri" charset="0"/>
+                        <a:cs typeface="Calibri" charset="0"/>
+                      </a:endParaRPr>
+                    </a:p>
+                  </a:txBody>
+                  <a:tcPr marL="91440" marR="91440" marT="45720" marB="45720" anchor="ctr">
+                    <a:lnL w="12700" cap="flat" cmpd="sng" algn="ctr">
+                      <a:solidFill>
+                        <a:srgbClr val="DDDDDD"/>
+                      </a:solidFill>
+                      <a:prstDash val="solid"/>
+                      <a:round/>
+                      <a:headEnd type="none" w="med" len="med"/>
+                      <a:tailEnd type="none" w="med" len="med"/>
+                    </a:lnL>
+                    <a:lnR w="12700" cap="flat" cmpd="sng" algn="ctr">
+                      <a:solidFill>
+                        <a:srgbClr val="DDDDDD"/>
+                      </a:solidFill>
+                      <a:prstDash val="solid"/>
+                      <a:round/>
+                      <a:headEnd type="none" w="med" len="med"/>
+                      <a:tailEnd type="none" w="med" len="med"/>
+                    </a:lnR>
+                    <a:lnT w="12700" cap="flat" cmpd="sng" algn="ctr">
+                      <a:solidFill>
+                        <a:srgbClr val="DDDDDD"/>
+                      </a:solidFill>
+                      <a:prstDash val="solid"/>
+                      <a:round/>
+                      <a:headEnd type="none" w="med" len="med"/>
+                      <a:tailEnd type="none" w="med" len="med"/>
+                    </a:lnT>
+                    <a:lnB w="12700" cap="flat" cmpd="sng" algn="ctr">
+                      <a:solidFill>
+                        <a:srgbClr val="DDDDDD"/>
+                      </a:solidFill>
+                      <a:prstDash val="solid"/>
+                      <a:round/>
+                      <a:headEnd type="none" w="med" len="med"/>
+                      <a:tailEnd type="none" w="med" len="med"/>
+                    </a:lnB>
+                    <a:solidFill>
+                      <a:srgbClr val="F0F0F0"/>
+                    </a:solidFill>
+                  </a:tcPr>
+                </a:tc>
+                <a:tc>
+                  <a:txBody>
+                    <a:bodyPr/>
+                    <a:lstStyle/>
+                    <a:p>
+                      <a:pPr algn="l" indent="0" marL="0">
+                        <a:buNone/>
+                      </a:pPr>
+                      <a:r>
+                        <a:rPr lang="en-US" sz="1000" dirty="0">
+                          <a:solidFill>
+                            <a:srgbClr val="1A1A1A"/>
+                          </a:solidFill>
+                          <a:latin typeface="Calibri" pitchFamily="34" charset="0"/>
+                          <a:ea typeface="Calibri" pitchFamily="34" charset="-122"/>
+                          <a:cs typeface="Calibri" pitchFamily="34" charset="-120"/>
+                        </a:rPr>
+                        <a:t>FK → AUTOR</a:t>
+                      </a:r>
+                      <a:endParaRPr lang="en-US" sz="1000" dirty="0">
+                        <a:latin typeface="Calibri" charset="0"/>
+                        <a:ea typeface="Calibri" charset="0"/>
+                        <a:cs typeface="Calibri" charset="0"/>
+                      </a:endParaRPr>
+                    </a:p>
+                  </a:txBody>
+                  <a:tcPr marL="91440" marR="91440" marT="45720" marB="45720" anchor="ctr">
+                    <a:lnL w="12700" cap="flat" cmpd="sng" algn="ctr">
+                      <a:solidFill>
+                        <a:srgbClr val="DDDDDD"/>
+                      </a:solidFill>
+                      <a:prstDash val="solid"/>
+                      <a:round/>
+                      <a:headEnd type="none" w="med" len="med"/>
+                      <a:tailEnd type="none" w="med" len="med"/>
+                    </a:lnL>
+                    <a:lnR w="12700" cap="flat" cmpd="sng" algn="ctr">
+                      <a:solidFill>
+                        <a:srgbClr val="DDDDDD"/>
+                      </a:solidFill>
+                      <a:prstDash val="solid"/>
+                      <a:round/>
+                      <a:headEnd type="none" w="med" len="med"/>
+                      <a:tailEnd type="none" w="med" len="med"/>
+                    </a:lnR>
+                    <a:lnT w="12700" cap="flat" cmpd="sng" algn="ctr">
+                      <a:solidFill>
+                        <a:srgbClr val="DDDDDD"/>
+                      </a:solidFill>
+                      <a:prstDash val="solid"/>
+                      <a:round/>
+                      <a:headEnd type="none" w="med" len="med"/>
+                      <a:tailEnd type="none" w="med" len="med"/>
+                    </a:lnT>
+                    <a:lnB w="12700" cap="flat" cmpd="sng" algn="ctr">
+                      <a:solidFill>
+                        <a:srgbClr val="DDDDDD"/>
+                      </a:solidFill>
+                      <a:prstDash val="solid"/>
+                      <a:round/>
+                      <a:headEnd type="none" w="med" len="med"/>
+                      <a:tailEnd type="none" w="med" len="med"/>
+                    </a:lnB>
+                    <a:solidFill>
+                      <a:srgbClr val="F0F0F0"/>
+                    </a:solidFill>
+                  </a:tcPr>
+                </a:tc>
+                <a:tc>
+                  <a:txBody>
+                    <a:bodyPr/>
+                    <a:lstStyle/>
+                    <a:p>
+                      <a:pPr algn="l" indent="0" marL="0">
+                        <a:buNone/>
+                      </a:pPr>
+                      <a:r>
+                        <a:rPr lang="en-US" sz="1000" dirty="0">
+                          <a:solidFill>
+                            <a:srgbClr val="1A1A1A"/>
+                          </a:solidFill>
+                          <a:latin typeface="Calibri" pitchFamily="34" charset="0"/>
+                          <a:ea typeface="Calibri" pitchFamily="34" charset="-122"/>
+                          <a:cs typeface="Calibri" pitchFamily="34" charset="-120"/>
+                        </a:rPr>
+                        <a:t>Autor del cuento</a:t>
+                      </a:r>
+                      <a:endParaRPr lang="en-US" sz="1000" dirty="0">
+                        <a:latin typeface="Calibri" charset="0"/>
+                        <a:ea typeface="Calibri" charset="0"/>
+                        <a:cs typeface="Calibri" charset="0"/>
+                      </a:endParaRPr>
+                    </a:p>
+                  </a:txBody>
+                  <a:tcPr marL="91440" marR="91440" marT="45720" marB="45720" anchor="ctr">
+                    <a:lnL w="12700" cap="flat" cmpd="sng" algn="ctr">
+                      <a:solidFill>
+                        <a:srgbClr val="DDDDDD"/>
+                      </a:solidFill>
+                      <a:prstDash val="solid"/>
+                      <a:round/>
+                      <a:headEnd type="none" w="med" len="med"/>
+                      <a:tailEnd type="none" w="med" len="med"/>
+                    </a:lnL>
+                    <a:lnR w="12700" cap="flat" cmpd="sng" algn="ctr">
+                      <a:solidFill>
+                        <a:srgbClr val="DDDDDD"/>
+                      </a:solidFill>
+                      <a:prstDash val="solid"/>
+                      <a:round/>
+                      <a:headEnd type="none" w="med" len="med"/>
+                      <a:tailEnd type="none" w="med" len="med"/>
+                    </a:lnR>
+                    <a:lnT w="12700" cap="flat" cmpd="sng" algn="ctr">
+                      <a:solidFill>
+                        <a:srgbClr val="DDDDDD"/>
+                      </a:solidFill>
+                      <a:prstDash val="solid"/>
+                      <a:round/>
+                      <a:headEnd type="none" w="med" len="med"/>
+                      <a:tailEnd type="none" w="med" len="med"/>
+                    </a:lnT>
+                    <a:lnB w="12700" cap="flat" cmpd="sng" algn="ctr">
+                      <a:solidFill>
+                        <a:srgbClr val="DDDDDD"/>
+                      </a:solidFill>
+                      <a:prstDash val="solid"/>
+                      <a:round/>
+                      <a:headEnd type="none" w="med" len="med"/>
+                      <a:tailEnd type="none" w="med" len="med"/>
+                    </a:lnB>
+                    <a:solidFill>
+                      <a:srgbClr val="F0F0F0"/>
+                    </a:solidFill>
+                  </a:tcPr>
+                </a:tc>
+              </a:tr>
+              <a:tr h="297180">
+                <a:tc>
+                  <a:txBody>
+                    <a:bodyPr/>
+                    <a:lstStyle/>
+                    <a:p>
+                      <a:pPr algn="l" indent="0" marL="0">
+                        <a:buNone/>
+                      </a:pPr>
+                      <a:r>
+                        <a:rPr lang="en-US" sz="1000" dirty="0">
+                          <a:solidFill>
+                            <a:srgbClr val="1A1A1A"/>
+                          </a:solidFill>
+                          <a:latin typeface="Calibri" pitchFamily="34" charset="0"/>
+                          <a:ea typeface="Calibri" pitchFamily="34" charset="-122"/>
+                          <a:cs typeface="Calibri" pitchFamily="34" charset="-120"/>
+                        </a:rPr>
+                        <a:t>categId</a:t>
+                      </a:r>
+                      <a:endParaRPr lang="en-US" sz="1000" dirty="0">
+                        <a:latin typeface="Calibri" charset="0"/>
+                        <a:ea typeface="Calibri" charset="0"/>
+                        <a:cs typeface="Calibri" charset="0"/>
+                      </a:endParaRPr>
+                    </a:p>
+                  </a:txBody>
+                  <a:tcPr marL="91440" marR="91440" marT="45720" marB="45720" anchor="ctr">
+                    <a:lnL w="12700" cap="flat" cmpd="sng" algn="ctr">
+                      <a:solidFill>
+                        <a:srgbClr val="DDDDDD"/>
+                      </a:solidFill>
+                      <a:prstDash val="solid"/>
+                      <a:round/>
+                      <a:headEnd type="none" w="med" len="med"/>
+                      <a:tailEnd type="none" w="med" len="med"/>
+                    </a:lnL>
+                    <a:lnR w="12700" cap="flat" cmpd="sng" algn="ctr">
+                      <a:solidFill>
+                        <a:srgbClr val="DDDDDD"/>
+                      </a:solidFill>
+                      <a:prstDash val="solid"/>
+                      <a:round/>
+                      <a:headEnd type="none" w="med" len="med"/>
+                      <a:tailEnd type="none" w="med" len="med"/>
+                    </a:lnR>
+                    <a:lnT w="12700" cap="flat" cmpd="sng" algn="ctr">
+                      <a:solidFill>
+                        <a:srgbClr val="DDDDDD"/>
+                      </a:solidFill>
+                      <a:prstDash val="solid"/>
+                      <a:round/>
+                      <a:headEnd type="none" w="med" len="med"/>
+                      <a:tailEnd type="none" w="med" len="med"/>
+                    </a:lnT>
+                    <a:lnB w="12700" cap="flat" cmpd="sng" algn="ctr">
+                      <a:solidFill>
+                        <a:srgbClr val="DDDDDD"/>
+                      </a:solidFill>
+                      <a:prstDash val="solid"/>
+                      <a:round/>
+                      <a:headEnd type="none" w="med" len="med"/>
+                      <a:tailEnd type="none" w="med" len="med"/>
+                    </a:lnB>
+                    <a:solidFill>
+                      <a:srgbClr val="FFFFFF"/>
+                    </a:solidFill>
+                  </a:tcPr>
+                </a:tc>
+                <a:tc>
+                  <a:txBody>
+                    <a:bodyPr/>
+                    <a:lstStyle/>
+                    <a:p>
+                      <a:pPr algn="l" indent="0" marL="0">
+                        <a:buNone/>
+                      </a:pPr>
+                      <a:r>
+                        <a:rPr lang="en-US" sz="1000" dirty="0">
+                          <a:solidFill>
+                            <a:srgbClr val="1A1A1A"/>
+                          </a:solidFill>
+                          <a:latin typeface="Calibri" pitchFamily="34" charset="0"/>
+                          <a:ea typeface="Calibri" pitchFamily="34" charset="-122"/>
+                          <a:cs typeface="Calibri" pitchFamily="34" charset="-120"/>
+                        </a:rPr>
+                        <a:t>CATE_ID</a:t>
+                      </a:r>
+                      <a:endParaRPr lang="en-US" sz="1000" dirty="0">
+                        <a:latin typeface="Calibri" charset="0"/>
+                        <a:ea typeface="Calibri" charset="0"/>
+                        <a:cs typeface="Calibri" charset="0"/>
+                      </a:endParaRPr>
+                    </a:p>
+                  </a:txBody>
+                  <a:tcPr marL="91440" marR="91440" marT="45720" marB="45720" anchor="ctr">
+                    <a:lnL w="12700" cap="flat" cmpd="sng" algn="ctr">
+                      <a:solidFill>
+                        <a:srgbClr val="DDDDDD"/>
+                      </a:solidFill>
+                      <a:prstDash val="solid"/>
+                      <a:round/>
+                      <a:headEnd type="none" w="med" len="med"/>
+                      <a:tailEnd type="none" w="med" len="med"/>
+                    </a:lnL>
+                    <a:lnR w="12700" cap="flat" cmpd="sng" algn="ctr">
+                      <a:solidFill>
+                        <a:srgbClr val="DDDDDD"/>
+                      </a:solidFill>
+                      <a:prstDash val="solid"/>
+                      <a:round/>
+                      <a:headEnd type="none" w="med" len="med"/>
+                      <a:tailEnd type="none" w="med" len="med"/>
+                    </a:lnR>
+                    <a:lnT w="12700" cap="flat" cmpd="sng" algn="ctr">
+                      <a:solidFill>
+                        <a:srgbClr val="DDDDDD"/>
+                      </a:solidFill>
+                      <a:prstDash val="solid"/>
+                      <a:round/>
+                      <a:headEnd type="none" w="med" len="med"/>
+                      <a:tailEnd type="none" w="med" len="med"/>
+                    </a:lnT>
+                    <a:lnB w="12700" cap="flat" cmpd="sng" algn="ctr">
+                      <a:solidFill>
+                        <a:srgbClr val="DDDDDD"/>
+                      </a:solidFill>
+                      <a:prstDash val="solid"/>
+                      <a:round/>
+                      <a:headEnd type="none" w="med" len="med"/>
+                      <a:tailEnd type="none" w="med" len="med"/>
+                    </a:lnB>
+                    <a:solidFill>
+                      <a:srgbClr val="FFFFFF"/>
+                    </a:solidFill>
+                  </a:tcPr>
+                </a:tc>
+                <a:tc>
+                  <a:txBody>
+                    <a:bodyPr/>
+                    <a:lstStyle/>
+                    <a:p>
+                      <a:pPr algn="l" indent="0" marL="0">
+                        <a:buNone/>
+                      </a:pPr>
+                      <a:r>
+                        <a:rPr lang="en-US" sz="1000" dirty="0">
+                          <a:solidFill>
+                            <a:srgbClr val="1A1A1A"/>
+                          </a:solidFill>
+                          <a:latin typeface="Calibri" pitchFamily="34" charset="0"/>
+                          <a:ea typeface="Calibri" pitchFamily="34" charset="-122"/>
+                          <a:cs typeface="Calibri" pitchFamily="34" charset="-120"/>
+                        </a:rPr>
+                        <a:t>integer</a:t>
+                      </a:r>
+                      <a:endParaRPr lang="en-US" sz="1000" dirty="0">
+                        <a:latin typeface="Calibri" charset="0"/>
+                        <a:ea typeface="Calibri" charset="0"/>
+                        <a:cs typeface="Calibri" charset="0"/>
+                      </a:endParaRPr>
+                    </a:p>
+                  </a:txBody>
+                  <a:tcPr marL="91440" marR="91440" marT="45720" marB="45720" anchor="ctr">
+                    <a:lnL w="12700" cap="flat" cmpd="sng" algn="ctr">
+                      <a:solidFill>
+                        <a:srgbClr val="DDDDDD"/>
+                      </a:solidFill>
+                      <a:prstDash val="solid"/>
+                      <a:round/>
+                      <a:headEnd type="none" w="med" len="med"/>
+                      <a:tailEnd type="none" w="med" len="med"/>
+                    </a:lnL>
+                    <a:lnR w="12700" cap="flat" cmpd="sng" algn="ctr">
+                      <a:solidFill>
+                        <a:srgbClr val="DDDDDD"/>
+                      </a:solidFill>
+                      <a:prstDash val="solid"/>
+                      <a:round/>
+                      <a:headEnd type="none" w="med" len="med"/>
+                      <a:tailEnd type="none" w="med" len="med"/>
+                    </a:lnR>
+                    <a:lnT w="12700" cap="flat" cmpd="sng" algn="ctr">
+                      <a:solidFill>
+                        <a:srgbClr val="DDDDDD"/>
+                      </a:solidFill>
+                      <a:prstDash val="solid"/>
+                      <a:round/>
+                      <a:headEnd type="none" w="med" len="med"/>
+                      <a:tailEnd type="none" w="med" len="med"/>
+                    </a:lnT>
+                    <a:lnB w="12700" cap="flat" cmpd="sng" algn="ctr">
+                      <a:solidFill>
+                        <a:srgbClr val="DDDDDD"/>
+                      </a:solidFill>
+                      <a:prstDash val="solid"/>
+                      <a:round/>
+                      <a:headEnd type="none" w="med" len="med"/>
+                      <a:tailEnd type="none" w="med" len="med"/>
+                    </a:lnB>
+                    <a:solidFill>
+                      <a:srgbClr val="FFFFFF"/>
+                    </a:solidFill>
+                  </a:tcPr>
+                </a:tc>
+                <a:tc>
+                  <a:txBody>
+                    <a:bodyPr/>
+                    <a:lstStyle/>
+                    <a:p>
+                      <a:pPr algn="l" indent="0" marL="0">
+                        <a:buNone/>
+                      </a:pPr>
+                      <a:r>
+                        <a:rPr lang="en-US" sz="1000" dirty="0">
+                          <a:solidFill>
+                            <a:srgbClr val="1A1A1A"/>
+                          </a:solidFill>
+                          <a:latin typeface="Calibri" pitchFamily="34" charset="0"/>
+                          <a:ea typeface="Calibri" pitchFamily="34" charset="-122"/>
+                          <a:cs typeface="Calibri" pitchFamily="34" charset="-120"/>
+                        </a:rPr>
+                        <a:t>FK → CATEGORIA</a:t>
+                      </a:r>
+                      <a:endParaRPr lang="en-US" sz="1000" dirty="0">
+                        <a:latin typeface="Calibri" charset="0"/>
+                        <a:ea typeface="Calibri" charset="0"/>
+                        <a:cs typeface="Calibri" charset="0"/>
+                      </a:endParaRPr>
+                    </a:p>
+                  </a:txBody>
+                  <a:tcPr marL="91440" marR="91440" marT="45720" marB="45720" anchor="ctr">
+                    <a:lnL w="12700" cap="flat" cmpd="sng" algn="ctr">
+                      <a:solidFill>
+                        <a:srgbClr val="DDDDDD"/>
+                      </a:solidFill>
+                      <a:prstDash val="solid"/>
+                      <a:round/>
+                      <a:headEnd type="none" w="med" len="med"/>
+                      <a:tailEnd type="none" w="med" len="med"/>
+                    </a:lnL>
+                    <a:lnR w="12700" cap="flat" cmpd="sng" algn="ctr">
+                      <a:solidFill>
+                        <a:srgbClr val="DDDDDD"/>
+                      </a:solidFill>
+                      <a:prstDash val="solid"/>
+                      <a:round/>
+                      <a:headEnd type="none" w="med" len="med"/>
+                      <a:tailEnd type="none" w="med" len="med"/>
+                    </a:lnR>
+                    <a:lnT w="12700" cap="flat" cmpd="sng" algn="ctr">
+                      <a:solidFill>
+                        <a:srgbClr val="DDDDDD"/>
+                      </a:solidFill>
+                      <a:prstDash val="solid"/>
+                      <a:round/>
+                      <a:headEnd type="none" w="med" len="med"/>
+                      <a:tailEnd type="none" w="med" len="med"/>
+                    </a:lnT>
+                    <a:lnB w="12700" cap="flat" cmpd="sng" algn="ctr">
+                      <a:solidFill>
+                        <a:srgbClr val="DDDDDD"/>
+                      </a:solidFill>
+                      <a:prstDash val="solid"/>
+                      <a:round/>
+                      <a:headEnd type="none" w="med" len="med"/>
+                      <a:tailEnd type="none" w="med" len="med"/>
+                    </a:lnB>
+                    <a:solidFill>
+                      <a:srgbClr val="FFFFFF"/>
+                    </a:solidFill>
+                  </a:tcPr>
+                </a:tc>
+                <a:tc>
+                  <a:txBody>
+                    <a:bodyPr/>
+                    <a:lstStyle/>
+                    <a:p>
+                      <a:pPr algn="l" indent="0" marL="0">
+                        <a:buNone/>
+                      </a:pPr>
+                      <a:r>
+                        <a:rPr lang="en-US" sz="1000" dirty="0">
+                          <a:solidFill>
+                            <a:srgbClr val="1A1A1A"/>
+                          </a:solidFill>
+                          <a:latin typeface="Calibri" pitchFamily="34" charset="0"/>
+                          <a:ea typeface="Calibri" pitchFamily="34" charset="-122"/>
+                          <a:cs typeface="Calibri" pitchFamily="34" charset="-120"/>
+                        </a:rPr>
+                        <a:t>Categoría del cuento</a:t>
                       </a:r>
                       <a:endParaRPr lang="en-US" sz="1000" dirty="0">
                         <a:latin typeface="Calibri" charset="0"/>
@@ -21637,8 +19089,8 @@
         </p:nvSpPr>
         <p:spPr>
           <a:xfrm>
-            <a:off x="365760" y="2834640"/>
-            <a:ext cx="8412480" cy="2011680"/>
+            <a:off x="365760" y="3474720"/>
+            <a:ext cx="8412480" cy="1417320"/>
           </a:xfrm>
           <a:prstGeom prst="rect">
             <a:avLst/>
@@ -21662,8 +19114,8 @@
         </p:nvSpPr>
         <p:spPr>
           <a:xfrm>
-            <a:off x="475488" y="2880360"/>
-            <a:ext cx="8193024" cy="1920240"/>
+            <a:off x="475488" y="3529584"/>
+            <a:ext cx="8193024" cy="1307592"/>
           </a:xfrm>
           <a:prstGeom prst="rect">
             <a:avLst/>
@@ -21687,7 +19139,7 @@
                 <a:ea typeface="Courier New" pitchFamily="34" charset="-122"/>
                 <a:cs typeface="Courier New" pitchFamily="34" charset="-120"/>
               </a:rPr>
-              <a:t>public class Autor {</a:t>
+              <a:t>public class Cuento {</a:t>
             </a:r>
             <a:endParaRPr lang="en-US" sz="900" dirty="0"/>
           </a:p>
@@ -21704,7 +19156,7 @@
                 <a:ea typeface="Courier New" pitchFamily="34" charset="-122"/>
                 <a:cs typeface="Courier New" pitchFamily="34" charset="-120"/>
               </a:rPr>
-              <a:t>    private int idAutor;</a:t>
+              <a:t>    private int cuentoId;</a:t>
             </a:r>
             <a:endParaRPr lang="en-US" sz="900" dirty="0"/>
           </a:p>
@@ -21721,7 +19173,7 @@
                 <a:ea typeface="Courier New" pitchFamily="34" charset="-122"/>
                 <a:cs typeface="Courier New" pitchFamily="34" charset="-120"/>
               </a:rPr>
-              <a:t>    private String nombre;</a:t>
+              <a:t>    private String cuentoTitulo;</a:t>
             </a:r>
             <a:endParaRPr lang="en-US" sz="900" dirty="0"/>
           </a:p>
@@ -21738,30 +19190,7 @@
                 <a:ea typeface="Courier New" pitchFamily="34" charset="-122"/>
                 <a:cs typeface="Courier New" pitchFamily="34" charset="-120"/>
               </a:rPr>
-              <a:t>    private String email;</a:t>
-            </a:r>
-            <a:endParaRPr lang="en-US" sz="900" dirty="0"/>
-          </a:p>
-          <a:p>
-            <a:pPr algn="l" indent="0" marL="0">
-              <a:buNone/>
-            </a:pPr>
-            <a:endParaRPr lang="en-US" sz="900" dirty="0"/>
-          </a:p>
-          <a:p>
-            <a:pPr algn="l" indent="0" marL="0">
-              <a:buNone/>
-            </a:pPr>
-            <a:r>
-              <a:rPr lang="en-US" sz="900" dirty="0">
-                <a:solidFill>
-                  <a:srgbClr val="1A1A1A"/>
-                </a:solidFill>
-                <a:latin typeface="Courier New" pitchFamily="34" charset="0"/>
-                <a:ea typeface="Courier New" pitchFamily="34" charset="-122"/>
-                <a:cs typeface="Courier New" pitchFamily="34" charset="-120"/>
-              </a:rPr>
-              <a:t>    public int getIdAutor()       { return idAutor; }</a:t>
+              <a:t>    private String cuentoDescripcion;</a:t>
             </a:r>
             <a:endParaRPr lang="en-US" sz="900" dirty="0"/>
           </a:p>
@@ -21778,7 +19207,7 @@
                 <a:ea typeface="Courier New" pitchFamily="34" charset="-122"/>
                 <a:cs typeface="Courier New" pitchFamily="34" charset="-120"/>
               </a:rPr>
-              <a:t>    public void setIdAutor(int v) { this.idAutor = v; }</a:t>
+              <a:t>    private String cuentoContenido;</a:t>
             </a:r>
             <a:endParaRPr lang="en-US" sz="900" dirty="0"/>
           </a:p>
@@ -21795,7 +19224,7 @@
                 <a:ea typeface="Courier New" pitchFamily="34" charset="-122"/>
                 <a:cs typeface="Courier New" pitchFamily="34" charset="-120"/>
               </a:rPr>
-              <a:t>    public String getNombre()     { return nombre; }</a:t>
+              <a:t>    private Date cuentoFechaPublicacion;</a:t>
             </a:r>
             <a:endParaRPr lang="en-US" sz="900" dirty="0"/>
           </a:p>
@@ -21812,7 +19241,7 @@
                 <a:ea typeface="Courier New" pitchFamily="34" charset="-122"/>
                 <a:cs typeface="Courier New" pitchFamily="34" charset="-120"/>
               </a:rPr>
-              <a:t>    public void setNombre(String v){ this.nombre = v; }</a:t>
+              <a:t>    private int autoId;    // FK -&gt; Autor</a:t>
             </a:r>
             <a:endParaRPr lang="en-US" sz="900" dirty="0"/>
           </a:p>
@@ -21829,7 +19258,7 @@
                 <a:ea typeface="Courier New" pitchFamily="34" charset="-122"/>
                 <a:cs typeface="Courier New" pitchFamily="34" charset="-120"/>
               </a:rPr>
-              <a:t>    public String getEmail()      { return email; }</a:t>
+              <a:t>    private int categId;   // FK -&gt; Categoria</a:t>
             </a:r>
             <a:endParaRPr lang="en-US" sz="900" dirty="0"/>
           </a:p>
@@ -21846,7 +19275,7 @@
                 <a:ea typeface="Courier New" pitchFamily="34" charset="-122"/>
                 <a:cs typeface="Courier New" pitchFamily="34" charset="-120"/>
               </a:rPr>
-              <a:t>    public void setEmail(String v){ this.email = v; }</a:t>
+              <a:t>    // getters y setters para cada campo...</a:t>
             </a:r>
             <a:endParaRPr lang="en-US" sz="900" dirty="0"/>
           </a:p>
